--- a/output/wordlabs-re-3day.pptx
+++ b/output/wordlabs-re-3day.pptx
@@ -6040,7 +6040,7 @@
                 <a:ea typeface="Calibri" pitchFamily="34" charset="-122"/>
                 <a:cs typeface="Calibri" pitchFamily="34" charset="-120"/>
               </a:rPr>
-              <a:t>Mia had to </a:t>
+              <a:t>The students had to </a:t>
             </a:r>
             <a:pPr algn="l" indent="0" marL="0">
               <a:buNone/>
@@ -6071,7 +6071,7 @@
                 <a:ea typeface="Calibri" pitchFamily="34" charset="-122"/>
                 <a:cs typeface="Calibri" pitchFamily="34" charset="-120"/>
               </a:rPr>
-              <a:t> the cables before she could </a:t>
+              <a:t> the wires before </a:t>
             </a:r>
             <a:pPr algn="l" indent="0" marL="0">
               <a:buNone/>
@@ -6088,7 +6088,7 @@
                 <a:ea typeface="Calibri" pitchFamily="34" charset="-122"/>
                 <a:cs typeface="Calibri" pitchFamily="34" charset="-120"/>
               </a:rPr>
-              <a:t>recharge</a:t>
+              <a:t>restarting</a:t>
             </a:r>
             <a:pPr algn="l" indent="0" marL="0">
               <a:buNone/>
@@ -6102,7 +6102,7 @@
                 <a:ea typeface="Calibri" pitchFamily="34" charset="-122"/>
                 <a:cs typeface="Calibri" pitchFamily="34" charset="-120"/>
               </a:rPr>
-              <a:t> her tablet.</a:t>
+              <a:t> the experiment.</a:t>
             </a:r>
             <a:endParaRPr lang="en-US" sz="1800" dirty="0"/>
           </a:p>
@@ -6385,7 +6385,7 @@
                 <a:ea typeface="Trebuchet MS" pitchFamily="34" charset="-122"/>
                 <a:cs typeface="Trebuchet MS" pitchFamily="34" charset="-120"/>
               </a:rPr>
-              <a:t>recharge</a:t>
+              <a:t>restarting</a:t>
             </a:r>
             <a:endParaRPr lang="en-US" sz="1400" dirty="0"/>
           </a:p>
@@ -6870,6 +6870,138 @@
         <p:spPr>
           <a:xfrm>
             <a:off x="365760" y="2240280"/>
+            <a:ext cx="1371600" cy="841248"/>
+          </a:xfrm>
+          <a:prstGeom prst="rect">
+            <a:avLst>
+              <a:gd name="adj" fmla="val 6522"/>
+            </a:avLst>
+          </a:prstGeom>
+          <a:solidFill>
+            <a:srgbClr val="E2E8F0"/>
+          </a:solidFill>
+          <a:ln w="12700">
+            <a:solidFill>
+              <a:srgbClr val="E2E8F0"/>
+            </a:solidFill>
+            <a:prstDash val="solid"/>
+          </a:ln>
+        </p:spPr>
+      </p:sp>
+      <p:sp>
+        <p:nvSpPr>
+          <p:cNvPr id="15" name="Text 13"/>
+          <p:cNvSpPr/>
+          <p:nvPr/>
+        </p:nvSpPr>
+        <p:spPr>
+          <a:xfrm>
+            <a:off x="365760" y="2240280"/>
+            <a:ext cx="1371600" cy="841248"/>
+          </a:xfrm>
+          <a:prstGeom prst="rect">
+            <a:avLst/>
+          </a:prstGeom>
+          <a:noFill/>
+          <a:ln/>
+        </p:spPr>
+        <p:txBody>
+          <a:bodyPr wrap="square" lIns="0" tIns="0" rIns="0" bIns="0" rtlCol="0" anchor="ctr"/>
+          <a:lstStyle/>
+          <a:p>
+            <a:pPr algn="ctr" indent="0" marL="0">
+              <a:buNone/>
+            </a:pPr>
+            <a:r>
+              <a:rPr lang="en-US" sz="1100" b="1" dirty="0">
+                <a:solidFill>
+                  <a:srgbClr val="475569"/>
+                </a:solidFill>
+                <a:latin typeface="Trebuchet MS" pitchFamily="34" charset="0"/>
+                <a:ea typeface="Trebuchet MS" pitchFamily="34" charset="-122"/>
+                <a:cs typeface="Trebuchet MS" pitchFamily="34" charset="-120"/>
+              </a:rPr>
+              <a:t>Morphemes</a:t>
+            </a:r>
+            <a:endParaRPr lang="en-US" sz="1100" dirty="0"/>
+          </a:p>
+        </p:txBody>
+      </p:sp>
+      <p:sp>
+        <p:nvSpPr>
+          <p:cNvPr id="16" name="Shape 14"/>
+          <p:cNvSpPr/>
+          <p:nvPr/>
+        </p:nvSpPr>
+        <p:spPr>
+          <a:xfrm>
+            <a:off x="1874520" y="2240280"/>
+            <a:ext cx="6903720" cy="841248"/>
+          </a:xfrm>
+          <a:prstGeom prst="rect">
+            <a:avLst>
+              <a:gd name="adj" fmla="val 6522"/>
+            </a:avLst>
+          </a:prstGeom>
+          <a:solidFill>
+            <a:srgbClr val="F8FAFC"/>
+          </a:solidFill>
+          <a:ln w="12700">
+            <a:solidFill>
+              <a:srgbClr val="E2E8F0"/>
+            </a:solidFill>
+            <a:prstDash val="dash"/>
+          </a:ln>
+        </p:spPr>
+      </p:sp>
+      <p:sp>
+        <p:nvSpPr>
+          <p:cNvPr id="17" name="Text 15"/>
+          <p:cNvSpPr/>
+          <p:nvPr/>
+        </p:nvSpPr>
+        <p:spPr>
+          <a:xfrm>
+            <a:off x="1874520" y="2240280"/>
+            <a:ext cx="6903720" cy="841248"/>
+          </a:xfrm>
+          <a:prstGeom prst="rect">
+            <a:avLst/>
+          </a:prstGeom>
+          <a:noFill/>
+          <a:ln/>
+        </p:spPr>
+        <p:txBody>
+          <a:bodyPr wrap="square" rtlCol="0" anchor="ctr"/>
+          <a:lstStyle/>
+          <a:p>
+            <a:pPr algn="ctr" indent="0" marL="0">
+              <a:buNone/>
+            </a:pPr>
+            <a:r>
+              <a:rPr lang="en-US" sz="1100" i="1" dirty="0">
+                <a:solidFill>
+                  <a:srgbClr val="CBD5E1"/>
+                </a:solidFill>
+                <a:latin typeface="Calibri" pitchFamily="34" charset="0"/>
+                <a:ea typeface="Calibri" pitchFamily="34" charset="-122"/>
+                <a:cs typeface="Calibri" pitchFamily="34" charset="-120"/>
+              </a:rPr>
+              <a:t>Write here...</a:t>
+            </a:r>
+            <a:endParaRPr lang="en-US" sz="1100" dirty="0"/>
+          </a:p>
+        </p:txBody>
+      </p:sp>
+      <p:sp>
+        <p:nvSpPr>
+          <p:cNvPr id="18" name="Shape 16"/>
+          <p:cNvSpPr/>
+          <p:nvPr/>
+        </p:nvSpPr>
+        <p:spPr>
+          <a:xfrm>
+            <a:off x="365760" y="3273552"/>
             <a:ext cx="1371600" cy="658368"/>
           </a:xfrm>
           <a:prstGeom prst="rect">
@@ -6890,13 +7022,13 @@
       </p:sp>
       <p:sp>
         <p:nvSpPr>
-          <p:cNvPr id="15" name="Text 13"/>
-          <p:cNvSpPr/>
-          <p:nvPr/>
-        </p:nvSpPr>
-        <p:spPr>
-          <a:xfrm>
-            <a:off x="365760" y="2240280"/>
+          <p:cNvPr id="19" name="Text 17"/>
+          <p:cNvSpPr/>
+          <p:nvPr/>
+        </p:nvSpPr>
+        <p:spPr>
+          <a:xfrm>
+            <a:off x="365760" y="3273552"/>
             <a:ext cx="1371600" cy="658368"/>
           </a:xfrm>
           <a:prstGeom prst="rect">
@@ -6921,7 +7053,7 @@
                 <a:ea typeface="Trebuchet MS" pitchFamily="34" charset="-122"/>
                 <a:cs typeface="Trebuchet MS" pitchFamily="34" charset="-120"/>
               </a:rPr>
-              <a:t>Morphemes</a:t>
+              <a:t>Syllables</a:t>
             </a:r>
             <a:endParaRPr lang="en-US" sz="1100" dirty="0"/>
           </a:p>
@@ -6929,13 +7061,13 @@
       </p:sp>
       <p:sp>
         <p:nvSpPr>
-          <p:cNvPr id="16" name="Shape 14"/>
-          <p:cNvSpPr/>
-          <p:nvPr/>
-        </p:nvSpPr>
-        <p:spPr>
-          <a:xfrm>
-            <a:off x="1874520" y="2240280"/>
+          <p:cNvPr id="20" name="Shape 18"/>
+          <p:cNvSpPr/>
+          <p:nvPr/>
+        </p:nvSpPr>
+        <p:spPr>
+          <a:xfrm>
+            <a:off x="1874520" y="3273552"/>
             <a:ext cx="6903720" cy="658368"/>
           </a:xfrm>
           <a:prstGeom prst="rect">
@@ -6956,13 +7088,13 @@
       </p:sp>
       <p:sp>
         <p:nvSpPr>
-          <p:cNvPr id="17" name="Text 15"/>
-          <p:cNvSpPr/>
-          <p:nvPr/>
-        </p:nvSpPr>
-        <p:spPr>
-          <a:xfrm>
-            <a:off x="1874520" y="2240280"/>
+          <p:cNvPr id="21" name="Text 19"/>
+          <p:cNvSpPr/>
+          <p:nvPr/>
+        </p:nvSpPr>
+        <p:spPr>
+          <a:xfrm>
+            <a:off x="1874520" y="3273552"/>
             <a:ext cx="6903720" cy="658368"/>
           </a:xfrm>
           <a:prstGeom prst="rect">
@@ -6995,13 +7127,13 @@
       </p:sp>
       <p:sp>
         <p:nvSpPr>
-          <p:cNvPr id="18" name="Shape 16"/>
-          <p:cNvSpPr/>
-          <p:nvPr/>
-        </p:nvSpPr>
-        <p:spPr>
-          <a:xfrm>
-            <a:off x="365760" y="3182112"/>
+          <p:cNvPr id="22" name="Shape 20"/>
+          <p:cNvSpPr/>
+          <p:nvPr/>
+        </p:nvSpPr>
+        <p:spPr>
+          <a:xfrm>
+            <a:off x="365760" y="4096512"/>
             <a:ext cx="1371600" cy="658368"/>
           </a:xfrm>
           <a:prstGeom prst="rect">
@@ -7022,13 +7154,13 @@
       </p:sp>
       <p:sp>
         <p:nvSpPr>
-          <p:cNvPr id="19" name="Text 17"/>
-          <p:cNvSpPr/>
-          <p:nvPr/>
-        </p:nvSpPr>
-        <p:spPr>
-          <a:xfrm>
-            <a:off x="365760" y="3182112"/>
+          <p:cNvPr id="23" name="Text 21"/>
+          <p:cNvSpPr/>
+          <p:nvPr/>
+        </p:nvSpPr>
+        <p:spPr>
+          <a:xfrm>
+            <a:off x="365760" y="4096512"/>
             <a:ext cx="1371600" cy="658368"/>
           </a:xfrm>
           <a:prstGeom prst="rect">
@@ -7053,7 +7185,7 @@
                 <a:ea typeface="Trebuchet MS" pitchFamily="34" charset="-122"/>
                 <a:cs typeface="Trebuchet MS" pitchFamily="34" charset="-120"/>
               </a:rPr>
-              <a:t>Syllables</a:t>
+              <a:t>Phonemes</a:t>
             </a:r>
             <a:endParaRPr lang="en-US" sz="1100" dirty="0"/>
           </a:p>
@@ -7061,13 +7193,13 @@
       </p:sp>
       <p:sp>
         <p:nvSpPr>
-          <p:cNvPr id="20" name="Shape 18"/>
-          <p:cNvSpPr/>
-          <p:nvPr/>
-        </p:nvSpPr>
-        <p:spPr>
-          <a:xfrm>
-            <a:off x="1874520" y="3182112"/>
+          <p:cNvPr id="24" name="Shape 22"/>
+          <p:cNvSpPr/>
+          <p:nvPr/>
+        </p:nvSpPr>
+        <p:spPr>
+          <a:xfrm>
+            <a:off x="1874520" y="4096512"/>
             <a:ext cx="6903720" cy="658368"/>
           </a:xfrm>
           <a:prstGeom prst="rect">
@@ -7088,145 +7220,13 @@
       </p:sp>
       <p:sp>
         <p:nvSpPr>
-          <p:cNvPr id="21" name="Text 19"/>
-          <p:cNvSpPr/>
-          <p:nvPr/>
-        </p:nvSpPr>
-        <p:spPr>
-          <a:xfrm>
-            <a:off x="1874520" y="3182112"/>
-            <a:ext cx="6903720" cy="658368"/>
-          </a:xfrm>
-          <a:prstGeom prst="rect">
-            <a:avLst/>
-          </a:prstGeom>
-          <a:noFill/>
-          <a:ln/>
-        </p:spPr>
-        <p:txBody>
-          <a:bodyPr wrap="square" rtlCol="0" anchor="ctr"/>
-          <a:lstStyle/>
-          <a:p>
-            <a:pPr algn="ctr" indent="0" marL="0">
-              <a:buNone/>
-            </a:pPr>
-            <a:r>
-              <a:rPr lang="en-US" sz="1100" i="1" dirty="0">
-                <a:solidFill>
-                  <a:srgbClr val="CBD5E1"/>
-                </a:solidFill>
-                <a:latin typeface="Calibri" pitchFamily="34" charset="0"/>
-                <a:ea typeface="Calibri" pitchFamily="34" charset="-122"/>
-                <a:cs typeface="Calibri" pitchFamily="34" charset="-120"/>
-              </a:rPr>
-              <a:t>Write here...</a:t>
-            </a:r>
-            <a:endParaRPr lang="en-US" sz="1100" dirty="0"/>
-          </a:p>
-        </p:txBody>
-      </p:sp>
-      <p:sp>
-        <p:nvSpPr>
-          <p:cNvPr id="22" name="Shape 20"/>
-          <p:cNvSpPr/>
-          <p:nvPr/>
-        </p:nvSpPr>
-        <p:spPr>
-          <a:xfrm>
-            <a:off x="365760" y="4005072"/>
-            <a:ext cx="1371600" cy="658368"/>
-          </a:xfrm>
-          <a:prstGeom prst="rect">
-            <a:avLst>
-              <a:gd name="adj" fmla="val 8333"/>
-            </a:avLst>
-          </a:prstGeom>
-          <a:solidFill>
-            <a:srgbClr val="E2E8F0"/>
-          </a:solidFill>
-          <a:ln w="12700">
-            <a:solidFill>
-              <a:srgbClr val="E2E8F0"/>
-            </a:solidFill>
-            <a:prstDash val="solid"/>
-          </a:ln>
-        </p:spPr>
-      </p:sp>
-      <p:sp>
-        <p:nvSpPr>
-          <p:cNvPr id="23" name="Text 21"/>
-          <p:cNvSpPr/>
-          <p:nvPr/>
-        </p:nvSpPr>
-        <p:spPr>
-          <a:xfrm>
-            <a:off x="365760" y="4005072"/>
-            <a:ext cx="1371600" cy="658368"/>
-          </a:xfrm>
-          <a:prstGeom prst="rect">
-            <a:avLst/>
-          </a:prstGeom>
-          <a:noFill/>
-          <a:ln/>
-        </p:spPr>
-        <p:txBody>
-          <a:bodyPr wrap="square" lIns="0" tIns="0" rIns="0" bIns="0" rtlCol="0" anchor="ctr"/>
-          <a:lstStyle/>
-          <a:p>
-            <a:pPr algn="ctr" indent="0" marL="0">
-              <a:buNone/>
-            </a:pPr>
-            <a:r>
-              <a:rPr lang="en-US" sz="1100" b="1" dirty="0">
-                <a:solidFill>
-                  <a:srgbClr val="475569"/>
-                </a:solidFill>
-                <a:latin typeface="Trebuchet MS" pitchFamily="34" charset="0"/>
-                <a:ea typeface="Trebuchet MS" pitchFamily="34" charset="-122"/>
-                <a:cs typeface="Trebuchet MS" pitchFamily="34" charset="-120"/>
-              </a:rPr>
-              <a:t>Phonemes</a:t>
-            </a:r>
-            <a:endParaRPr lang="en-US" sz="1100" dirty="0"/>
-          </a:p>
-        </p:txBody>
-      </p:sp>
-      <p:sp>
-        <p:nvSpPr>
-          <p:cNvPr id="24" name="Shape 22"/>
-          <p:cNvSpPr/>
-          <p:nvPr/>
-        </p:nvSpPr>
-        <p:spPr>
-          <a:xfrm>
-            <a:off x="1874520" y="4005072"/>
-            <a:ext cx="6903720" cy="658368"/>
-          </a:xfrm>
-          <a:prstGeom prst="rect">
-            <a:avLst>
-              <a:gd name="adj" fmla="val 8333"/>
-            </a:avLst>
-          </a:prstGeom>
-          <a:solidFill>
-            <a:srgbClr val="F8FAFC"/>
-          </a:solidFill>
-          <a:ln w="12700">
-            <a:solidFill>
-              <a:srgbClr val="E2E8F0"/>
-            </a:solidFill>
-            <a:prstDash val="dash"/>
-          </a:ln>
-        </p:spPr>
-      </p:sp>
-      <p:sp>
-        <p:nvSpPr>
           <p:cNvPr id="25" name="Text 23"/>
           <p:cNvSpPr/>
           <p:nvPr/>
         </p:nvSpPr>
         <p:spPr>
           <a:xfrm>
-            <a:off x="1874520" y="4005072"/>
+            <a:off x="1874520" y="4096512"/>
             <a:ext cx="6903720" cy="658368"/>
           </a:xfrm>
           <a:prstGeom prst="rect">
@@ -7697,11 +7697,11 @@
         <p:spPr>
           <a:xfrm>
             <a:off x="365760" y="2240280"/>
-            <a:ext cx="1371600" cy="658368"/>
+            <a:ext cx="1371600" cy="841248"/>
           </a:xfrm>
           <a:prstGeom prst="rect">
             <a:avLst>
-              <a:gd name="adj" fmla="val 8333"/>
+              <a:gd name="adj" fmla="val 6522"/>
             </a:avLst>
           </a:prstGeom>
           <a:solidFill>
@@ -7724,7 +7724,7 @@
         <p:spPr>
           <a:xfrm>
             <a:off x="365760" y="2240280"/>
-            <a:ext cx="1371600" cy="658368"/>
+            <a:ext cx="1371600" cy="841248"/>
           </a:xfrm>
           <a:prstGeom prst="rect">
             <a:avLst/>
@@ -7763,11 +7763,11 @@
         <p:spPr>
           <a:xfrm>
             <a:off x="2938272" y="2258568"/>
-            <a:ext cx="1828800" cy="347472"/>
+            <a:ext cx="1828800" cy="292608"/>
           </a:xfrm>
           <a:prstGeom prst="rect">
             <a:avLst>
-              <a:gd name="adj" fmla="val 21053"/>
+              <a:gd name="adj" fmla="val 25000"/>
             </a:avLst>
           </a:prstGeom>
           <a:solidFill>
@@ -7797,7 +7797,7 @@
         <p:spPr>
           <a:xfrm>
             <a:off x="2938272" y="2258568"/>
-            <a:ext cx="1828800" cy="347472"/>
+            <a:ext cx="1828800" cy="292608"/>
           </a:xfrm>
           <a:prstGeom prst="rect">
             <a:avLst/>
@@ -7835,8 +7835,8 @@
         </p:nvSpPr>
         <p:spPr>
           <a:xfrm>
-            <a:off x="2938272" y="2624328"/>
-            <a:ext cx="1828800" cy="256032"/>
+            <a:off x="2938272" y="2569464"/>
+            <a:ext cx="1828800" cy="201168"/>
           </a:xfrm>
           <a:prstGeom prst="rect">
             <a:avLst/>
@@ -7875,11 +7875,11 @@
         <p:spPr>
           <a:xfrm>
             <a:off x="5803392" y="2258568"/>
-            <a:ext cx="1828800" cy="347472"/>
+            <a:ext cx="1828800" cy="292608"/>
           </a:xfrm>
           <a:prstGeom prst="rect">
             <a:avLst>
-              <a:gd name="adj" fmla="val 21053"/>
+              <a:gd name="adj" fmla="val 25000"/>
             </a:avLst>
           </a:prstGeom>
           <a:solidFill>
@@ -7909,7 +7909,7 @@
         <p:spPr>
           <a:xfrm>
             <a:off x="5803392" y="2258568"/>
-            <a:ext cx="1828800" cy="347472"/>
+            <a:ext cx="1828800" cy="292608"/>
           </a:xfrm>
           <a:prstGeom prst="rect">
             <a:avLst/>
@@ -7947,8 +7947,8 @@
         </p:nvSpPr>
         <p:spPr>
           <a:xfrm>
-            <a:off x="5803392" y="2624328"/>
-            <a:ext cx="1828800" cy="256032"/>
+            <a:off x="5803392" y="2569464"/>
+            <a:ext cx="1828800" cy="201168"/>
           </a:xfrm>
           <a:prstGeom prst="rect">
             <a:avLst/>
@@ -7986,7 +7986,7 @@
         </p:nvSpPr>
         <p:spPr>
           <a:xfrm>
-            <a:off x="365760" y="3182112"/>
+            <a:off x="365760" y="3273552"/>
             <a:ext cx="1371600" cy="658368"/>
           </a:xfrm>
           <a:prstGeom prst="rect">
@@ -8013,7 +8013,7 @@
         </p:nvSpPr>
         <p:spPr>
           <a:xfrm>
-            <a:off x="365760" y="3182112"/>
+            <a:off x="365760" y="3273552"/>
             <a:ext cx="1371600" cy="658368"/>
           </a:xfrm>
           <a:prstGeom prst="rect">
@@ -8052,7 +8052,7 @@
         </p:nvSpPr>
         <p:spPr>
           <a:xfrm>
-            <a:off x="1874520" y="3182112"/>
+            <a:off x="1874520" y="3273552"/>
             <a:ext cx="6903720" cy="658368"/>
           </a:xfrm>
           <a:prstGeom prst="rect">
@@ -8079,7 +8079,7 @@
         </p:nvSpPr>
         <p:spPr>
           <a:xfrm>
-            <a:off x="1874520" y="3182112"/>
+            <a:off x="1874520" y="3273552"/>
             <a:ext cx="6903720" cy="658368"/>
           </a:xfrm>
           <a:prstGeom prst="rect">
@@ -8118,7 +8118,7 @@
         </p:nvSpPr>
         <p:spPr>
           <a:xfrm>
-            <a:off x="365760" y="4005072"/>
+            <a:off x="365760" y="4096512"/>
             <a:ext cx="1371600" cy="658368"/>
           </a:xfrm>
           <a:prstGeom prst="rect">
@@ -8145,7 +8145,7 @@
         </p:nvSpPr>
         <p:spPr>
           <a:xfrm>
-            <a:off x="365760" y="4005072"/>
+            <a:off x="365760" y="4096512"/>
             <a:ext cx="1371600" cy="658368"/>
           </a:xfrm>
           <a:prstGeom prst="rect">
@@ -8184,7 +8184,7 @@
         </p:nvSpPr>
         <p:spPr>
           <a:xfrm>
-            <a:off x="1874520" y="4005072"/>
+            <a:off x="1874520" y="4096512"/>
             <a:ext cx="6903720" cy="658368"/>
           </a:xfrm>
           <a:prstGeom prst="rect">
@@ -8211,7 +8211,7 @@
         </p:nvSpPr>
         <p:spPr>
           <a:xfrm>
-            <a:off x="1874520" y="4005072"/>
+            <a:off x="1874520" y="4096512"/>
             <a:ext cx="6903720" cy="658368"/>
           </a:xfrm>
           <a:prstGeom prst="rect">
@@ -8682,11 +8682,11 @@
         <p:spPr>
           <a:xfrm>
             <a:off x="365760" y="2240280"/>
-            <a:ext cx="1371600" cy="658368"/>
+            <a:ext cx="1371600" cy="841248"/>
           </a:xfrm>
           <a:prstGeom prst="rect">
             <a:avLst>
-              <a:gd name="adj" fmla="val 8333"/>
+              <a:gd name="adj" fmla="val 6522"/>
             </a:avLst>
           </a:prstGeom>
           <a:solidFill>
@@ -8709,7 +8709,7 @@
         <p:spPr>
           <a:xfrm>
             <a:off x="365760" y="2240280"/>
-            <a:ext cx="1371600" cy="658368"/>
+            <a:ext cx="1371600" cy="841248"/>
           </a:xfrm>
           <a:prstGeom prst="rect">
             <a:avLst/>
@@ -8748,11 +8748,11 @@
         <p:spPr>
           <a:xfrm>
             <a:off x="2938272" y="2258568"/>
-            <a:ext cx="1828800" cy="347472"/>
+            <a:ext cx="1828800" cy="292608"/>
           </a:xfrm>
           <a:prstGeom prst="rect">
             <a:avLst>
-              <a:gd name="adj" fmla="val 21053"/>
+              <a:gd name="adj" fmla="val 25000"/>
             </a:avLst>
           </a:prstGeom>
           <a:solidFill>
@@ -8782,7 +8782,7 @@
         <p:spPr>
           <a:xfrm>
             <a:off x="2938272" y="2258568"/>
-            <a:ext cx="1828800" cy="347472"/>
+            <a:ext cx="1828800" cy="292608"/>
           </a:xfrm>
           <a:prstGeom prst="rect">
             <a:avLst/>
@@ -8820,8 +8820,8 @@
         </p:nvSpPr>
         <p:spPr>
           <a:xfrm>
-            <a:off x="2938272" y="2624328"/>
-            <a:ext cx="1828800" cy="256032"/>
+            <a:off x="2938272" y="2569464"/>
+            <a:ext cx="1828800" cy="201168"/>
           </a:xfrm>
           <a:prstGeom prst="rect">
             <a:avLst/>
@@ -8860,11 +8860,11 @@
         <p:spPr>
           <a:xfrm>
             <a:off x="5803392" y="2258568"/>
-            <a:ext cx="1828800" cy="347472"/>
+            <a:ext cx="1828800" cy="292608"/>
           </a:xfrm>
           <a:prstGeom prst="rect">
             <a:avLst>
-              <a:gd name="adj" fmla="val 21053"/>
+              <a:gd name="adj" fmla="val 25000"/>
             </a:avLst>
           </a:prstGeom>
           <a:solidFill>
@@ -8894,7 +8894,7 @@
         <p:spPr>
           <a:xfrm>
             <a:off x="5803392" y="2258568"/>
-            <a:ext cx="1828800" cy="347472"/>
+            <a:ext cx="1828800" cy="292608"/>
           </a:xfrm>
           <a:prstGeom prst="rect">
             <a:avLst/>
@@ -8932,8 +8932,8 @@
         </p:nvSpPr>
         <p:spPr>
           <a:xfrm>
-            <a:off x="5803392" y="2624328"/>
-            <a:ext cx="1828800" cy="256032"/>
+            <a:off x="5803392" y="2569464"/>
+            <a:ext cx="1828800" cy="201168"/>
           </a:xfrm>
           <a:prstGeom prst="rect">
             <a:avLst/>
@@ -8971,7 +8971,7 @@
         </p:nvSpPr>
         <p:spPr>
           <a:xfrm>
-            <a:off x="365760" y="3182112"/>
+            <a:off x="365760" y="3273552"/>
             <a:ext cx="1371600" cy="658368"/>
           </a:xfrm>
           <a:prstGeom prst="rect">
@@ -8998,7 +8998,7 @@
         </p:nvSpPr>
         <p:spPr>
           <a:xfrm>
-            <a:off x="365760" y="3182112"/>
+            <a:off x="365760" y="3273552"/>
             <a:ext cx="1371600" cy="658368"/>
           </a:xfrm>
           <a:prstGeom prst="rect">
@@ -9037,7 +9037,7 @@
         </p:nvSpPr>
         <p:spPr>
           <a:xfrm>
-            <a:off x="1874520" y="3182112"/>
+            <a:off x="1874520" y="3273552"/>
             <a:ext cx="6903720" cy="658368"/>
           </a:xfrm>
           <a:prstGeom prst="rect">
@@ -9064,7 +9064,7 @@
         </p:nvSpPr>
         <p:spPr>
           <a:xfrm>
-            <a:off x="2313432" y="3273552"/>
+            <a:off x="2313432" y="3364992"/>
             <a:ext cx="1645920" cy="475488"/>
           </a:xfrm>
           <a:prstGeom prst="rect">
@@ -9091,7 +9091,7 @@
         </p:nvSpPr>
         <p:spPr>
           <a:xfrm>
-            <a:off x="2313432" y="3273552"/>
+            <a:off x="2313432" y="3364992"/>
             <a:ext cx="1645920" cy="475488"/>
           </a:xfrm>
           <a:prstGeom prst="rect">
@@ -9130,7 +9130,7 @@
         </p:nvSpPr>
         <p:spPr>
           <a:xfrm>
-            <a:off x="3959352" y="3273552"/>
+            <a:off x="3959352" y="3364992"/>
             <a:ext cx="411480" cy="475488"/>
           </a:xfrm>
           <a:prstGeom prst="rect">
@@ -9169,7 +9169,7 @@
         </p:nvSpPr>
         <p:spPr>
           <a:xfrm>
-            <a:off x="4370832" y="3273552"/>
+            <a:off x="4370832" y="3364992"/>
             <a:ext cx="1645920" cy="475488"/>
           </a:xfrm>
           <a:prstGeom prst="rect">
@@ -9196,7 +9196,7 @@
         </p:nvSpPr>
         <p:spPr>
           <a:xfrm>
-            <a:off x="4370832" y="3273552"/>
+            <a:off x="4370832" y="3364992"/>
             <a:ext cx="1645920" cy="475488"/>
           </a:xfrm>
           <a:prstGeom prst="rect">
@@ -9235,7 +9235,7 @@
         </p:nvSpPr>
         <p:spPr>
           <a:xfrm>
-            <a:off x="6016752" y="3273552"/>
+            <a:off x="6016752" y="3364992"/>
             <a:ext cx="411480" cy="475488"/>
           </a:xfrm>
           <a:prstGeom prst="rect">
@@ -9274,7 +9274,7 @@
         </p:nvSpPr>
         <p:spPr>
           <a:xfrm>
-            <a:off x="6428232" y="3273552"/>
+            <a:off x="6428232" y="3364992"/>
             <a:ext cx="1645920" cy="475488"/>
           </a:xfrm>
           <a:prstGeom prst="rect">
@@ -9301,7 +9301,7 @@
         </p:nvSpPr>
         <p:spPr>
           <a:xfrm>
-            <a:off x="6428232" y="3273552"/>
+            <a:off x="6428232" y="3364992"/>
             <a:ext cx="1645920" cy="475488"/>
           </a:xfrm>
           <a:prstGeom prst="rect">
@@ -9340,7 +9340,7 @@
         </p:nvSpPr>
         <p:spPr>
           <a:xfrm>
-            <a:off x="365760" y="4005072"/>
+            <a:off x="365760" y="4096512"/>
             <a:ext cx="1371600" cy="658368"/>
           </a:xfrm>
           <a:prstGeom prst="rect">
@@ -9367,7 +9367,7 @@
         </p:nvSpPr>
         <p:spPr>
           <a:xfrm>
-            <a:off x="365760" y="4005072"/>
+            <a:off x="365760" y="4096512"/>
             <a:ext cx="1371600" cy="658368"/>
           </a:xfrm>
           <a:prstGeom prst="rect">
@@ -9406,7 +9406,7 @@
         </p:nvSpPr>
         <p:spPr>
           <a:xfrm>
-            <a:off x="1874520" y="4005072"/>
+            <a:off x="1874520" y="4096512"/>
             <a:ext cx="6903720" cy="658368"/>
           </a:xfrm>
           <a:prstGeom prst="rect">
@@ -9433,7 +9433,7 @@
         </p:nvSpPr>
         <p:spPr>
           <a:xfrm>
-            <a:off x="1874520" y="4005072"/>
+            <a:off x="1874520" y="4096512"/>
             <a:ext cx="6903720" cy="658368"/>
           </a:xfrm>
           <a:prstGeom prst="rect">
@@ -9904,11 +9904,11 @@
         <p:spPr>
           <a:xfrm>
             <a:off x="365760" y="2240280"/>
-            <a:ext cx="1371600" cy="658368"/>
+            <a:ext cx="1371600" cy="841248"/>
           </a:xfrm>
           <a:prstGeom prst="rect">
             <a:avLst>
-              <a:gd name="adj" fmla="val 8333"/>
+              <a:gd name="adj" fmla="val 6522"/>
             </a:avLst>
           </a:prstGeom>
           <a:solidFill>
@@ -9931,7 +9931,7 @@
         <p:spPr>
           <a:xfrm>
             <a:off x="365760" y="2240280"/>
-            <a:ext cx="1371600" cy="658368"/>
+            <a:ext cx="1371600" cy="841248"/>
           </a:xfrm>
           <a:prstGeom prst="rect">
             <a:avLst/>
@@ -9970,11 +9970,11 @@
         <p:spPr>
           <a:xfrm>
             <a:off x="2938272" y="2258568"/>
-            <a:ext cx="1828800" cy="347472"/>
+            <a:ext cx="1828800" cy="292608"/>
           </a:xfrm>
           <a:prstGeom prst="rect">
             <a:avLst>
-              <a:gd name="adj" fmla="val 21053"/>
+              <a:gd name="adj" fmla="val 25000"/>
             </a:avLst>
           </a:prstGeom>
           <a:solidFill>
@@ -10004,7 +10004,7 @@
         <p:spPr>
           <a:xfrm>
             <a:off x="2938272" y="2258568"/>
-            <a:ext cx="1828800" cy="347472"/>
+            <a:ext cx="1828800" cy="292608"/>
           </a:xfrm>
           <a:prstGeom prst="rect">
             <a:avLst/>
@@ -10042,8 +10042,8 @@
         </p:nvSpPr>
         <p:spPr>
           <a:xfrm>
-            <a:off x="2938272" y="2624328"/>
-            <a:ext cx="1828800" cy="256032"/>
+            <a:off x="2938272" y="2569464"/>
+            <a:ext cx="1828800" cy="201168"/>
           </a:xfrm>
           <a:prstGeom prst="rect">
             <a:avLst/>
@@ -10082,11 +10082,11 @@
         <p:spPr>
           <a:xfrm>
             <a:off x="5803392" y="2258568"/>
-            <a:ext cx="1828800" cy="347472"/>
+            <a:ext cx="1828800" cy="292608"/>
           </a:xfrm>
           <a:prstGeom prst="rect">
             <a:avLst>
-              <a:gd name="adj" fmla="val 21053"/>
+              <a:gd name="adj" fmla="val 25000"/>
             </a:avLst>
           </a:prstGeom>
           <a:solidFill>
@@ -10116,7 +10116,7 @@
         <p:spPr>
           <a:xfrm>
             <a:off x="5803392" y="2258568"/>
-            <a:ext cx="1828800" cy="347472"/>
+            <a:ext cx="1828800" cy="292608"/>
           </a:xfrm>
           <a:prstGeom prst="rect">
             <a:avLst/>
@@ -10154,8 +10154,8 @@
         </p:nvSpPr>
         <p:spPr>
           <a:xfrm>
-            <a:off x="5803392" y="2624328"/>
-            <a:ext cx="1828800" cy="256032"/>
+            <a:off x="5803392" y="2569464"/>
+            <a:ext cx="1828800" cy="201168"/>
           </a:xfrm>
           <a:prstGeom prst="rect">
             <a:avLst/>
@@ -10193,7 +10193,7 @@
         </p:nvSpPr>
         <p:spPr>
           <a:xfrm>
-            <a:off x="365760" y="3182112"/>
+            <a:off x="365760" y="3273552"/>
             <a:ext cx="1371600" cy="658368"/>
           </a:xfrm>
           <a:prstGeom prst="rect">
@@ -10220,7 +10220,7 @@
         </p:nvSpPr>
         <p:spPr>
           <a:xfrm>
-            <a:off x="365760" y="3182112"/>
+            <a:off x="365760" y="3273552"/>
             <a:ext cx="1371600" cy="658368"/>
           </a:xfrm>
           <a:prstGeom prst="rect">
@@ -10259,7 +10259,7 @@
         </p:nvSpPr>
         <p:spPr>
           <a:xfrm>
-            <a:off x="1874520" y="3182112"/>
+            <a:off x="1874520" y="3273552"/>
             <a:ext cx="6903720" cy="658368"/>
           </a:xfrm>
           <a:prstGeom prst="rect">
@@ -10286,7 +10286,7 @@
         </p:nvSpPr>
         <p:spPr>
           <a:xfrm>
-            <a:off x="2313432" y="3273552"/>
+            <a:off x="2313432" y="3364992"/>
             <a:ext cx="1645920" cy="475488"/>
           </a:xfrm>
           <a:prstGeom prst="rect">
@@ -10313,7 +10313,7 @@
         </p:nvSpPr>
         <p:spPr>
           <a:xfrm>
-            <a:off x="2313432" y="3273552"/>
+            <a:off x="2313432" y="3364992"/>
             <a:ext cx="1645920" cy="475488"/>
           </a:xfrm>
           <a:prstGeom prst="rect">
@@ -10352,7 +10352,7 @@
         </p:nvSpPr>
         <p:spPr>
           <a:xfrm>
-            <a:off x="3959352" y="3273552"/>
+            <a:off x="3959352" y="3364992"/>
             <a:ext cx="411480" cy="475488"/>
           </a:xfrm>
           <a:prstGeom prst="rect">
@@ -10391,7 +10391,7 @@
         </p:nvSpPr>
         <p:spPr>
           <a:xfrm>
-            <a:off x="4370832" y="3273552"/>
+            <a:off x="4370832" y="3364992"/>
             <a:ext cx="1645920" cy="475488"/>
           </a:xfrm>
           <a:prstGeom prst="rect">
@@ -10418,7 +10418,7 @@
         </p:nvSpPr>
         <p:spPr>
           <a:xfrm>
-            <a:off x="4370832" y="3273552"/>
+            <a:off x="4370832" y="3364992"/>
             <a:ext cx="1645920" cy="475488"/>
           </a:xfrm>
           <a:prstGeom prst="rect">
@@ -10457,7 +10457,7 @@
         </p:nvSpPr>
         <p:spPr>
           <a:xfrm>
-            <a:off x="6016752" y="3273552"/>
+            <a:off x="6016752" y="3364992"/>
             <a:ext cx="411480" cy="475488"/>
           </a:xfrm>
           <a:prstGeom prst="rect">
@@ -10496,7 +10496,7 @@
         </p:nvSpPr>
         <p:spPr>
           <a:xfrm>
-            <a:off x="6428232" y="3273552"/>
+            <a:off x="6428232" y="3364992"/>
             <a:ext cx="1645920" cy="475488"/>
           </a:xfrm>
           <a:prstGeom prst="rect">
@@ -10523,7 +10523,7 @@
         </p:nvSpPr>
         <p:spPr>
           <a:xfrm>
-            <a:off x="6428232" y="3273552"/>
+            <a:off x="6428232" y="3364992"/>
             <a:ext cx="1645920" cy="475488"/>
           </a:xfrm>
           <a:prstGeom prst="rect">
@@ -10562,7 +10562,7 @@
         </p:nvSpPr>
         <p:spPr>
           <a:xfrm>
-            <a:off x="365760" y="4005072"/>
+            <a:off x="365760" y="4096512"/>
             <a:ext cx="1371600" cy="658368"/>
           </a:xfrm>
           <a:prstGeom prst="rect">
@@ -10589,7 +10589,7 @@
         </p:nvSpPr>
         <p:spPr>
           <a:xfrm>
-            <a:off x="365760" y="4005072"/>
+            <a:off x="365760" y="4096512"/>
             <a:ext cx="1371600" cy="658368"/>
           </a:xfrm>
           <a:prstGeom prst="rect">
@@ -10628,7 +10628,7 @@
         </p:nvSpPr>
         <p:spPr>
           <a:xfrm>
-            <a:off x="1874520" y="4005072"/>
+            <a:off x="1874520" y="4096512"/>
             <a:ext cx="6903720" cy="658368"/>
           </a:xfrm>
           <a:prstGeom prst="rect">
@@ -10655,7 +10655,7 @@
         </p:nvSpPr>
         <p:spPr>
           <a:xfrm>
-            <a:off x="2023872" y="4096512"/>
+            <a:off x="2023872" y="4187952"/>
             <a:ext cx="685800" cy="475488"/>
           </a:xfrm>
           <a:prstGeom prst="rect">
@@ -10682,7 +10682,7 @@
         </p:nvSpPr>
         <p:spPr>
           <a:xfrm>
-            <a:off x="2023872" y="4096512"/>
+            <a:off x="2023872" y="4187952"/>
             <a:ext cx="685800" cy="475488"/>
           </a:xfrm>
           <a:prstGeom prst="rect">
@@ -10721,7 +10721,7 @@
         </p:nvSpPr>
         <p:spPr>
           <a:xfrm>
-            <a:off x="2831592" y="4096512"/>
+            <a:off x="2831592" y="4187952"/>
             <a:ext cx="685800" cy="475488"/>
           </a:xfrm>
           <a:prstGeom prst="rect">
@@ -10748,7 +10748,7 @@
         </p:nvSpPr>
         <p:spPr>
           <a:xfrm>
-            <a:off x="2831592" y="4096512"/>
+            <a:off x="2831592" y="4187952"/>
             <a:ext cx="685800" cy="475488"/>
           </a:xfrm>
           <a:prstGeom prst="rect">
@@ -10787,7 +10787,7 @@
         </p:nvSpPr>
         <p:spPr>
           <a:xfrm>
-            <a:off x="3639312" y="4096512"/>
+            <a:off x="3639312" y="4187952"/>
             <a:ext cx="685800" cy="475488"/>
           </a:xfrm>
           <a:prstGeom prst="rect">
@@ -10814,7 +10814,7 @@
         </p:nvSpPr>
         <p:spPr>
           <a:xfrm>
-            <a:off x="3639312" y="4096512"/>
+            <a:off x="3639312" y="4187952"/>
             <a:ext cx="685800" cy="475488"/>
           </a:xfrm>
           <a:prstGeom prst="rect">
@@ -10853,7 +10853,7 @@
         </p:nvSpPr>
         <p:spPr>
           <a:xfrm>
-            <a:off x="4447032" y="4096512"/>
+            <a:off x="4447032" y="4187952"/>
             <a:ext cx="685800" cy="475488"/>
           </a:xfrm>
           <a:prstGeom prst="rect">
@@ -10880,7 +10880,7 @@
         </p:nvSpPr>
         <p:spPr>
           <a:xfrm>
-            <a:off x="4447032" y="4096512"/>
+            <a:off x="4447032" y="4187952"/>
             <a:ext cx="685800" cy="475488"/>
           </a:xfrm>
           <a:prstGeom prst="rect">
@@ -10919,7 +10919,7 @@
         </p:nvSpPr>
         <p:spPr>
           <a:xfrm>
-            <a:off x="5254752" y="4096512"/>
+            <a:off x="5254752" y="4187952"/>
             <a:ext cx="685800" cy="475488"/>
           </a:xfrm>
           <a:prstGeom prst="rect">
@@ -10946,7 +10946,7 @@
         </p:nvSpPr>
         <p:spPr>
           <a:xfrm>
-            <a:off x="5254752" y="4096512"/>
+            <a:off x="5254752" y="4187952"/>
             <a:ext cx="685800" cy="475488"/>
           </a:xfrm>
           <a:prstGeom prst="rect">
@@ -10985,7 +10985,7 @@
         </p:nvSpPr>
         <p:spPr>
           <a:xfrm>
-            <a:off x="6062472" y="4096512"/>
+            <a:off x="6062472" y="4187952"/>
             <a:ext cx="685800" cy="475488"/>
           </a:xfrm>
           <a:prstGeom prst="rect">
@@ -11012,7 +11012,7 @@
         </p:nvSpPr>
         <p:spPr>
           <a:xfrm>
-            <a:off x="6062472" y="4096512"/>
+            <a:off x="6062472" y="4187952"/>
             <a:ext cx="685800" cy="475488"/>
           </a:xfrm>
           <a:prstGeom prst="rect">
@@ -11051,7 +11051,7 @@
         </p:nvSpPr>
         <p:spPr>
           <a:xfrm>
-            <a:off x="6870192" y="4096512"/>
+            <a:off x="6870192" y="4187952"/>
             <a:ext cx="685800" cy="475488"/>
           </a:xfrm>
           <a:prstGeom prst="rect">
@@ -11078,7 +11078,7 @@
         </p:nvSpPr>
         <p:spPr>
           <a:xfrm>
-            <a:off x="6870192" y="4096512"/>
+            <a:off x="6870192" y="4187952"/>
             <a:ext cx="685800" cy="475488"/>
           </a:xfrm>
           <a:prstGeom prst="rect">
@@ -11117,7 +11117,7 @@
         </p:nvSpPr>
         <p:spPr>
           <a:xfrm>
-            <a:off x="7677912" y="4096512"/>
+            <a:off x="7677912" y="4187952"/>
             <a:ext cx="685800" cy="475488"/>
           </a:xfrm>
           <a:prstGeom prst="rect">
@@ -11144,7 +11144,7 @@
         </p:nvSpPr>
         <p:spPr>
           <a:xfrm>
-            <a:off x="7677912" y="4096512"/>
+            <a:off x="7677912" y="4187952"/>
             <a:ext cx="685800" cy="475488"/>
           </a:xfrm>
           <a:prstGeom prst="rect">
@@ -11600,7 +11600,7 @@
                 <a:ea typeface="Trebuchet MS" pitchFamily="34" charset="-122"/>
                 <a:cs typeface="Trebuchet MS" pitchFamily="34" charset="-120"/>
               </a:rPr>
-              <a:t>recharge</a:t>
+              <a:t>restarting</a:t>
             </a:r>
             <a:endParaRPr lang="en-US" sz="2800" dirty="0"/>
           </a:p>
@@ -11615,6 +11615,138 @@
         <p:spPr>
           <a:xfrm>
             <a:off x="365760" y="2240280"/>
+            <a:ext cx="1371600" cy="841248"/>
+          </a:xfrm>
+          <a:prstGeom prst="rect">
+            <a:avLst>
+              <a:gd name="adj" fmla="val 6522"/>
+            </a:avLst>
+          </a:prstGeom>
+          <a:solidFill>
+            <a:srgbClr val="E2E8F0"/>
+          </a:solidFill>
+          <a:ln w="12700">
+            <a:solidFill>
+              <a:srgbClr val="E2E8F0"/>
+            </a:solidFill>
+            <a:prstDash val="solid"/>
+          </a:ln>
+        </p:spPr>
+      </p:sp>
+      <p:sp>
+        <p:nvSpPr>
+          <p:cNvPr id="15" name="Text 13"/>
+          <p:cNvSpPr/>
+          <p:nvPr/>
+        </p:nvSpPr>
+        <p:spPr>
+          <a:xfrm>
+            <a:off x="365760" y="2240280"/>
+            <a:ext cx="1371600" cy="841248"/>
+          </a:xfrm>
+          <a:prstGeom prst="rect">
+            <a:avLst/>
+          </a:prstGeom>
+          <a:noFill/>
+          <a:ln/>
+        </p:spPr>
+        <p:txBody>
+          <a:bodyPr wrap="square" lIns="0" tIns="0" rIns="0" bIns="0" rtlCol="0" anchor="ctr"/>
+          <a:lstStyle/>
+          <a:p>
+            <a:pPr algn="ctr" indent="0" marL="0">
+              <a:buNone/>
+            </a:pPr>
+            <a:r>
+              <a:rPr lang="en-US" sz="1100" b="1" dirty="0">
+                <a:solidFill>
+                  <a:srgbClr val="475569"/>
+                </a:solidFill>
+                <a:latin typeface="Trebuchet MS" pitchFamily="34" charset="0"/>
+                <a:ea typeface="Trebuchet MS" pitchFamily="34" charset="-122"/>
+                <a:cs typeface="Trebuchet MS" pitchFamily="34" charset="-120"/>
+              </a:rPr>
+              <a:t>Morphemes</a:t>
+            </a:r>
+            <a:endParaRPr lang="en-US" sz="1100" dirty="0"/>
+          </a:p>
+        </p:txBody>
+      </p:sp>
+      <p:sp>
+        <p:nvSpPr>
+          <p:cNvPr id="16" name="Shape 14"/>
+          <p:cNvSpPr/>
+          <p:nvPr/>
+        </p:nvSpPr>
+        <p:spPr>
+          <a:xfrm>
+            <a:off x="1874520" y="2240280"/>
+            <a:ext cx="6903720" cy="841248"/>
+          </a:xfrm>
+          <a:prstGeom prst="rect">
+            <a:avLst>
+              <a:gd name="adj" fmla="val 6522"/>
+            </a:avLst>
+          </a:prstGeom>
+          <a:solidFill>
+            <a:srgbClr val="F8FAFC"/>
+          </a:solidFill>
+          <a:ln w="12700">
+            <a:solidFill>
+              <a:srgbClr val="E2E8F0"/>
+            </a:solidFill>
+            <a:prstDash val="dash"/>
+          </a:ln>
+        </p:spPr>
+      </p:sp>
+      <p:sp>
+        <p:nvSpPr>
+          <p:cNvPr id="17" name="Text 15"/>
+          <p:cNvSpPr/>
+          <p:nvPr/>
+        </p:nvSpPr>
+        <p:spPr>
+          <a:xfrm>
+            <a:off x="1874520" y="2240280"/>
+            <a:ext cx="6903720" cy="841248"/>
+          </a:xfrm>
+          <a:prstGeom prst="rect">
+            <a:avLst/>
+          </a:prstGeom>
+          <a:noFill/>
+          <a:ln/>
+        </p:spPr>
+        <p:txBody>
+          <a:bodyPr wrap="square" rtlCol="0" anchor="ctr"/>
+          <a:lstStyle/>
+          <a:p>
+            <a:pPr algn="ctr" indent="0" marL="0">
+              <a:buNone/>
+            </a:pPr>
+            <a:r>
+              <a:rPr lang="en-US" sz="1100" i="1" dirty="0">
+                <a:solidFill>
+                  <a:srgbClr val="CBD5E1"/>
+                </a:solidFill>
+                <a:latin typeface="Calibri" pitchFamily="34" charset="0"/>
+                <a:ea typeface="Calibri" pitchFamily="34" charset="-122"/>
+                <a:cs typeface="Calibri" pitchFamily="34" charset="-120"/>
+              </a:rPr>
+              <a:t>Write here...</a:t>
+            </a:r>
+            <a:endParaRPr lang="en-US" sz="1100" dirty="0"/>
+          </a:p>
+        </p:txBody>
+      </p:sp>
+      <p:sp>
+        <p:nvSpPr>
+          <p:cNvPr id="18" name="Shape 16"/>
+          <p:cNvSpPr/>
+          <p:nvPr/>
+        </p:nvSpPr>
+        <p:spPr>
+          <a:xfrm>
+            <a:off x="365760" y="3273552"/>
             <a:ext cx="1371600" cy="658368"/>
           </a:xfrm>
           <a:prstGeom prst="rect">
@@ -11635,13 +11767,13 @@
       </p:sp>
       <p:sp>
         <p:nvSpPr>
-          <p:cNvPr id="15" name="Text 13"/>
-          <p:cNvSpPr/>
-          <p:nvPr/>
-        </p:nvSpPr>
-        <p:spPr>
-          <a:xfrm>
-            <a:off x="365760" y="2240280"/>
+          <p:cNvPr id="19" name="Text 17"/>
+          <p:cNvSpPr/>
+          <p:nvPr/>
+        </p:nvSpPr>
+        <p:spPr>
+          <a:xfrm>
+            <a:off x="365760" y="3273552"/>
             <a:ext cx="1371600" cy="658368"/>
           </a:xfrm>
           <a:prstGeom prst="rect">
@@ -11666,7 +11798,7 @@
                 <a:ea typeface="Trebuchet MS" pitchFamily="34" charset="-122"/>
                 <a:cs typeface="Trebuchet MS" pitchFamily="34" charset="-120"/>
               </a:rPr>
-              <a:t>Morphemes</a:t>
+              <a:t>Syllables</a:t>
             </a:r>
             <a:endParaRPr lang="en-US" sz="1100" dirty="0"/>
           </a:p>
@@ -11674,13 +11806,13 @@
       </p:sp>
       <p:sp>
         <p:nvSpPr>
-          <p:cNvPr id="16" name="Shape 14"/>
-          <p:cNvSpPr/>
-          <p:nvPr/>
-        </p:nvSpPr>
-        <p:spPr>
-          <a:xfrm>
-            <a:off x="1874520" y="2240280"/>
+          <p:cNvPr id="20" name="Shape 18"/>
+          <p:cNvSpPr/>
+          <p:nvPr/>
+        </p:nvSpPr>
+        <p:spPr>
+          <a:xfrm>
+            <a:off x="1874520" y="3273552"/>
             <a:ext cx="6903720" cy="658368"/>
           </a:xfrm>
           <a:prstGeom prst="rect">
@@ -11701,13 +11833,13 @@
       </p:sp>
       <p:sp>
         <p:nvSpPr>
-          <p:cNvPr id="17" name="Text 15"/>
-          <p:cNvSpPr/>
-          <p:nvPr/>
-        </p:nvSpPr>
-        <p:spPr>
-          <a:xfrm>
-            <a:off x="1874520" y="2240280"/>
+          <p:cNvPr id="21" name="Text 19"/>
+          <p:cNvSpPr/>
+          <p:nvPr/>
+        </p:nvSpPr>
+        <p:spPr>
+          <a:xfrm>
+            <a:off x="1874520" y="3273552"/>
             <a:ext cx="6903720" cy="658368"/>
           </a:xfrm>
           <a:prstGeom prst="rect">
@@ -11740,13 +11872,13 @@
       </p:sp>
       <p:sp>
         <p:nvSpPr>
-          <p:cNvPr id="18" name="Shape 16"/>
-          <p:cNvSpPr/>
-          <p:nvPr/>
-        </p:nvSpPr>
-        <p:spPr>
-          <a:xfrm>
-            <a:off x="365760" y="3182112"/>
+          <p:cNvPr id="22" name="Shape 20"/>
+          <p:cNvSpPr/>
+          <p:nvPr/>
+        </p:nvSpPr>
+        <p:spPr>
+          <a:xfrm>
+            <a:off x="365760" y="4096512"/>
             <a:ext cx="1371600" cy="658368"/>
           </a:xfrm>
           <a:prstGeom prst="rect">
@@ -11767,13 +11899,13 @@
       </p:sp>
       <p:sp>
         <p:nvSpPr>
-          <p:cNvPr id="19" name="Text 17"/>
-          <p:cNvSpPr/>
-          <p:nvPr/>
-        </p:nvSpPr>
-        <p:spPr>
-          <a:xfrm>
-            <a:off x="365760" y="3182112"/>
+          <p:cNvPr id="23" name="Text 21"/>
+          <p:cNvSpPr/>
+          <p:nvPr/>
+        </p:nvSpPr>
+        <p:spPr>
+          <a:xfrm>
+            <a:off x="365760" y="4096512"/>
             <a:ext cx="1371600" cy="658368"/>
           </a:xfrm>
           <a:prstGeom prst="rect">
@@ -11798,7 +11930,7 @@
                 <a:ea typeface="Trebuchet MS" pitchFamily="34" charset="-122"/>
                 <a:cs typeface="Trebuchet MS" pitchFamily="34" charset="-120"/>
               </a:rPr>
-              <a:t>Syllables</a:t>
+              <a:t>Phonemes</a:t>
             </a:r>
             <a:endParaRPr lang="en-US" sz="1100" dirty="0"/>
           </a:p>
@@ -11806,13 +11938,13 @@
       </p:sp>
       <p:sp>
         <p:nvSpPr>
-          <p:cNvPr id="20" name="Shape 18"/>
-          <p:cNvSpPr/>
-          <p:nvPr/>
-        </p:nvSpPr>
-        <p:spPr>
-          <a:xfrm>
-            <a:off x="1874520" y="3182112"/>
+          <p:cNvPr id="24" name="Shape 22"/>
+          <p:cNvSpPr/>
+          <p:nvPr/>
+        </p:nvSpPr>
+        <p:spPr>
+          <a:xfrm>
+            <a:off x="1874520" y="4096512"/>
             <a:ext cx="6903720" cy="658368"/>
           </a:xfrm>
           <a:prstGeom prst="rect">
@@ -11833,145 +11965,13 @@
       </p:sp>
       <p:sp>
         <p:nvSpPr>
-          <p:cNvPr id="21" name="Text 19"/>
-          <p:cNvSpPr/>
-          <p:nvPr/>
-        </p:nvSpPr>
-        <p:spPr>
-          <a:xfrm>
-            <a:off x="1874520" y="3182112"/>
-            <a:ext cx="6903720" cy="658368"/>
-          </a:xfrm>
-          <a:prstGeom prst="rect">
-            <a:avLst/>
-          </a:prstGeom>
-          <a:noFill/>
-          <a:ln/>
-        </p:spPr>
-        <p:txBody>
-          <a:bodyPr wrap="square" rtlCol="0" anchor="ctr"/>
-          <a:lstStyle/>
-          <a:p>
-            <a:pPr algn="ctr" indent="0" marL="0">
-              <a:buNone/>
-            </a:pPr>
-            <a:r>
-              <a:rPr lang="en-US" sz="1100" i="1" dirty="0">
-                <a:solidFill>
-                  <a:srgbClr val="CBD5E1"/>
-                </a:solidFill>
-                <a:latin typeface="Calibri" pitchFamily="34" charset="0"/>
-                <a:ea typeface="Calibri" pitchFamily="34" charset="-122"/>
-                <a:cs typeface="Calibri" pitchFamily="34" charset="-120"/>
-              </a:rPr>
-              <a:t>Write here...</a:t>
-            </a:r>
-            <a:endParaRPr lang="en-US" sz="1100" dirty="0"/>
-          </a:p>
-        </p:txBody>
-      </p:sp>
-      <p:sp>
-        <p:nvSpPr>
-          <p:cNvPr id="22" name="Shape 20"/>
-          <p:cNvSpPr/>
-          <p:nvPr/>
-        </p:nvSpPr>
-        <p:spPr>
-          <a:xfrm>
-            <a:off x="365760" y="4005072"/>
-            <a:ext cx="1371600" cy="658368"/>
-          </a:xfrm>
-          <a:prstGeom prst="rect">
-            <a:avLst>
-              <a:gd name="adj" fmla="val 8333"/>
-            </a:avLst>
-          </a:prstGeom>
-          <a:solidFill>
-            <a:srgbClr val="E2E8F0"/>
-          </a:solidFill>
-          <a:ln w="12700">
-            <a:solidFill>
-              <a:srgbClr val="E2E8F0"/>
-            </a:solidFill>
-            <a:prstDash val="solid"/>
-          </a:ln>
-        </p:spPr>
-      </p:sp>
-      <p:sp>
-        <p:nvSpPr>
-          <p:cNvPr id="23" name="Text 21"/>
-          <p:cNvSpPr/>
-          <p:nvPr/>
-        </p:nvSpPr>
-        <p:spPr>
-          <a:xfrm>
-            <a:off x="365760" y="4005072"/>
-            <a:ext cx="1371600" cy="658368"/>
-          </a:xfrm>
-          <a:prstGeom prst="rect">
-            <a:avLst/>
-          </a:prstGeom>
-          <a:noFill/>
-          <a:ln/>
-        </p:spPr>
-        <p:txBody>
-          <a:bodyPr wrap="square" lIns="0" tIns="0" rIns="0" bIns="0" rtlCol="0" anchor="ctr"/>
-          <a:lstStyle/>
-          <a:p>
-            <a:pPr algn="ctr" indent="0" marL="0">
-              <a:buNone/>
-            </a:pPr>
-            <a:r>
-              <a:rPr lang="en-US" sz="1100" b="1" dirty="0">
-                <a:solidFill>
-                  <a:srgbClr val="475569"/>
-                </a:solidFill>
-                <a:latin typeface="Trebuchet MS" pitchFamily="34" charset="0"/>
-                <a:ea typeface="Trebuchet MS" pitchFamily="34" charset="-122"/>
-                <a:cs typeface="Trebuchet MS" pitchFamily="34" charset="-120"/>
-              </a:rPr>
-              <a:t>Phonemes</a:t>
-            </a:r>
-            <a:endParaRPr lang="en-US" sz="1100" dirty="0"/>
-          </a:p>
-        </p:txBody>
-      </p:sp>
-      <p:sp>
-        <p:nvSpPr>
-          <p:cNvPr id="24" name="Shape 22"/>
-          <p:cNvSpPr/>
-          <p:nvPr/>
-        </p:nvSpPr>
-        <p:spPr>
-          <a:xfrm>
-            <a:off x="1874520" y="4005072"/>
-            <a:ext cx="6903720" cy="658368"/>
-          </a:xfrm>
-          <a:prstGeom prst="rect">
-            <a:avLst>
-              <a:gd name="adj" fmla="val 8333"/>
-            </a:avLst>
-          </a:prstGeom>
-          <a:solidFill>
-            <a:srgbClr val="F8FAFC"/>
-          </a:solidFill>
-          <a:ln w="12700">
-            <a:solidFill>
-              <a:srgbClr val="E2E8F0"/>
-            </a:solidFill>
-            <a:prstDash val="dash"/>
-          </a:ln>
-        </p:spPr>
-      </p:sp>
-      <p:sp>
-        <p:nvSpPr>
           <p:cNvPr id="25" name="Text 23"/>
           <p:cNvSpPr/>
           <p:nvPr/>
         </p:nvSpPr>
         <p:spPr>
           <a:xfrm>
-            <a:off x="1874520" y="4005072"/>
+            <a:off x="1874520" y="4096512"/>
             <a:ext cx="6903720" cy="658368"/>
           </a:xfrm>
           <a:prstGeom prst="rect">
@@ -12427,7 +12427,7 @@
                 <a:ea typeface="Trebuchet MS" pitchFamily="34" charset="-122"/>
                 <a:cs typeface="Trebuchet MS" pitchFamily="34" charset="-120"/>
               </a:rPr>
-              <a:t>recharge</a:t>
+              <a:t>restarting</a:t>
             </a:r>
             <a:endParaRPr lang="en-US" sz="2800" dirty="0"/>
           </a:p>
@@ -12442,11 +12442,11 @@
         <p:spPr>
           <a:xfrm>
             <a:off x="365760" y="2240280"/>
-            <a:ext cx="1371600" cy="658368"/>
+            <a:ext cx="1371600" cy="841248"/>
           </a:xfrm>
           <a:prstGeom prst="rect">
             <a:avLst>
-              <a:gd name="adj" fmla="val 8333"/>
+              <a:gd name="adj" fmla="val 6522"/>
             </a:avLst>
           </a:prstGeom>
           <a:solidFill>
@@ -12469,7 +12469,7 @@
         <p:spPr>
           <a:xfrm>
             <a:off x="365760" y="2240280"/>
-            <a:ext cx="1371600" cy="658368"/>
+            <a:ext cx="1371600" cy="841248"/>
           </a:xfrm>
           <a:prstGeom prst="rect">
             <a:avLst/>
@@ -12507,12 +12507,12 @@
         </p:nvSpPr>
         <p:spPr>
           <a:xfrm>
-            <a:off x="2938272" y="2258568"/>
-            <a:ext cx="1828800" cy="347472"/>
+            <a:off x="2221992" y="2258568"/>
+            <a:ext cx="1828800" cy="292608"/>
           </a:xfrm>
           <a:prstGeom prst="rect">
             <a:avLst>
-              <a:gd name="adj" fmla="val 21053"/>
+              <a:gd name="adj" fmla="val 25000"/>
             </a:avLst>
           </a:prstGeom>
           <a:solidFill>
@@ -12541,8 +12541,8 @@
         </p:nvSpPr>
         <p:spPr>
           <a:xfrm>
-            <a:off x="2938272" y="2258568"/>
-            <a:ext cx="1828800" cy="347472"/>
+            <a:off x="2221992" y="2258568"/>
+            <a:ext cx="1828800" cy="292608"/>
           </a:xfrm>
           <a:prstGeom prst="rect">
             <a:avLst/>
@@ -12580,8 +12580,8 @@
         </p:nvSpPr>
         <p:spPr>
           <a:xfrm>
-            <a:off x="2938272" y="2624328"/>
-            <a:ext cx="1828800" cy="256032"/>
+            <a:off x="2221992" y="2569464"/>
+            <a:ext cx="1828800" cy="201168"/>
           </a:xfrm>
           <a:prstGeom prst="rect">
             <a:avLst/>
@@ -12619,20 +12619,20 @@
         </p:nvSpPr>
         <p:spPr>
           <a:xfrm>
-            <a:off x="5803392" y="2258568"/>
-            <a:ext cx="1828800" cy="347472"/>
+            <a:off x="4370832" y="2258568"/>
+            <a:ext cx="1828800" cy="292608"/>
           </a:xfrm>
           <a:prstGeom prst="rect">
             <a:avLst>
-              <a:gd name="adj" fmla="val 21053"/>
+              <a:gd name="adj" fmla="val 25000"/>
             </a:avLst>
           </a:prstGeom>
           <a:solidFill>
-            <a:srgbClr val="DDD6FE"/>
+            <a:srgbClr val="FCE7F3"/>
           </a:solidFill>
           <a:ln w="19050">
             <a:solidFill>
-              <a:srgbClr val="7C3AED"/>
+              <a:srgbClr val="DB2777"/>
             </a:solidFill>
             <a:prstDash val="solid"/>
           </a:ln>
@@ -12653,8 +12653,8 @@
         </p:nvSpPr>
         <p:spPr>
           <a:xfrm>
-            <a:off x="5803392" y="2258568"/>
-            <a:ext cx="1828800" cy="347472"/>
+            <a:off x="4370832" y="2258568"/>
+            <a:ext cx="1828800" cy="292608"/>
           </a:xfrm>
           <a:prstGeom prst="rect">
             <a:avLst/>
@@ -12672,13 +12672,13 @@
             <a:r>
               <a:rPr lang="en-US" sz="1300" b="1" dirty="0">
                 <a:solidFill>
-                  <a:srgbClr val="4C1D95"/>
+                  <a:srgbClr val="9D174D"/>
                 </a:solidFill>
                 <a:latin typeface="Trebuchet MS" pitchFamily="34" charset="0"/>
                 <a:ea typeface="Trebuchet MS" pitchFamily="34" charset="-122"/>
                 <a:cs typeface="Trebuchet MS" pitchFamily="34" charset="-120"/>
               </a:rPr>
-              <a:t>charge</a:t>
+              <a:t>start</a:t>
             </a:r>
             <a:endParaRPr lang="en-US" sz="1300" dirty="0"/>
           </a:p>
@@ -12692,8 +12692,8 @@
         </p:nvSpPr>
         <p:spPr>
           <a:xfrm>
-            <a:off x="5803392" y="2624328"/>
-            <a:ext cx="1828800" cy="256032"/>
+            <a:off x="4370832" y="2569464"/>
+            <a:ext cx="1828800" cy="201168"/>
           </a:xfrm>
           <a:prstGeom prst="rect">
             <a:avLst/>
@@ -12717,7 +12717,7 @@
                 <a:ea typeface="Calibri" pitchFamily="34" charset="-122"/>
                 <a:cs typeface="Calibri" pitchFamily="34" charset="-120"/>
               </a:rPr>
-              <a:t>to fill with power or energy</a:t>
+              <a:t>to begin</a:t>
             </a:r>
             <a:endParaRPr lang="en-US" sz="850" dirty="0"/>
           </a:p>
@@ -12731,7 +12731,119 @@
         </p:nvSpPr>
         <p:spPr>
           <a:xfrm>
-            <a:off x="365760" y="3182112"/>
+            <a:off x="6519672" y="2258568"/>
+            <a:ext cx="1828800" cy="292608"/>
+          </a:xfrm>
+          <a:prstGeom prst="rect">
+            <a:avLst>
+              <a:gd name="adj" fmla="val 25000"/>
+            </a:avLst>
+          </a:prstGeom>
+          <a:solidFill>
+            <a:srgbClr val="FCE7F3"/>
+          </a:solidFill>
+          <a:ln w="19050">
+            <a:solidFill>
+              <a:srgbClr val="DB2777"/>
+            </a:solidFill>
+            <a:prstDash val="solid"/>
+          </a:ln>
+          <a:effectLst>
+            <a:outerShdw sx="100000" sy="100000" kx="0" ky="0" algn="bl" rotWithShape="0" blurRad="101600" dist="38100" dir="8100000">
+              <a:srgbClr val="000000">
+                <a:alpha val="12000"/>
+              </a:srgbClr>
+            </a:outerShdw>
+          </a:effectLst>
+        </p:spPr>
+      </p:sp>
+      <p:sp>
+        <p:nvSpPr>
+          <p:cNvPr id="23" name="Text 21"/>
+          <p:cNvSpPr/>
+          <p:nvPr/>
+        </p:nvSpPr>
+        <p:spPr>
+          <a:xfrm>
+            <a:off x="6519672" y="2258568"/>
+            <a:ext cx="1828800" cy="292608"/>
+          </a:xfrm>
+          <a:prstGeom prst="rect">
+            <a:avLst/>
+          </a:prstGeom>
+          <a:noFill/>
+          <a:ln/>
+        </p:spPr>
+        <p:txBody>
+          <a:bodyPr wrap="square" lIns="0" tIns="0" rIns="0" bIns="0" rtlCol="0" anchor="ctr"/>
+          <a:lstStyle/>
+          <a:p>
+            <a:pPr algn="ctr" indent="0" marL="0">
+              <a:buNone/>
+            </a:pPr>
+            <a:r>
+              <a:rPr lang="en-US" sz="1300" b="1" dirty="0">
+                <a:solidFill>
+                  <a:srgbClr val="9D174D"/>
+                </a:solidFill>
+                <a:latin typeface="Trebuchet MS" pitchFamily="34" charset="0"/>
+                <a:ea typeface="Trebuchet MS" pitchFamily="34" charset="-122"/>
+                <a:cs typeface="Trebuchet MS" pitchFamily="34" charset="-120"/>
+              </a:rPr>
+              <a:t>ing</a:t>
+            </a:r>
+            <a:endParaRPr lang="en-US" sz="1300" dirty="0"/>
+          </a:p>
+        </p:txBody>
+      </p:sp>
+      <p:sp>
+        <p:nvSpPr>
+          <p:cNvPr id="24" name="Text 22"/>
+          <p:cNvSpPr/>
+          <p:nvPr/>
+        </p:nvSpPr>
+        <p:spPr>
+          <a:xfrm>
+            <a:off x="6519672" y="2569464"/>
+            <a:ext cx="1828800" cy="201168"/>
+          </a:xfrm>
+          <a:prstGeom prst="rect">
+            <a:avLst/>
+          </a:prstGeom>
+          <a:noFill/>
+          <a:ln/>
+        </p:spPr>
+        <p:txBody>
+          <a:bodyPr wrap="square" lIns="0" tIns="0" rIns="0" bIns="0" rtlCol="0" anchor="t"/>
+          <a:lstStyle/>
+          <a:p>
+            <a:pPr algn="ctr" indent="0" marL="0">
+              <a:buNone/>
+            </a:pPr>
+            <a:r>
+              <a:rPr lang="en-US" sz="850" dirty="0">
+                <a:solidFill>
+                  <a:srgbClr val="475569"/>
+                </a:solidFill>
+                <a:latin typeface="Calibri" pitchFamily="34" charset="0"/>
+                <a:ea typeface="Calibri" pitchFamily="34" charset="-122"/>
+                <a:cs typeface="Calibri" pitchFamily="34" charset="-120"/>
+              </a:rPr>
+              <a:t>happening now or ongoing</a:t>
+            </a:r>
+            <a:endParaRPr lang="en-US" sz="850" dirty="0"/>
+          </a:p>
+        </p:txBody>
+      </p:sp>
+      <p:sp>
+        <p:nvSpPr>
+          <p:cNvPr id="25" name="Shape 23"/>
+          <p:cNvSpPr/>
+          <p:nvPr/>
+        </p:nvSpPr>
+        <p:spPr>
+          <a:xfrm>
+            <a:off x="365760" y="3273552"/>
             <a:ext cx="1371600" cy="658368"/>
           </a:xfrm>
           <a:prstGeom prst="rect">
@@ -12752,13 +12864,13 @@
       </p:sp>
       <p:sp>
         <p:nvSpPr>
-          <p:cNvPr id="23" name="Text 21"/>
-          <p:cNvSpPr/>
-          <p:nvPr/>
-        </p:nvSpPr>
-        <p:spPr>
-          <a:xfrm>
-            <a:off x="365760" y="3182112"/>
+          <p:cNvPr id="26" name="Text 24"/>
+          <p:cNvSpPr/>
+          <p:nvPr/>
+        </p:nvSpPr>
+        <p:spPr>
+          <a:xfrm>
+            <a:off x="365760" y="3273552"/>
             <a:ext cx="1371600" cy="658368"/>
           </a:xfrm>
           <a:prstGeom prst="rect">
@@ -12791,13 +12903,13 @@
       </p:sp>
       <p:sp>
         <p:nvSpPr>
-          <p:cNvPr id="24" name="Shape 22"/>
-          <p:cNvSpPr/>
-          <p:nvPr/>
-        </p:nvSpPr>
-        <p:spPr>
-          <a:xfrm>
-            <a:off x="1874520" y="3182112"/>
+          <p:cNvPr id="27" name="Shape 25"/>
+          <p:cNvSpPr/>
+          <p:nvPr/>
+        </p:nvSpPr>
+        <p:spPr>
+          <a:xfrm>
+            <a:off x="1874520" y="3273552"/>
             <a:ext cx="6903720" cy="658368"/>
           </a:xfrm>
           <a:prstGeom prst="rect">
@@ -12818,13 +12930,13 @@
       </p:sp>
       <p:sp>
         <p:nvSpPr>
-          <p:cNvPr id="25" name="Text 23"/>
-          <p:cNvSpPr/>
-          <p:nvPr/>
-        </p:nvSpPr>
-        <p:spPr>
-          <a:xfrm>
-            <a:off x="1874520" y="3182112"/>
+          <p:cNvPr id="28" name="Text 26"/>
+          <p:cNvSpPr/>
+          <p:nvPr/>
+        </p:nvSpPr>
+        <p:spPr>
+          <a:xfrm>
+            <a:off x="1874520" y="3273552"/>
             <a:ext cx="6903720" cy="658368"/>
           </a:xfrm>
           <a:prstGeom prst="rect">
@@ -12857,13 +12969,13 @@
       </p:sp>
       <p:sp>
         <p:nvSpPr>
-          <p:cNvPr id="26" name="Shape 24"/>
-          <p:cNvSpPr/>
-          <p:nvPr/>
-        </p:nvSpPr>
-        <p:spPr>
-          <a:xfrm>
-            <a:off x="365760" y="4005072"/>
+          <p:cNvPr id="29" name="Shape 27"/>
+          <p:cNvSpPr/>
+          <p:nvPr/>
+        </p:nvSpPr>
+        <p:spPr>
+          <a:xfrm>
+            <a:off x="365760" y="4096512"/>
             <a:ext cx="1371600" cy="658368"/>
           </a:xfrm>
           <a:prstGeom prst="rect">
@@ -12884,13 +12996,13 @@
       </p:sp>
       <p:sp>
         <p:nvSpPr>
-          <p:cNvPr id="27" name="Text 25"/>
-          <p:cNvSpPr/>
-          <p:nvPr/>
-        </p:nvSpPr>
-        <p:spPr>
-          <a:xfrm>
-            <a:off x="365760" y="4005072"/>
+          <p:cNvPr id="30" name="Text 28"/>
+          <p:cNvSpPr/>
+          <p:nvPr/>
+        </p:nvSpPr>
+        <p:spPr>
+          <a:xfrm>
+            <a:off x="365760" y="4096512"/>
             <a:ext cx="1371600" cy="658368"/>
           </a:xfrm>
           <a:prstGeom prst="rect">
@@ -12923,13 +13035,13 @@
       </p:sp>
       <p:sp>
         <p:nvSpPr>
-          <p:cNvPr id="28" name="Shape 26"/>
-          <p:cNvSpPr/>
-          <p:nvPr/>
-        </p:nvSpPr>
-        <p:spPr>
-          <a:xfrm>
-            <a:off x="1874520" y="4005072"/>
+          <p:cNvPr id="31" name="Shape 29"/>
+          <p:cNvSpPr/>
+          <p:nvPr/>
+        </p:nvSpPr>
+        <p:spPr>
+          <a:xfrm>
+            <a:off x="1874520" y="4096512"/>
             <a:ext cx="6903720" cy="658368"/>
           </a:xfrm>
           <a:prstGeom prst="rect">
@@ -12950,13 +13062,13 @@
       </p:sp>
       <p:sp>
         <p:nvSpPr>
-          <p:cNvPr id="29" name="Text 27"/>
-          <p:cNvSpPr/>
-          <p:nvPr/>
-        </p:nvSpPr>
-        <p:spPr>
-          <a:xfrm>
-            <a:off x="1874520" y="4005072"/>
+          <p:cNvPr id="32" name="Text 30"/>
+          <p:cNvSpPr/>
+          <p:nvPr/>
+        </p:nvSpPr>
+        <p:spPr>
+          <a:xfrm>
+            <a:off x="1874520" y="4096512"/>
             <a:ext cx="6903720" cy="658368"/>
           </a:xfrm>
           <a:prstGeom prst="rect">
@@ -13412,7 +13524,7 @@
                 <a:ea typeface="Trebuchet MS" pitchFamily="34" charset="-122"/>
                 <a:cs typeface="Trebuchet MS" pitchFamily="34" charset="-120"/>
               </a:rPr>
-              <a:t>recharge</a:t>
+              <a:t>restarting</a:t>
             </a:r>
             <a:endParaRPr lang="en-US" sz="2800" dirty="0"/>
           </a:p>
@@ -13427,11 +13539,11 @@
         <p:spPr>
           <a:xfrm>
             <a:off x="365760" y="2240280"/>
-            <a:ext cx="1371600" cy="658368"/>
+            <a:ext cx="1371600" cy="841248"/>
           </a:xfrm>
           <a:prstGeom prst="rect">
             <a:avLst>
-              <a:gd name="adj" fmla="val 8333"/>
+              <a:gd name="adj" fmla="val 6522"/>
             </a:avLst>
           </a:prstGeom>
           <a:solidFill>
@@ -13454,7 +13566,7 @@
         <p:spPr>
           <a:xfrm>
             <a:off x="365760" y="2240280"/>
-            <a:ext cx="1371600" cy="658368"/>
+            <a:ext cx="1371600" cy="841248"/>
           </a:xfrm>
           <a:prstGeom prst="rect">
             <a:avLst/>
@@ -13492,12 +13604,12 @@
         </p:nvSpPr>
         <p:spPr>
           <a:xfrm>
-            <a:off x="2938272" y="2258568"/>
-            <a:ext cx="1828800" cy="347472"/>
+            <a:off x="2221992" y="2258568"/>
+            <a:ext cx="1828800" cy="292608"/>
           </a:xfrm>
           <a:prstGeom prst="rect">
             <a:avLst>
-              <a:gd name="adj" fmla="val 21053"/>
+              <a:gd name="adj" fmla="val 25000"/>
             </a:avLst>
           </a:prstGeom>
           <a:solidFill>
@@ -13526,8 +13638,8 @@
         </p:nvSpPr>
         <p:spPr>
           <a:xfrm>
-            <a:off x="2938272" y="2258568"/>
-            <a:ext cx="1828800" cy="347472"/>
+            <a:off x="2221992" y="2258568"/>
+            <a:ext cx="1828800" cy="292608"/>
           </a:xfrm>
           <a:prstGeom prst="rect">
             <a:avLst/>
@@ -13565,8 +13677,8 @@
         </p:nvSpPr>
         <p:spPr>
           <a:xfrm>
-            <a:off x="2938272" y="2624328"/>
-            <a:ext cx="1828800" cy="256032"/>
+            <a:off x="2221992" y="2569464"/>
+            <a:ext cx="1828800" cy="201168"/>
           </a:xfrm>
           <a:prstGeom prst="rect">
             <a:avLst/>
@@ -13604,20 +13716,20 @@
         </p:nvSpPr>
         <p:spPr>
           <a:xfrm>
-            <a:off x="5803392" y="2258568"/>
-            <a:ext cx="1828800" cy="347472"/>
+            <a:off x="4370832" y="2258568"/>
+            <a:ext cx="1828800" cy="292608"/>
           </a:xfrm>
           <a:prstGeom prst="rect">
             <a:avLst>
-              <a:gd name="adj" fmla="val 21053"/>
+              <a:gd name="adj" fmla="val 25000"/>
             </a:avLst>
           </a:prstGeom>
           <a:solidFill>
-            <a:srgbClr val="DDD6FE"/>
+            <a:srgbClr val="FCE7F3"/>
           </a:solidFill>
           <a:ln w="19050">
             <a:solidFill>
-              <a:srgbClr val="7C3AED"/>
+              <a:srgbClr val="DB2777"/>
             </a:solidFill>
             <a:prstDash val="solid"/>
           </a:ln>
@@ -13638,8 +13750,8 @@
         </p:nvSpPr>
         <p:spPr>
           <a:xfrm>
-            <a:off x="5803392" y="2258568"/>
-            <a:ext cx="1828800" cy="347472"/>
+            <a:off x="4370832" y="2258568"/>
+            <a:ext cx="1828800" cy="292608"/>
           </a:xfrm>
           <a:prstGeom prst="rect">
             <a:avLst/>
@@ -13657,13 +13769,13 @@
             <a:r>
               <a:rPr lang="en-US" sz="1300" b="1" dirty="0">
                 <a:solidFill>
-                  <a:srgbClr val="4C1D95"/>
+                  <a:srgbClr val="9D174D"/>
                 </a:solidFill>
                 <a:latin typeface="Trebuchet MS" pitchFamily="34" charset="0"/>
                 <a:ea typeface="Trebuchet MS" pitchFamily="34" charset="-122"/>
                 <a:cs typeface="Trebuchet MS" pitchFamily="34" charset="-120"/>
               </a:rPr>
-              <a:t>charge</a:t>
+              <a:t>start</a:t>
             </a:r>
             <a:endParaRPr lang="en-US" sz="1300" dirty="0"/>
           </a:p>
@@ -13677,8 +13789,8 @@
         </p:nvSpPr>
         <p:spPr>
           <a:xfrm>
-            <a:off x="5803392" y="2624328"/>
-            <a:ext cx="1828800" cy="256032"/>
+            <a:off x="4370832" y="2569464"/>
+            <a:ext cx="1828800" cy="201168"/>
           </a:xfrm>
           <a:prstGeom prst="rect">
             <a:avLst/>
@@ -13702,7 +13814,7 @@
                 <a:ea typeface="Calibri" pitchFamily="34" charset="-122"/>
                 <a:cs typeface="Calibri" pitchFamily="34" charset="-120"/>
               </a:rPr>
-              <a:t>to fill with power or energy</a:t>
+              <a:t>to begin</a:t>
             </a:r>
             <a:endParaRPr lang="en-US" sz="850" dirty="0"/>
           </a:p>
@@ -13716,7 +13828,119 @@
         </p:nvSpPr>
         <p:spPr>
           <a:xfrm>
-            <a:off x="365760" y="3182112"/>
+            <a:off x="6519672" y="2258568"/>
+            <a:ext cx="1828800" cy="292608"/>
+          </a:xfrm>
+          <a:prstGeom prst="rect">
+            <a:avLst>
+              <a:gd name="adj" fmla="val 25000"/>
+            </a:avLst>
+          </a:prstGeom>
+          <a:solidFill>
+            <a:srgbClr val="FCE7F3"/>
+          </a:solidFill>
+          <a:ln w="19050">
+            <a:solidFill>
+              <a:srgbClr val="DB2777"/>
+            </a:solidFill>
+            <a:prstDash val="solid"/>
+          </a:ln>
+          <a:effectLst>
+            <a:outerShdw sx="100000" sy="100000" kx="0" ky="0" algn="bl" rotWithShape="0" blurRad="101600" dist="38100" dir="8100000">
+              <a:srgbClr val="000000">
+                <a:alpha val="12000"/>
+              </a:srgbClr>
+            </a:outerShdw>
+          </a:effectLst>
+        </p:spPr>
+      </p:sp>
+      <p:sp>
+        <p:nvSpPr>
+          <p:cNvPr id="23" name="Text 21"/>
+          <p:cNvSpPr/>
+          <p:nvPr/>
+        </p:nvSpPr>
+        <p:spPr>
+          <a:xfrm>
+            <a:off x="6519672" y="2258568"/>
+            <a:ext cx="1828800" cy="292608"/>
+          </a:xfrm>
+          <a:prstGeom prst="rect">
+            <a:avLst/>
+          </a:prstGeom>
+          <a:noFill/>
+          <a:ln/>
+        </p:spPr>
+        <p:txBody>
+          <a:bodyPr wrap="square" lIns="0" tIns="0" rIns="0" bIns="0" rtlCol="0" anchor="ctr"/>
+          <a:lstStyle/>
+          <a:p>
+            <a:pPr algn="ctr" indent="0" marL="0">
+              <a:buNone/>
+            </a:pPr>
+            <a:r>
+              <a:rPr lang="en-US" sz="1300" b="1" dirty="0">
+                <a:solidFill>
+                  <a:srgbClr val="9D174D"/>
+                </a:solidFill>
+                <a:latin typeface="Trebuchet MS" pitchFamily="34" charset="0"/>
+                <a:ea typeface="Trebuchet MS" pitchFamily="34" charset="-122"/>
+                <a:cs typeface="Trebuchet MS" pitchFamily="34" charset="-120"/>
+              </a:rPr>
+              <a:t>ing</a:t>
+            </a:r>
+            <a:endParaRPr lang="en-US" sz="1300" dirty="0"/>
+          </a:p>
+        </p:txBody>
+      </p:sp>
+      <p:sp>
+        <p:nvSpPr>
+          <p:cNvPr id="24" name="Text 22"/>
+          <p:cNvSpPr/>
+          <p:nvPr/>
+        </p:nvSpPr>
+        <p:spPr>
+          <a:xfrm>
+            <a:off x="6519672" y="2569464"/>
+            <a:ext cx="1828800" cy="201168"/>
+          </a:xfrm>
+          <a:prstGeom prst="rect">
+            <a:avLst/>
+          </a:prstGeom>
+          <a:noFill/>
+          <a:ln/>
+        </p:spPr>
+        <p:txBody>
+          <a:bodyPr wrap="square" lIns="0" tIns="0" rIns="0" bIns="0" rtlCol="0" anchor="t"/>
+          <a:lstStyle/>
+          <a:p>
+            <a:pPr algn="ctr" indent="0" marL="0">
+              <a:buNone/>
+            </a:pPr>
+            <a:r>
+              <a:rPr lang="en-US" sz="850" dirty="0">
+                <a:solidFill>
+                  <a:srgbClr val="475569"/>
+                </a:solidFill>
+                <a:latin typeface="Calibri" pitchFamily="34" charset="0"/>
+                <a:ea typeface="Calibri" pitchFamily="34" charset="-122"/>
+                <a:cs typeface="Calibri" pitchFamily="34" charset="-120"/>
+              </a:rPr>
+              <a:t>happening now or ongoing</a:t>
+            </a:r>
+            <a:endParaRPr lang="en-US" sz="850" dirty="0"/>
+          </a:p>
+        </p:txBody>
+      </p:sp>
+      <p:sp>
+        <p:nvSpPr>
+          <p:cNvPr id="25" name="Shape 23"/>
+          <p:cNvSpPr/>
+          <p:nvPr/>
+        </p:nvSpPr>
+        <p:spPr>
+          <a:xfrm>
+            <a:off x="365760" y="3273552"/>
             <a:ext cx="1371600" cy="658368"/>
           </a:xfrm>
           <a:prstGeom prst="rect">
@@ -13737,13 +13961,13 @@
       </p:sp>
       <p:sp>
         <p:nvSpPr>
-          <p:cNvPr id="23" name="Text 21"/>
-          <p:cNvSpPr/>
-          <p:nvPr/>
-        </p:nvSpPr>
-        <p:spPr>
-          <a:xfrm>
-            <a:off x="365760" y="3182112"/>
+          <p:cNvPr id="26" name="Text 24"/>
+          <p:cNvSpPr/>
+          <p:nvPr/>
+        </p:nvSpPr>
+        <p:spPr>
+          <a:xfrm>
+            <a:off x="365760" y="3273552"/>
             <a:ext cx="1371600" cy="658368"/>
           </a:xfrm>
           <a:prstGeom prst="rect">
@@ -13776,13 +14000,13 @@
       </p:sp>
       <p:sp>
         <p:nvSpPr>
-          <p:cNvPr id="24" name="Shape 22"/>
-          <p:cNvSpPr/>
-          <p:nvPr/>
-        </p:nvSpPr>
-        <p:spPr>
-          <a:xfrm>
-            <a:off x="1874520" y="3182112"/>
+          <p:cNvPr id="27" name="Shape 25"/>
+          <p:cNvSpPr/>
+          <p:nvPr/>
+        </p:nvSpPr>
+        <p:spPr>
+          <a:xfrm>
+            <a:off x="1874520" y="3273552"/>
             <a:ext cx="6903720" cy="658368"/>
           </a:xfrm>
           <a:prstGeom prst="rect">
@@ -13803,13 +14027,13 @@
       </p:sp>
       <p:sp>
         <p:nvSpPr>
-          <p:cNvPr id="25" name="Shape 23"/>
-          <p:cNvSpPr/>
-          <p:nvPr/>
-        </p:nvSpPr>
-        <p:spPr>
-          <a:xfrm>
-            <a:off x="2999232" y="3273552"/>
+          <p:cNvPr id="28" name="Shape 26"/>
+          <p:cNvSpPr/>
+          <p:nvPr/>
+        </p:nvSpPr>
+        <p:spPr>
+          <a:xfrm>
+            <a:off x="2313432" y="3364992"/>
             <a:ext cx="1645920" cy="475488"/>
           </a:xfrm>
           <a:prstGeom prst="rect">
@@ -13830,13 +14054,13 @@
       </p:sp>
       <p:sp>
         <p:nvSpPr>
-          <p:cNvPr id="26" name="Text 24"/>
-          <p:cNvSpPr/>
-          <p:nvPr/>
-        </p:nvSpPr>
-        <p:spPr>
-          <a:xfrm>
-            <a:off x="2999232" y="3273552"/>
+          <p:cNvPr id="29" name="Text 27"/>
+          <p:cNvSpPr/>
+          <p:nvPr/>
+        </p:nvSpPr>
+        <p:spPr>
+          <a:xfrm>
+            <a:off x="2313432" y="3364992"/>
             <a:ext cx="1645920" cy="475488"/>
           </a:xfrm>
           <a:prstGeom prst="rect">
@@ -13869,14 +14093,14 @@
       </p:sp>
       <p:sp>
         <p:nvSpPr>
-          <p:cNvPr id="27" name="Text 25"/>
-          <p:cNvSpPr/>
-          <p:nvPr/>
-        </p:nvSpPr>
-        <p:spPr>
-          <a:xfrm>
-            <a:off x="4645152" y="3273552"/>
-            <a:ext cx="1097280" cy="475488"/>
+          <p:cNvPr id="30" name="Text 28"/>
+          <p:cNvSpPr/>
+          <p:nvPr/>
+        </p:nvSpPr>
+        <p:spPr>
+          <a:xfrm>
+            <a:off x="3959352" y="3364992"/>
+            <a:ext cx="411480" cy="475488"/>
           </a:xfrm>
           <a:prstGeom prst="rect">
             <a:avLst/>
@@ -13908,13 +14132,13 @@
       </p:sp>
       <p:sp>
         <p:nvSpPr>
-          <p:cNvPr id="28" name="Shape 26"/>
-          <p:cNvSpPr/>
-          <p:nvPr/>
-        </p:nvSpPr>
-        <p:spPr>
-          <a:xfrm>
-            <a:off x="5742432" y="3273552"/>
+          <p:cNvPr id="31" name="Shape 29"/>
+          <p:cNvSpPr/>
+          <p:nvPr/>
+        </p:nvSpPr>
+        <p:spPr>
+          <a:xfrm>
+            <a:off x="4370832" y="3364992"/>
             <a:ext cx="1645920" cy="475488"/>
           </a:xfrm>
           <a:prstGeom prst="rect">
@@ -13935,13 +14159,13 @@
       </p:sp>
       <p:sp>
         <p:nvSpPr>
-          <p:cNvPr id="29" name="Text 27"/>
-          <p:cNvSpPr/>
-          <p:nvPr/>
-        </p:nvSpPr>
-        <p:spPr>
-          <a:xfrm>
-            <a:off x="5742432" y="3273552"/>
+          <p:cNvPr id="32" name="Text 30"/>
+          <p:cNvSpPr/>
+          <p:nvPr/>
+        </p:nvSpPr>
+        <p:spPr>
+          <a:xfrm>
+            <a:off x="4370832" y="3364992"/>
             <a:ext cx="1645920" cy="475488"/>
           </a:xfrm>
           <a:prstGeom prst="rect">
@@ -13966,7 +14190,7 @@
                 <a:ea typeface="Trebuchet MS" pitchFamily="34" charset="-122"/>
                 <a:cs typeface="Trebuchet MS" pitchFamily="34" charset="-120"/>
               </a:rPr>
-              <a:t>charge</a:t>
+              <a:t>start</a:t>
             </a:r>
             <a:endParaRPr lang="en-US" sz="1400" dirty="0"/>
           </a:p>
@@ -13974,13 +14198,118 @@
       </p:sp>
       <p:sp>
         <p:nvSpPr>
-          <p:cNvPr id="30" name="Shape 28"/>
-          <p:cNvSpPr/>
-          <p:nvPr/>
-        </p:nvSpPr>
-        <p:spPr>
-          <a:xfrm>
-            <a:off x="365760" y="4005072"/>
+          <p:cNvPr id="33" name="Text 31"/>
+          <p:cNvSpPr/>
+          <p:nvPr/>
+        </p:nvSpPr>
+        <p:spPr>
+          <a:xfrm>
+            <a:off x="6016752" y="3364992"/>
+            <a:ext cx="411480" cy="475488"/>
+          </a:xfrm>
+          <a:prstGeom prst="rect">
+            <a:avLst/>
+          </a:prstGeom>
+          <a:noFill/>
+          <a:ln/>
+        </p:spPr>
+        <p:txBody>
+          <a:bodyPr wrap="square" lIns="0" tIns="0" rIns="0" bIns="0" rtlCol="0" anchor="ctr"/>
+          <a:lstStyle/>
+          <a:p>
+            <a:pPr algn="ctr" indent="0" marL="0">
+              <a:buNone/>
+            </a:pPr>
+            <a:r>
+              <a:rPr lang="en-US" sz="1600" b="1" dirty="0">
+                <a:solidFill>
+                  <a:srgbClr val="0D9488"/>
+                </a:solidFill>
+                <a:latin typeface="Trebuchet MS" pitchFamily="34" charset="0"/>
+                <a:ea typeface="Trebuchet MS" pitchFamily="34" charset="-122"/>
+                <a:cs typeface="Trebuchet MS" pitchFamily="34" charset="-120"/>
+              </a:rPr>
+              <a:t>·</a:t>
+            </a:r>
+            <a:endParaRPr lang="en-US" sz="1600" dirty="0"/>
+          </a:p>
+        </p:txBody>
+      </p:sp>
+      <p:sp>
+        <p:nvSpPr>
+          <p:cNvPr id="34" name="Shape 32"/>
+          <p:cNvSpPr/>
+          <p:nvPr/>
+        </p:nvSpPr>
+        <p:spPr>
+          <a:xfrm>
+            <a:off x="6428232" y="3364992"/>
+            <a:ext cx="1645920" cy="475488"/>
+          </a:xfrm>
+          <a:prstGeom prst="rect">
+            <a:avLst>
+              <a:gd name="adj" fmla="val 9615"/>
+            </a:avLst>
+          </a:prstGeom>
+          <a:solidFill>
+            <a:srgbClr val="FFFFFF"/>
+          </a:solidFill>
+          <a:ln w="12700">
+            <a:solidFill>
+              <a:srgbClr val="0D9488"/>
+            </a:solidFill>
+            <a:prstDash val="solid"/>
+          </a:ln>
+        </p:spPr>
+      </p:sp>
+      <p:sp>
+        <p:nvSpPr>
+          <p:cNvPr id="35" name="Text 33"/>
+          <p:cNvSpPr/>
+          <p:nvPr/>
+        </p:nvSpPr>
+        <p:spPr>
+          <a:xfrm>
+            <a:off x="6428232" y="3364992"/>
+            <a:ext cx="1645920" cy="475488"/>
+          </a:xfrm>
+          <a:prstGeom prst="rect">
+            <a:avLst/>
+          </a:prstGeom>
+          <a:noFill/>
+          <a:ln/>
+        </p:spPr>
+        <p:txBody>
+          <a:bodyPr wrap="square" lIns="0" tIns="0" rIns="0" bIns="0" rtlCol="0" anchor="ctr"/>
+          <a:lstStyle/>
+          <a:p>
+            <a:pPr algn="ctr" indent="0" marL="0">
+              <a:buNone/>
+            </a:pPr>
+            <a:r>
+              <a:rPr lang="en-US" sz="1400" b="1" dirty="0">
+                <a:solidFill>
+                  <a:srgbClr val="0D9488"/>
+                </a:solidFill>
+                <a:latin typeface="Trebuchet MS" pitchFamily="34" charset="0"/>
+                <a:ea typeface="Trebuchet MS" pitchFamily="34" charset="-122"/>
+                <a:cs typeface="Trebuchet MS" pitchFamily="34" charset="-120"/>
+              </a:rPr>
+              <a:t>ing</a:t>
+            </a:r>
+            <a:endParaRPr lang="en-US" sz="1400" dirty="0"/>
+          </a:p>
+        </p:txBody>
+      </p:sp>
+      <p:sp>
+        <p:nvSpPr>
+          <p:cNvPr id="36" name="Shape 34"/>
+          <p:cNvSpPr/>
+          <p:nvPr/>
+        </p:nvSpPr>
+        <p:spPr>
+          <a:xfrm>
+            <a:off x="365760" y="4096512"/>
             <a:ext cx="1371600" cy="658368"/>
           </a:xfrm>
           <a:prstGeom prst="rect">
@@ -14001,13 +14330,13 @@
       </p:sp>
       <p:sp>
         <p:nvSpPr>
-          <p:cNvPr id="31" name="Text 29"/>
-          <p:cNvSpPr/>
-          <p:nvPr/>
-        </p:nvSpPr>
-        <p:spPr>
-          <a:xfrm>
-            <a:off x="365760" y="4005072"/>
+          <p:cNvPr id="37" name="Text 35"/>
+          <p:cNvSpPr/>
+          <p:nvPr/>
+        </p:nvSpPr>
+        <p:spPr>
+          <a:xfrm>
+            <a:off x="365760" y="4096512"/>
             <a:ext cx="1371600" cy="658368"/>
           </a:xfrm>
           <a:prstGeom prst="rect">
@@ -14040,13 +14369,13 @@
       </p:sp>
       <p:sp>
         <p:nvSpPr>
-          <p:cNvPr id="32" name="Shape 30"/>
-          <p:cNvSpPr/>
-          <p:nvPr/>
-        </p:nvSpPr>
-        <p:spPr>
-          <a:xfrm>
-            <a:off x="1874520" y="4005072"/>
+          <p:cNvPr id="38" name="Shape 36"/>
+          <p:cNvSpPr/>
+          <p:nvPr/>
+        </p:nvSpPr>
+        <p:spPr>
+          <a:xfrm>
+            <a:off x="1874520" y="4096512"/>
             <a:ext cx="6903720" cy="658368"/>
           </a:xfrm>
           <a:prstGeom prst="rect">
@@ -14067,13 +14396,13 @@
       </p:sp>
       <p:sp>
         <p:nvSpPr>
-          <p:cNvPr id="33" name="Text 31"/>
-          <p:cNvSpPr/>
-          <p:nvPr/>
-        </p:nvSpPr>
-        <p:spPr>
-          <a:xfrm>
-            <a:off x="1874520" y="4005072"/>
+          <p:cNvPr id="39" name="Text 37"/>
+          <p:cNvSpPr/>
+          <p:nvPr/>
+        </p:nvSpPr>
+        <p:spPr>
+          <a:xfrm>
+            <a:off x="1874520" y="4096512"/>
             <a:ext cx="6903720" cy="658368"/>
           </a:xfrm>
           <a:prstGeom prst="rect">
@@ -14794,7 +15123,7 @@
                 <a:ea typeface="Trebuchet MS" pitchFamily="34" charset="-122"/>
                 <a:cs typeface="Trebuchet MS" pitchFamily="34" charset="-120"/>
               </a:rPr>
-              <a:t>recharge</a:t>
+              <a:t>restarting</a:t>
             </a:r>
             <a:endParaRPr lang="en-US" sz="2800" dirty="0"/>
           </a:p>
@@ -14809,11 +15138,11 @@
         <p:spPr>
           <a:xfrm>
             <a:off x="365760" y="2240280"/>
-            <a:ext cx="1371600" cy="658368"/>
+            <a:ext cx="1371600" cy="841248"/>
           </a:xfrm>
           <a:prstGeom prst="rect">
             <a:avLst>
-              <a:gd name="adj" fmla="val 8333"/>
+              <a:gd name="adj" fmla="val 6522"/>
             </a:avLst>
           </a:prstGeom>
           <a:solidFill>
@@ -14836,7 +15165,7 @@
         <p:spPr>
           <a:xfrm>
             <a:off x="365760" y="2240280"/>
-            <a:ext cx="1371600" cy="658368"/>
+            <a:ext cx="1371600" cy="841248"/>
           </a:xfrm>
           <a:prstGeom prst="rect">
             <a:avLst/>
@@ -14874,12 +15203,12 @@
         </p:nvSpPr>
         <p:spPr>
           <a:xfrm>
-            <a:off x="2938272" y="2258568"/>
-            <a:ext cx="1828800" cy="347472"/>
+            <a:off x="2221992" y="2258568"/>
+            <a:ext cx="1828800" cy="292608"/>
           </a:xfrm>
           <a:prstGeom prst="rect">
             <a:avLst>
-              <a:gd name="adj" fmla="val 21053"/>
+              <a:gd name="adj" fmla="val 25000"/>
             </a:avLst>
           </a:prstGeom>
           <a:solidFill>
@@ -14908,8 +15237,8 @@
         </p:nvSpPr>
         <p:spPr>
           <a:xfrm>
-            <a:off x="2938272" y="2258568"/>
-            <a:ext cx="1828800" cy="347472"/>
+            <a:off x="2221992" y="2258568"/>
+            <a:ext cx="1828800" cy="292608"/>
           </a:xfrm>
           <a:prstGeom prst="rect">
             <a:avLst/>
@@ -14947,8 +15276,8 @@
         </p:nvSpPr>
         <p:spPr>
           <a:xfrm>
-            <a:off x="2938272" y="2624328"/>
-            <a:ext cx="1828800" cy="256032"/>
+            <a:off x="2221992" y="2569464"/>
+            <a:ext cx="1828800" cy="201168"/>
           </a:xfrm>
           <a:prstGeom prst="rect">
             <a:avLst/>
@@ -14986,20 +15315,20 @@
         </p:nvSpPr>
         <p:spPr>
           <a:xfrm>
-            <a:off x="5803392" y="2258568"/>
-            <a:ext cx="1828800" cy="347472"/>
+            <a:off x="4370832" y="2258568"/>
+            <a:ext cx="1828800" cy="292608"/>
           </a:xfrm>
           <a:prstGeom prst="rect">
             <a:avLst>
-              <a:gd name="adj" fmla="val 21053"/>
+              <a:gd name="adj" fmla="val 25000"/>
             </a:avLst>
           </a:prstGeom>
           <a:solidFill>
-            <a:srgbClr val="DDD6FE"/>
+            <a:srgbClr val="FCE7F3"/>
           </a:solidFill>
           <a:ln w="19050">
             <a:solidFill>
-              <a:srgbClr val="7C3AED"/>
+              <a:srgbClr val="DB2777"/>
             </a:solidFill>
             <a:prstDash val="solid"/>
           </a:ln>
@@ -15020,8 +15349,8 @@
         </p:nvSpPr>
         <p:spPr>
           <a:xfrm>
-            <a:off x="5803392" y="2258568"/>
-            <a:ext cx="1828800" cy="347472"/>
+            <a:off x="4370832" y="2258568"/>
+            <a:ext cx="1828800" cy="292608"/>
           </a:xfrm>
           <a:prstGeom prst="rect">
             <a:avLst/>
@@ -15039,13 +15368,13 @@
             <a:r>
               <a:rPr lang="en-US" sz="1300" b="1" dirty="0">
                 <a:solidFill>
-                  <a:srgbClr val="4C1D95"/>
+                  <a:srgbClr val="9D174D"/>
                 </a:solidFill>
                 <a:latin typeface="Trebuchet MS" pitchFamily="34" charset="0"/>
                 <a:ea typeface="Trebuchet MS" pitchFamily="34" charset="-122"/>
                 <a:cs typeface="Trebuchet MS" pitchFamily="34" charset="-120"/>
               </a:rPr>
-              <a:t>charge</a:t>
+              <a:t>start</a:t>
             </a:r>
             <a:endParaRPr lang="en-US" sz="1300" dirty="0"/>
           </a:p>
@@ -15059,8 +15388,8 @@
         </p:nvSpPr>
         <p:spPr>
           <a:xfrm>
-            <a:off x="5803392" y="2624328"/>
-            <a:ext cx="1828800" cy="256032"/>
+            <a:off x="4370832" y="2569464"/>
+            <a:ext cx="1828800" cy="201168"/>
           </a:xfrm>
           <a:prstGeom prst="rect">
             <a:avLst/>
@@ -15084,7 +15413,7 @@
                 <a:ea typeface="Calibri" pitchFamily="34" charset="-122"/>
                 <a:cs typeface="Calibri" pitchFamily="34" charset="-120"/>
               </a:rPr>
-              <a:t>to fill with power or energy</a:t>
+              <a:t>to begin</a:t>
             </a:r>
             <a:endParaRPr lang="en-US" sz="850" dirty="0"/>
           </a:p>
@@ -15098,7 +15427,119 @@
         </p:nvSpPr>
         <p:spPr>
           <a:xfrm>
-            <a:off x="365760" y="3182112"/>
+            <a:off x="6519672" y="2258568"/>
+            <a:ext cx="1828800" cy="292608"/>
+          </a:xfrm>
+          <a:prstGeom prst="rect">
+            <a:avLst>
+              <a:gd name="adj" fmla="val 25000"/>
+            </a:avLst>
+          </a:prstGeom>
+          <a:solidFill>
+            <a:srgbClr val="FCE7F3"/>
+          </a:solidFill>
+          <a:ln w="19050">
+            <a:solidFill>
+              <a:srgbClr val="DB2777"/>
+            </a:solidFill>
+            <a:prstDash val="solid"/>
+          </a:ln>
+          <a:effectLst>
+            <a:outerShdw sx="100000" sy="100000" kx="0" ky="0" algn="bl" rotWithShape="0" blurRad="101600" dist="38100" dir="8100000">
+              <a:srgbClr val="000000">
+                <a:alpha val="12000"/>
+              </a:srgbClr>
+            </a:outerShdw>
+          </a:effectLst>
+        </p:spPr>
+      </p:sp>
+      <p:sp>
+        <p:nvSpPr>
+          <p:cNvPr id="23" name="Text 21"/>
+          <p:cNvSpPr/>
+          <p:nvPr/>
+        </p:nvSpPr>
+        <p:spPr>
+          <a:xfrm>
+            <a:off x="6519672" y="2258568"/>
+            <a:ext cx="1828800" cy="292608"/>
+          </a:xfrm>
+          <a:prstGeom prst="rect">
+            <a:avLst/>
+          </a:prstGeom>
+          <a:noFill/>
+          <a:ln/>
+        </p:spPr>
+        <p:txBody>
+          <a:bodyPr wrap="square" lIns="0" tIns="0" rIns="0" bIns="0" rtlCol="0" anchor="ctr"/>
+          <a:lstStyle/>
+          <a:p>
+            <a:pPr algn="ctr" indent="0" marL="0">
+              <a:buNone/>
+            </a:pPr>
+            <a:r>
+              <a:rPr lang="en-US" sz="1300" b="1" dirty="0">
+                <a:solidFill>
+                  <a:srgbClr val="9D174D"/>
+                </a:solidFill>
+                <a:latin typeface="Trebuchet MS" pitchFamily="34" charset="0"/>
+                <a:ea typeface="Trebuchet MS" pitchFamily="34" charset="-122"/>
+                <a:cs typeface="Trebuchet MS" pitchFamily="34" charset="-120"/>
+              </a:rPr>
+              <a:t>ing</a:t>
+            </a:r>
+            <a:endParaRPr lang="en-US" sz="1300" dirty="0"/>
+          </a:p>
+        </p:txBody>
+      </p:sp>
+      <p:sp>
+        <p:nvSpPr>
+          <p:cNvPr id="24" name="Text 22"/>
+          <p:cNvSpPr/>
+          <p:nvPr/>
+        </p:nvSpPr>
+        <p:spPr>
+          <a:xfrm>
+            <a:off x="6519672" y="2569464"/>
+            <a:ext cx="1828800" cy="201168"/>
+          </a:xfrm>
+          <a:prstGeom prst="rect">
+            <a:avLst/>
+          </a:prstGeom>
+          <a:noFill/>
+          <a:ln/>
+        </p:spPr>
+        <p:txBody>
+          <a:bodyPr wrap="square" lIns="0" tIns="0" rIns="0" bIns="0" rtlCol="0" anchor="t"/>
+          <a:lstStyle/>
+          <a:p>
+            <a:pPr algn="ctr" indent="0" marL="0">
+              <a:buNone/>
+            </a:pPr>
+            <a:r>
+              <a:rPr lang="en-US" sz="850" dirty="0">
+                <a:solidFill>
+                  <a:srgbClr val="475569"/>
+                </a:solidFill>
+                <a:latin typeface="Calibri" pitchFamily="34" charset="0"/>
+                <a:ea typeface="Calibri" pitchFamily="34" charset="-122"/>
+                <a:cs typeface="Calibri" pitchFamily="34" charset="-120"/>
+              </a:rPr>
+              <a:t>happening now or ongoing</a:t>
+            </a:r>
+            <a:endParaRPr lang="en-US" sz="850" dirty="0"/>
+          </a:p>
+        </p:txBody>
+      </p:sp>
+      <p:sp>
+        <p:nvSpPr>
+          <p:cNvPr id="25" name="Shape 23"/>
+          <p:cNvSpPr/>
+          <p:nvPr/>
+        </p:nvSpPr>
+        <p:spPr>
+          <a:xfrm>
+            <a:off x="365760" y="3273552"/>
             <a:ext cx="1371600" cy="658368"/>
           </a:xfrm>
           <a:prstGeom prst="rect">
@@ -15119,13 +15560,13 @@
       </p:sp>
       <p:sp>
         <p:nvSpPr>
-          <p:cNvPr id="23" name="Text 21"/>
-          <p:cNvSpPr/>
-          <p:nvPr/>
-        </p:nvSpPr>
-        <p:spPr>
-          <a:xfrm>
-            <a:off x="365760" y="3182112"/>
+          <p:cNvPr id="26" name="Text 24"/>
+          <p:cNvSpPr/>
+          <p:nvPr/>
+        </p:nvSpPr>
+        <p:spPr>
+          <a:xfrm>
+            <a:off x="365760" y="3273552"/>
             <a:ext cx="1371600" cy="658368"/>
           </a:xfrm>
           <a:prstGeom prst="rect">
@@ -15158,13 +15599,13 @@
       </p:sp>
       <p:sp>
         <p:nvSpPr>
-          <p:cNvPr id="24" name="Shape 22"/>
-          <p:cNvSpPr/>
-          <p:nvPr/>
-        </p:nvSpPr>
-        <p:spPr>
-          <a:xfrm>
-            <a:off x="1874520" y="3182112"/>
+          <p:cNvPr id="27" name="Shape 25"/>
+          <p:cNvSpPr/>
+          <p:nvPr/>
+        </p:nvSpPr>
+        <p:spPr>
+          <a:xfrm>
+            <a:off x="1874520" y="3273552"/>
             <a:ext cx="6903720" cy="658368"/>
           </a:xfrm>
           <a:prstGeom prst="rect">
@@ -15185,13 +15626,13 @@
       </p:sp>
       <p:sp>
         <p:nvSpPr>
-          <p:cNvPr id="25" name="Shape 23"/>
-          <p:cNvSpPr/>
-          <p:nvPr/>
-        </p:nvSpPr>
-        <p:spPr>
-          <a:xfrm>
-            <a:off x="2999232" y="3273552"/>
+          <p:cNvPr id="28" name="Shape 26"/>
+          <p:cNvSpPr/>
+          <p:nvPr/>
+        </p:nvSpPr>
+        <p:spPr>
+          <a:xfrm>
+            <a:off x="2313432" y="3364992"/>
             <a:ext cx="1645920" cy="475488"/>
           </a:xfrm>
           <a:prstGeom prst="rect">
@@ -15212,13 +15653,13 @@
       </p:sp>
       <p:sp>
         <p:nvSpPr>
-          <p:cNvPr id="26" name="Text 24"/>
-          <p:cNvSpPr/>
-          <p:nvPr/>
-        </p:nvSpPr>
-        <p:spPr>
-          <a:xfrm>
-            <a:off x="2999232" y="3273552"/>
+          <p:cNvPr id="29" name="Text 27"/>
+          <p:cNvSpPr/>
+          <p:nvPr/>
+        </p:nvSpPr>
+        <p:spPr>
+          <a:xfrm>
+            <a:off x="2313432" y="3364992"/>
             <a:ext cx="1645920" cy="475488"/>
           </a:xfrm>
           <a:prstGeom prst="rect">
@@ -15251,14 +15692,14 @@
       </p:sp>
       <p:sp>
         <p:nvSpPr>
-          <p:cNvPr id="27" name="Text 25"/>
-          <p:cNvSpPr/>
-          <p:nvPr/>
-        </p:nvSpPr>
-        <p:spPr>
-          <a:xfrm>
-            <a:off x="4645152" y="3273552"/>
-            <a:ext cx="1097280" cy="475488"/>
+          <p:cNvPr id="30" name="Text 28"/>
+          <p:cNvSpPr/>
+          <p:nvPr/>
+        </p:nvSpPr>
+        <p:spPr>
+          <a:xfrm>
+            <a:off x="3959352" y="3364992"/>
+            <a:ext cx="411480" cy="475488"/>
           </a:xfrm>
           <a:prstGeom prst="rect">
             <a:avLst/>
@@ -15290,13 +15731,13 @@
       </p:sp>
       <p:sp>
         <p:nvSpPr>
-          <p:cNvPr id="28" name="Shape 26"/>
-          <p:cNvSpPr/>
-          <p:nvPr/>
-        </p:nvSpPr>
-        <p:spPr>
-          <a:xfrm>
-            <a:off x="5742432" y="3273552"/>
+          <p:cNvPr id="31" name="Shape 29"/>
+          <p:cNvSpPr/>
+          <p:nvPr/>
+        </p:nvSpPr>
+        <p:spPr>
+          <a:xfrm>
+            <a:off x="4370832" y="3364992"/>
             <a:ext cx="1645920" cy="475488"/>
           </a:xfrm>
           <a:prstGeom prst="rect">
@@ -15317,13 +15758,13 @@
       </p:sp>
       <p:sp>
         <p:nvSpPr>
-          <p:cNvPr id="29" name="Text 27"/>
-          <p:cNvSpPr/>
-          <p:nvPr/>
-        </p:nvSpPr>
-        <p:spPr>
-          <a:xfrm>
-            <a:off x="5742432" y="3273552"/>
+          <p:cNvPr id="32" name="Text 30"/>
+          <p:cNvSpPr/>
+          <p:nvPr/>
+        </p:nvSpPr>
+        <p:spPr>
+          <a:xfrm>
+            <a:off x="4370832" y="3364992"/>
             <a:ext cx="1645920" cy="475488"/>
           </a:xfrm>
           <a:prstGeom prst="rect">
@@ -15348,7 +15789,7 @@
                 <a:ea typeface="Trebuchet MS" pitchFamily="34" charset="-122"/>
                 <a:cs typeface="Trebuchet MS" pitchFamily="34" charset="-120"/>
               </a:rPr>
-              <a:t>charge</a:t>
+              <a:t>start</a:t>
             </a:r>
             <a:endParaRPr lang="en-US" sz="1400" dirty="0"/>
           </a:p>
@@ -15356,13 +15797,118 @@
       </p:sp>
       <p:sp>
         <p:nvSpPr>
-          <p:cNvPr id="30" name="Shape 28"/>
-          <p:cNvSpPr/>
-          <p:nvPr/>
-        </p:nvSpPr>
-        <p:spPr>
-          <a:xfrm>
-            <a:off x="365760" y="4005072"/>
+          <p:cNvPr id="33" name="Text 31"/>
+          <p:cNvSpPr/>
+          <p:nvPr/>
+        </p:nvSpPr>
+        <p:spPr>
+          <a:xfrm>
+            <a:off x="6016752" y="3364992"/>
+            <a:ext cx="411480" cy="475488"/>
+          </a:xfrm>
+          <a:prstGeom prst="rect">
+            <a:avLst/>
+          </a:prstGeom>
+          <a:noFill/>
+          <a:ln/>
+        </p:spPr>
+        <p:txBody>
+          <a:bodyPr wrap="square" lIns="0" tIns="0" rIns="0" bIns="0" rtlCol="0" anchor="ctr"/>
+          <a:lstStyle/>
+          <a:p>
+            <a:pPr algn="ctr" indent="0" marL="0">
+              <a:buNone/>
+            </a:pPr>
+            <a:r>
+              <a:rPr lang="en-US" sz="1600" b="1" dirty="0">
+                <a:solidFill>
+                  <a:srgbClr val="0D9488"/>
+                </a:solidFill>
+                <a:latin typeface="Trebuchet MS" pitchFamily="34" charset="0"/>
+                <a:ea typeface="Trebuchet MS" pitchFamily="34" charset="-122"/>
+                <a:cs typeface="Trebuchet MS" pitchFamily="34" charset="-120"/>
+              </a:rPr>
+              <a:t>·</a:t>
+            </a:r>
+            <a:endParaRPr lang="en-US" sz="1600" dirty="0"/>
+          </a:p>
+        </p:txBody>
+      </p:sp>
+      <p:sp>
+        <p:nvSpPr>
+          <p:cNvPr id="34" name="Shape 32"/>
+          <p:cNvSpPr/>
+          <p:nvPr/>
+        </p:nvSpPr>
+        <p:spPr>
+          <a:xfrm>
+            <a:off x="6428232" y="3364992"/>
+            <a:ext cx="1645920" cy="475488"/>
+          </a:xfrm>
+          <a:prstGeom prst="rect">
+            <a:avLst>
+              <a:gd name="adj" fmla="val 9615"/>
+            </a:avLst>
+          </a:prstGeom>
+          <a:solidFill>
+            <a:srgbClr val="FFFFFF"/>
+          </a:solidFill>
+          <a:ln w="12700">
+            <a:solidFill>
+              <a:srgbClr val="0D9488"/>
+            </a:solidFill>
+            <a:prstDash val="solid"/>
+          </a:ln>
+        </p:spPr>
+      </p:sp>
+      <p:sp>
+        <p:nvSpPr>
+          <p:cNvPr id="35" name="Text 33"/>
+          <p:cNvSpPr/>
+          <p:nvPr/>
+        </p:nvSpPr>
+        <p:spPr>
+          <a:xfrm>
+            <a:off x="6428232" y="3364992"/>
+            <a:ext cx="1645920" cy="475488"/>
+          </a:xfrm>
+          <a:prstGeom prst="rect">
+            <a:avLst/>
+          </a:prstGeom>
+          <a:noFill/>
+          <a:ln/>
+        </p:spPr>
+        <p:txBody>
+          <a:bodyPr wrap="square" lIns="0" tIns="0" rIns="0" bIns="0" rtlCol="0" anchor="ctr"/>
+          <a:lstStyle/>
+          <a:p>
+            <a:pPr algn="ctr" indent="0" marL="0">
+              <a:buNone/>
+            </a:pPr>
+            <a:r>
+              <a:rPr lang="en-US" sz="1400" b="1" dirty="0">
+                <a:solidFill>
+                  <a:srgbClr val="0D9488"/>
+                </a:solidFill>
+                <a:latin typeface="Trebuchet MS" pitchFamily="34" charset="0"/>
+                <a:ea typeface="Trebuchet MS" pitchFamily="34" charset="-122"/>
+                <a:cs typeface="Trebuchet MS" pitchFamily="34" charset="-120"/>
+              </a:rPr>
+              <a:t>ing</a:t>
+            </a:r>
+            <a:endParaRPr lang="en-US" sz="1400" dirty="0"/>
+          </a:p>
+        </p:txBody>
+      </p:sp>
+      <p:sp>
+        <p:nvSpPr>
+          <p:cNvPr id="36" name="Shape 34"/>
+          <p:cNvSpPr/>
+          <p:nvPr/>
+        </p:nvSpPr>
+        <p:spPr>
+          <a:xfrm>
+            <a:off x="365760" y="4096512"/>
             <a:ext cx="1371600" cy="658368"/>
           </a:xfrm>
           <a:prstGeom prst="rect">
@@ -15383,13 +15929,13 @@
       </p:sp>
       <p:sp>
         <p:nvSpPr>
-          <p:cNvPr id="31" name="Text 29"/>
-          <p:cNvSpPr/>
-          <p:nvPr/>
-        </p:nvSpPr>
-        <p:spPr>
-          <a:xfrm>
-            <a:off x="365760" y="4005072"/>
+          <p:cNvPr id="37" name="Text 35"/>
+          <p:cNvSpPr/>
+          <p:nvPr/>
+        </p:nvSpPr>
+        <p:spPr>
+          <a:xfrm>
+            <a:off x="365760" y="4096512"/>
             <a:ext cx="1371600" cy="658368"/>
           </a:xfrm>
           <a:prstGeom prst="rect">
@@ -15422,13 +15968,13 @@
       </p:sp>
       <p:sp>
         <p:nvSpPr>
-          <p:cNvPr id="32" name="Shape 30"/>
-          <p:cNvSpPr/>
-          <p:nvPr/>
-        </p:nvSpPr>
-        <p:spPr>
-          <a:xfrm>
-            <a:off x="1874520" y="4005072"/>
+          <p:cNvPr id="38" name="Shape 36"/>
+          <p:cNvSpPr/>
+          <p:nvPr/>
+        </p:nvSpPr>
+        <p:spPr>
+          <a:xfrm>
+            <a:off x="1874520" y="4096512"/>
             <a:ext cx="6903720" cy="658368"/>
           </a:xfrm>
           <a:prstGeom prst="rect">
@@ -15449,13 +15995,13 @@
       </p:sp>
       <p:sp>
         <p:nvSpPr>
-          <p:cNvPr id="33" name="Shape 31"/>
-          <p:cNvSpPr/>
-          <p:nvPr/>
-        </p:nvSpPr>
-        <p:spPr>
-          <a:xfrm>
-            <a:off x="2254649" y="4096512"/>
+          <p:cNvPr id="39" name="Shape 37"/>
+          <p:cNvSpPr/>
+          <p:nvPr/>
+        </p:nvSpPr>
+        <p:spPr>
+          <a:xfrm>
+            <a:off x="2023872" y="4187952"/>
             <a:ext cx="685800" cy="475488"/>
           </a:xfrm>
           <a:prstGeom prst="rect">
@@ -15476,13 +16022,13 @@
       </p:sp>
       <p:sp>
         <p:nvSpPr>
-          <p:cNvPr id="34" name="Text 32"/>
-          <p:cNvSpPr/>
-          <p:nvPr/>
-        </p:nvSpPr>
-        <p:spPr>
-          <a:xfrm>
-            <a:off x="2254649" y="4096512"/>
+          <p:cNvPr id="40" name="Text 38"/>
+          <p:cNvSpPr/>
+          <p:nvPr/>
+        </p:nvSpPr>
+        <p:spPr>
+          <a:xfrm>
+            <a:off x="2023872" y="4187952"/>
             <a:ext cx="685800" cy="475488"/>
           </a:xfrm>
           <a:prstGeom prst="rect">
@@ -15515,13 +16061,13 @@
       </p:sp>
       <p:sp>
         <p:nvSpPr>
-          <p:cNvPr id="35" name="Shape 33"/>
-          <p:cNvSpPr/>
-          <p:nvPr/>
-        </p:nvSpPr>
-        <p:spPr>
-          <a:xfrm>
-            <a:off x="3293146" y="4096512"/>
+          <p:cNvPr id="41" name="Shape 39"/>
+          <p:cNvSpPr/>
+          <p:nvPr/>
+        </p:nvSpPr>
+        <p:spPr>
+          <a:xfrm>
+            <a:off x="2831592" y="4187952"/>
             <a:ext cx="685800" cy="475488"/>
           </a:xfrm>
           <a:prstGeom prst="rect">
@@ -15542,13 +16088,13 @@
       </p:sp>
       <p:sp>
         <p:nvSpPr>
-          <p:cNvPr id="36" name="Text 34"/>
-          <p:cNvSpPr/>
-          <p:nvPr/>
-        </p:nvSpPr>
-        <p:spPr>
-          <a:xfrm>
-            <a:off x="3293146" y="4096512"/>
+          <p:cNvPr id="42" name="Text 40"/>
+          <p:cNvSpPr/>
+          <p:nvPr/>
+        </p:nvSpPr>
+        <p:spPr>
+          <a:xfrm>
+            <a:off x="2831592" y="4187952"/>
             <a:ext cx="685800" cy="475488"/>
           </a:xfrm>
           <a:prstGeom prst="rect">
@@ -15581,13 +16127,13 @@
       </p:sp>
       <p:sp>
         <p:nvSpPr>
-          <p:cNvPr id="37" name="Shape 35"/>
-          <p:cNvSpPr/>
-          <p:nvPr/>
-        </p:nvSpPr>
-        <p:spPr>
-          <a:xfrm>
-            <a:off x="4331643" y="4096512"/>
+          <p:cNvPr id="43" name="Shape 41"/>
+          <p:cNvSpPr/>
+          <p:nvPr/>
+        </p:nvSpPr>
+        <p:spPr>
+          <a:xfrm>
+            <a:off x="3639312" y="4187952"/>
             <a:ext cx="685800" cy="475488"/>
           </a:xfrm>
           <a:prstGeom prst="rect">
@@ -15608,13 +16154,13 @@
       </p:sp>
       <p:sp>
         <p:nvSpPr>
-          <p:cNvPr id="38" name="Text 36"/>
-          <p:cNvSpPr/>
-          <p:nvPr/>
-        </p:nvSpPr>
-        <p:spPr>
-          <a:xfrm>
-            <a:off x="4331643" y="4096512"/>
+          <p:cNvPr id="44" name="Text 42"/>
+          <p:cNvSpPr/>
+          <p:nvPr/>
+        </p:nvSpPr>
+        <p:spPr>
+          <a:xfrm>
+            <a:off x="3639312" y="4187952"/>
             <a:ext cx="685800" cy="475488"/>
           </a:xfrm>
           <a:prstGeom prst="rect">
@@ -15639,7 +16185,7 @@
                 <a:ea typeface="Trebuchet MS" pitchFamily="34" charset="-122"/>
                 <a:cs typeface="Trebuchet MS" pitchFamily="34" charset="-120"/>
               </a:rPr>
-              <a:t>ch</a:t>
+              <a:t>s</a:t>
             </a:r>
             <a:endParaRPr lang="en-US" sz="900" dirty="0"/>
           </a:p>
@@ -15647,13 +16193,13 @@
       </p:sp>
       <p:sp>
         <p:nvSpPr>
-          <p:cNvPr id="39" name="Shape 37"/>
-          <p:cNvSpPr/>
-          <p:nvPr/>
-        </p:nvSpPr>
-        <p:spPr>
-          <a:xfrm>
-            <a:off x="5370141" y="4096512"/>
+          <p:cNvPr id="45" name="Shape 43"/>
+          <p:cNvSpPr/>
+          <p:nvPr/>
+        </p:nvSpPr>
+        <p:spPr>
+          <a:xfrm>
+            <a:off x="4447032" y="4187952"/>
             <a:ext cx="685800" cy="475488"/>
           </a:xfrm>
           <a:prstGeom prst="rect">
@@ -15674,13 +16220,13 @@
       </p:sp>
       <p:sp>
         <p:nvSpPr>
-          <p:cNvPr id="40" name="Text 38"/>
-          <p:cNvSpPr/>
-          <p:nvPr/>
-        </p:nvSpPr>
-        <p:spPr>
-          <a:xfrm>
-            <a:off x="5370141" y="4096512"/>
+          <p:cNvPr id="46" name="Text 44"/>
+          <p:cNvSpPr/>
+          <p:nvPr/>
+        </p:nvSpPr>
+        <p:spPr>
+          <a:xfrm>
+            <a:off x="4447032" y="4187952"/>
             <a:ext cx="685800" cy="475488"/>
           </a:xfrm>
           <a:prstGeom prst="rect">
@@ -15705,7 +16251,7 @@
                 <a:ea typeface="Trebuchet MS" pitchFamily="34" charset="-122"/>
                 <a:cs typeface="Trebuchet MS" pitchFamily="34" charset="-120"/>
               </a:rPr>
-              <a:t>a</a:t>
+              <a:t>t</a:t>
             </a:r>
             <a:endParaRPr lang="en-US" sz="900" dirty="0"/>
           </a:p>
@@ -15713,13 +16259,13 @@
       </p:sp>
       <p:sp>
         <p:nvSpPr>
-          <p:cNvPr id="41" name="Shape 39"/>
-          <p:cNvSpPr/>
-          <p:nvPr/>
-        </p:nvSpPr>
-        <p:spPr>
-          <a:xfrm>
-            <a:off x="6408638" y="4096512"/>
+          <p:cNvPr id="47" name="Shape 45"/>
+          <p:cNvSpPr/>
+          <p:nvPr/>
+        </p:nvSpPr>
+        <p:spPr>
+          <a:xfrm>
+            <a:off x="5254752" y="4187952"/>
             <a:ext cx="685800" cy="475488"/>
           </a:xfrm>
           <a:prstGeom prst="rect">
@@ -15740,13 +16286,13 @@
       </p:sp>
       <p:sp>
         <p:nvSpPr>
-          <p:cNvPr id="42" name="Text 40"/>
-          <p:cNvSpPr/>
-          <p:nvPr/>
-        </p:nvSpPr>
-        <p:spPr>
-          <a:xfrm>
-            <a:off x="6408638" y="4096512"/>
+          <p:cNvPr id="48" name="Text 46"/>
+          <p:cNvSpPr/>
+          <p:nvPr/>
+        </p:nvSpPr>
+        <p:spPr>
+          <a:xfrm>
+            <a:off x="5254752" y="4187952"/>
             <a:ext cx="685800" cy="475488"/>
           </a:xfrm>
           <a:prstGeom prst="rect">
@@ -15771,7 +16317,7 @@
                 <a:ea typeface="Trebuchet MS" pitchFamily="34" charset="-122"/>
                 <a:cs typeface="Trebuchet MS" pitchFamily="34" charset="-120"/>
               </a:rPr>
-              <a:t>r</a:t>
+              <a:t>ar</a:t>
             </a:r>
             <a:endParaRPr lang="en-US" sz="900" dirty="0"/>
           </a:p>
@@ -15779,13 +16325,13 @@
       </p:sp>
       <p:sp>
         <p:nvSpPr>
-          <p:cNvPr id="43" name="Shape 41"/>
-          <p:cNvSpPr/>
-          <p:nvPr/>
-        </p:nvSpPr>
-        <p:spPr>
-          <a:xfrm>
-            <a:off x="7447135" y="4096512"/>
+          <p:cNvPr id="49" name="Shape 47"/>
+          <p:cNvSpPr/>
+          <p:nvPr/>
+        </p:nvSpPr>
+        <p:spPr>
+          <a:xfrm>
+            <a:off x="6062472" y="4187952"/>
             <a:ext cx="685800" cy="475488"/>
           </a:xfrm>
           <a:prstGeom prst="rect">
@@ -15806,13 +16352,13 @@
       </p:sp>
       <p:sp>
         <p:nvSpPr>
-          <p:cNvPr id="44" name="Text 42"/>
-          <p:cNvSpPr/>
-          <p:nvPr/>
-        </p:nvSpPr>
-        <p:spPr>
-          <a:xfrm>
-            <a:off x="7447135" y="4096512"/>
+          <p:cNvPr id="50" name="Text 48"/>
+          <p:cNvSpPr/>
+          <p:nvPr/>
+        </p:nvSpPr>
+        <p:spPr>
+          <a:xfrm>
+            <a:off x="6062472" y="4187952"/>
             <a:ext cx="685800" cy="475488"/>
           </a:xfrm>
           <a:prstGeom prst="rect">
@@ -15837,7 +16383,139 @@
                 <a:ea typeface="Trebuchet MS" pitchFamily="34" charset="-122"/>
                 <a:cs typeface="Trebuchet MS" pitchFamily="34" charset="-120"/>
               </a:rPr>
-              <a:t>j</a:t>
+              <a:t>t</a:t>
+            </a:r>
+            <a:endParaRPr lang="en-US" sz="900" dirty="0"/>
+          </a:p>
+        </p:txBody>
+      </p:sp>
+      <p:sp>
+        <p:nvSpPr>
+          <p:cNvPr id="51" name="Shape 49"/>
+          <p:cNvSpPr/>
+          <p:nvPr/>
+        </p:nvSpPr>
+        <p:spPr>
+          <a:xfrm>
+            <a:off x="6870192" y="4187952"/>
+            <a:ext cx="685800" cy="475488"/>
+          </a:xfrm>
+          <a:prstGeom prst="rect">
+            <a:avLst>
+              <a:gd name="adj" fmla="val 7692"/>
+            </a:avLst>
+          </a:prstGeom>
+          <a:solidFill>
+            <a:srgbClr val="FFFFFF"/>
+          </a:solidFill>
+          <a:ln w="12700">
+            <a:solidFill>
+              <a:srgbClr val="DB2777"/>
+            </a:solidFill>
+            <a:prstDash val="solid"/>
+          </a:ln>
+        </p:spPr>
+      </p:sp>
+      <p:sp>
+        <p:nvSpPr>
+          <p:cNvPr id="52" name="Text 50"/>
+          <p:cNvSpPr/>
+          <p:nvPr/>
+        </p:nvSpPr>
+        <p:spPr>
+          <a:xfrm>
+            <a:off x="6870192" y="4187952"/>
+            <a:ext cx="685800" cy="475488"/>
+          </a:xfrm>
+          <a:prstGeom prst="rect">
+            <a:avLst/>
+          </a:prstGeom>
+          <a:noFill/>
+          <a:ln/>
+        </p:spPr>
+        <p:txBody>
+          <a:bodyPr wrap="square" lIns="0" tIns="0" rIns="0" bIns="0" rtlCol="0" anchor="ctr"/>
+          <a:lstStyle/>
+          <a:p>
+            <a:pPr algn="ctr" indent="0" marL="0">
+              <a:buNone/>
+            </a:pPr>
+            <a:r>
+              <a:rPr lang="en-US" sz="900" b="1" dirty="0">
+                <a:solidFill>
+                  <a:srgbClr val="9D174D"/>
+                </a:solidFill>
+                <a:latin typeface="Trebuchet MS" pitchFamily="34" charset="0"/>
+                <a:ea typeface="Trebuchet MS" pitchFamily="34" charset="-122"/>
+                <a:cs typeface="Trebuchet MS" pitchFamily="34" charset="-120"/>
+              </a:rPr>
+              <a:t>i</a:t>
+            </a:r>
+            <a:endParaRPr lang="en-US" sz="900" dirty="0"/>
+          </a:p>
+        </p:txBody>
+      </p:sp>
+      <p:sp>
+        <p:nvSpPr>
+          <p:cNvPr id="53" name="Shape 51"/>
+          <p:cNvSpPr/>
+          <p:nvPr/>
+        </p:nvSpPr>
+        <p:spPr>
+          <a:xfrm>
+            <a:off x="7677912" y="4187952"/>
+            <a:ext cx="685800" cy="475488"/>
+          </a:xfrm>
+          <a:prstGeom prst="rect">
+            <a:avLst>
+              <a:gd name="adj" fmla="val 7692"/>
+            </a:avLst>
+          </a:prstGeom>
+          <a:solidFill>
+            <a:srgbClr val="FFFFFF"/>
+          </a:solidFill>
+          <a:ln w="12700">
+            <a:solidFill>
+              <a:srgbClr val="DB2777"/>
+            </a:solidFill>
+            <a:prstDash val="solid"/>
+          </a:ln>
+        </p:spPr>
+      </p:sp>
+      <p:sp>
+        <p:nvSpPr>
+          <p:cNvPr id="54" name="Text 52"/>
+          <p:cNvSpPr/>
+          <p:nvPr/>
+        </p:nvSpPr>
+        <p:spPr>
+          <a:xfrm>
+            <a:off x="7677912" y="4187952"/>
+            <a:ext cx="685800" cy="475488"/>
+          </a:xfrm>
+          <a:prstGeom prst="rect">
+            <a:avLst/>
+          </a:prstGeom>
+          <a:noFill/>
+          <a:ln/>
+        </p:spPr>
+        <p:txBody>
+          <a:bodyPr wrap="square" lIns="0" tIns="0" rIns="0" bIns="0" rtlCol="0" anchor="ctr"/>
+          <a:lstStyle/>
+          <a:p>
+            <a:pPr algn="ctr" indent="0" marL="0">
+              <a:buNone/>
+            </a:pPr>
+            <a:r>
+              <a:rPr lang="en-US" sz="900" b="1" dirty="0">
+                <a:solidFill>
+                  <a:srgbClr val="9D174D"/>
+                </a:solidFill>
+                <a:latin typeface="Trebuchet MS" pitchFamily="34" charset="0"/>
+                <a:ea typeface="Trebuchet MS" pitchFamily="34" charset="-122"/>
+                <a:cs typeface="Trebuchet MS" pitchFamily="34" charset="-120"/>
+              </a:rPr>
+              <a:t>ng</a:t>
             </a:r>
             <a:endParaRPr lang="en-US" sz="900" dirty="0"/>
           </a:p>
@@ -17163,7 +17841,7 @@
                 <a:ea typeface="Calibri" pitchFamily="34" charset="-122"/>
                 <a:cs typeface="Calibri" pitchFamily="34" charset="-120"/>
               </a:rPr>
-              <a:t>The students decided to </a:t>
+              <a:t>After </a:t>
             </a:r>
             <a:pPr algn="l" indent="0" marL="0">
               <a:buNone/>
@@ -17180,7 +17858,7 @@
                 <a:ea typeface="Calibri" pitchFamily="34" charset="-122"/>
                 <a:cs typeface="Calibri" pitchFamily="34" charset="-120"/>
               </a:rPr>
-              <a:t>reorganise</a:t>
+              <a:t>reviewing</a:t>
             </a:r>
             <a:pPr algn="l" indent="0" marL="0">
               <a:buNone/>
@@ -17194,7 +17872,7 @@
                 <a:ea typeface="Calibri" pitchFamily="34" charset="-122"/>
                 <a:cs typeface="Calibri" pitchFamily="34" charset="-120"/>
               </a:rPr>
-              <a:t> their project, </a:t>
+              <a:t> her plan, Sofia decided to </a:t>
             </a:r>
             <a:pPr algn="l" indent="0" marL="0">
               <a:buNone/>
@@ -17211,7 +17889,7 @@
                 <a:ea typeface="Calibri" pitchFamily="34" charset="-122"/>
                 <a:cs typeface="Calibri" pitchFamily="34" charset="-120"/>
               </a:rPr>
-              <a:t>rewrite</a:t>
+              <a:t>redesign</a:t>
             </a:r>
             <a:pPr algn="l" indent="0" marL="0">
               <a:buNone/>
@@ -17225,7 +17903,7 @@
                 <a:ea typeface="Calibri" pitchFamily="34" charset="-122"/>
                 <a:cs typeface="Calibri" pitchFamily="34" charset="-120"/>
               </a:rPr>
-              <a:t> their introduction, and </a:t>
+              <a:t> the poster and </a:t>
             </a:r>
             <a:pPr algn="l" indent="0" marL="0">
               <a:buNone/>
@@ -17242,7 +17920,7 @@
                 <a:ea typeface="Calibri" pitchFamily="34" charset="-122"/>
                 <a:cs typeface="Calibri" pitchFamily="34" charset="-120"/>
               </a:rPr>
-              <a:t>rebuild</a:t>
+              <a:t>reprint</a:t>
             </a:r>
             <a:pPr algn="l" indent="0" marL="0">
               <a:buNone/>
@@ -17256,7 +17934,7 @@
                 <a:ea typeface="Calibri" pitchFamily="34" charset="-122"/>
                 <a:cs typeface="Calibri" pitchFamily="34" charset="-120"/>
               </a:rPr>
-              <a:t> their model.</a:t>
+              <a:t> it in colour.</a:t>
             </a:r>
             <a:endParaRPr lang="en-US" sz="1800" dirty="0"/>
           </a:p>
@@ -17411,7 +18089,7 @@
                 <a:ea typeface="Trebuchet MS" pitchFamily="34" charset="-122"/>
                 <a:cs typeface="Trebuchet MS" pitchFamily="34" charset="-120"/>
               </a:rPr>
-              <a:t>reorganise</a:t>
+              <a:t>reviewing</a:t>
             </a:r>
             <a:endParaRPr lang="en-US" sz="1400" dirty="0"/>
           </a:p>
@@ -17539,7 +18217,7 @@
                 <a:ea typeface="Trebuchet MS" pitchFamily="34" charset="-122"/>
                 <a:cs typeface="Trebuchet MS" pitchFamily="34" charset="-120"/>
               </a:rPr>
-              <a:t>rewrite</a:t>
+              <a:t>redesign</a:t>
             </a:r>
             <a:endParaRPr lang="en-US" sz="1400" dirty="0"/>
           </a:p>
@@ -17667,7 +18345,7 @@
                 <a:ea typeface="Trebuchet MS" pitchFamily="34" charset="-122"/>
                 <a:cs typeface="Trebuchet MS" pitchFamily="34" charset="-120"/>
               </a:rPr>
-              <a:t>rebuild</a:t>
+              <a:t>reprint</a:t>
             </a:r>
             <a:endParaRPr lang="en-US" sz="1400" dirty="0"/>
           </a:p>
@@ -18137,7 +18815,7 @@
                 <a:ea typeface="Trebuchet MS" pitchFamily="34" charset="-122"/>
                 <a:cs typeface="Trebuchet MS" pitchFamily="34" charset="-120"/>
               </a:rPr>
-              <a:t>reorganise</a:t>
+              <a:t>reviewing</a:t>
             </a:r>
             <a:endParaRPr lang="en-US" sz="2800" dirty="0"/>
           </a:p>
@@ -18152,6 +18830,138 @@
         <p:spPr>
           <a:xfrm>
             <a:off x="365760" y="2240280"/>
+            <a:ext cx="1371600" cy="841248"/>
+          </a:xfrm>
+          <a:prstGeom prst="rect">
+            <a:avLst>
+              <a:gd name="adj" fmla="val 6522"/>
+            </a:avLst>
+          </a:prstGeom>
+          <a:solidFill>
+            <a:srgbClr val="E2E8F0"/>
+          </a:solidFill>
+          <a:ln w="12700">
+            <a:solidFill>
+              <a:srgbClr val="E2E8F0"/>
+            </a:solidFill>
+            <a:prstDash val="solid"/>
+          </a:ln>
+        </p:spPr>
+      </p:sp>
+      <p:sp>
+        <p:nvSpPr>
+          <p:cNvPr id="15" name="Text 13"/>
+          <p:cNvSpPr/>
+          <p:nvPr/>
+        </p:nvSpPr>
+        <p:spPr>
+          <a:xfrm>
+            <a:off x="365760" y="2240280"/>
+            <a:ext cx="1371600" cy="841248"/>
+          </a:xfrm>
+          <a:prstGeom prst="rect">
+            <a:avLst/>
+          </a:prstGeom>
+          <a:noFill/>
+          <a:ln/>
+        </p:spPr>
+        <p:txBody>
+          <a:bodyPr wrap="square" lIns="0" tIns="0" rIns="0" bIns="0" rtlCol="0" anchor="ctr"/>
+          <a:lstStyle/>
+          <a:p>
+            <a:pPr algn="ctr" indent="0" marL="0">
+              <a:buNone/>
+            </a:pPr>
+            <a:r>
+              <a:rPr lang="en-US" sz="1100" b="1" dirty="0">
+                <a:solidFill>
+                  <a:srgbClr val="475569"/>
+                </a:solidFill>
+                <a:latin typeface="Trebuchet MS" pitchFamily="34" charset="0"/>
+                <a:ea typeface="Trebuchet MS" pitchFamily="34" charset="-122"/>
+                <a:cs typeface="Trebuchet MS" pitchFamily="34" charset="-120"/>
+              </a:rPr>
+              <a:t>Morphemes</a:t>
+            </a:r>
+            <a:endParaRPr lang="en-US" sz="1100" dirty="0"/>
+          </a:p>
+        </p:txBody>
+      </p:sp>
+      <p:sp>
+        <p:nvSpPr>
+          <p:cNvPr id="16" name="Shape 14"/>
+          <p:cNvSpPr/>
+          <p:nvPr/>
+        </p:nvSpPr>
+        <p:spPr>
+          <a:xfrm>
+            <a:off x="1874520" y="2240280"/>
+            <a:ext cx="6903720" cy="841248"/>
+          </a:xfrm>
+          <a:prstGeom prst="rect">
+            <a:avLst>
+              <a:gd name="adj" fmla="val 6522"/>
+            </a:avLst>
+          </a:prstGeom>
+          <a:solidFill>
+            <a:srgbClr val="F8FAFC"/>
+          </a:solidFill>
+          <a:ln w="12700">
+            <a:solidFill>
+              <a:srgbClr val="E2E8F0"/>
+            </a:solidFill>
+            <a:prstDash val="dash"/>
+          </a:ln>
+        </p:spPr>
+      </p:sp>
+      <p:sp>
+        <p:nvSpPr>
+          <p:cNvPr id="17" name="Text 15"/>
+          <p:cNvSpPr/>
+          <p:nvPr/>
+        </p:nvSpPr>
+        <p:spPr>
+          <a:xfrm>
+            <a:off x="1874520" y="2240280"/>
+            <a:ext cx="6903720" cy="841248"/>
+          </a:xfrm>
+          <a:prstGeom prst="rect">
+            <a:avLst/>
+          </a:prstGeom>
+          <a:noFill/>
+          <a:ln/>
+        </p:spPr>
+        <p:txBody>
+          <a:bodyPr wrap="square" rtlCol="0" anchor="ctr"/>
+          <a:lstStyle/>
+          <a:p>
+            <a:pPr algn="ctr" indent="0" marL="0">
+              <a:buNone/>
+            </a:pPr>
+            <a:r>
+              <a:rPr lang="en-US" sz="1100" i="1" dirty="0">
+                <a:solidFill>
+                  <a:srgbClr val="CBD5E1"/>
+                </a:solidFill>
+                <a:latin typeface="Calibri" pitchFamily="34" charset="0"/>
+                <a:ea typeface="Calibri" pitchFamily="34" charset="-122"/>
+                <a:cs typeface="Calibri" pitchFamily="34" charset="-120"/>
+              </a:rPr>
+              <a:t>Write here...</a:t>
+            </a:r>
+            <a:endParaRPr lang="en-US" sz="1100" dirty="0"/>
+          </a:p>
+        </p:txBody>
+      </p:sp>
+      <p:sp>
+        <p:nvSpPr>
+          <p:cNvPr id="18" name="Shape 16"/>
+          <p:cNvSpPr/>
+          <p:nvPr/>
+        </p:nvSpPr>
+        <p:spPr>
+          <a:xfrm>
+            <a:off x="365760" y="3273552"/>
             <a:ext cx="1371600" cy="658368"/>
           </a:xfrm>
           <a:prstGeom prst="rect">
@@ -18172,13 +18982,13 @@
       </p:sp>
       <p:sp>
         <p:nvSpPr>
-          <p:cNvPr id="15" name="Text 13"/>
-          <p:cNvSpPr/>
-          <p:nvPr/>
-        </p:nvSpPr>
-        <p:spPr>
-          <a:xfrm>
-            <a:off x="365760" y="2240280"/>
+          <p:cNvPr id="19" name="Text 17"/>
+          <p:cNvSpPr/>
+          <p:nvPr/>
+        </p:nvSpPr>
+        <p:spPr>
+          <a:xfrm>
+            <a:off x="365760" y="3273552"/>
             <a:ext cx="1371600" cy="658368"/>
           </a:xfrm>
           <a:prstGeom prst="rect">
@@ -18203,7 +19013,7 @@
                 <a:ea typeface="Trebuchet MS" pitchFamily="34" charset="-122"/>
                 <a:cs typeface="Trebuchet MS" pitchFamily="34" charset="-120"/>
               </a:rPr>
-              <a:t>Morphemes</a:t>
+              <a:t>Syllables</a:t>
             </a:r>
             <a:endParaRPr lang="en-US" sz="1100" dirty="0"/>
           </a:p>
@@ -18211,13 +19021,13 @@
       </p:sp>
       <p:sp>
         <p:nvSpPr>
-          <p:cNvPr id="16" name="Shape 14"/>
-          <p:cNvSpPr/>
-          <p:nvPr/>
-        </p:nvSpPr>
-        <p:spPr>
-          <a:xfrm>
-            <a:off x="1874520" y="2240280"/>
+          <p:cNvPr id="20" name="Shape 18"/>
+          <p:cNvSpPr/>
+          <p:nvPr/>
+        </p:nvSpPr>
+        <p:spPr>
+          <a:xfrm>
+            <a:off x="1874520" y="3273552"/>
             <a:ext cx="6903720" cy="658368"/>
           </a:xfrm>
           <a:prstGeom prst="rect">
@@ -18238,13 +19048,13 @@
       </p:sp>
       <p:sp>
         <p:nvSpPr>
-          <p:cNvPr id="17" name="Text 15"/>
-          <p:cNvSpPr/>
-          <p:nvPr/>
-        </p:nvSpPr>
-        <p:spPr>
-          <a:xfrm>
-            <a:off x="1874520" y="2240280"/>
+          <p:cNvPr id="21" name="Text 19"/>
+          <p:cNvSpPr/>
+          <p:nvPr/>
+        </p:nvSpPr>
+        <p:spPr>
+          <a:xfrm>
+            <a:off x="1874520" y="3273552"/>
             <a:ext cx="6903720" cy="658368"/>
           </a:xfrm>
           <a:prstGeom prst="rect">
@@ -18277,13 +19087,13 @@
       </p:sp>
       <p:sp>
         <p:nvSpPr>
-          <p:cNvPr id="18" name="Shape 16"/>
-          <p:cNvSpPr/>
-          <p:nvPr/>
-        </p:nvSpPr>
-        <p:spPr>
-          <a:xfrm>
-            <a:off x="365760" y="3182112"/>
+          <p:cNvPr id="22" name="Shape 20"/>
+          <p:cNvSpPr/>
+          <p:nvPr/>
+        </p:nvSpPr>
+        <p:spPr>
+          <a:xfrm>
+            <a:off x="365760" y="4096512"/>
             <a:ext cx="1371600" cy="658368"/>
           </a:xfrm>
           <a:prstGeom prst="rect">
@@ -18304,13 +19114,13 @@
       </p:sp>
       <p:sp>
         <p:nvSpPr>
-          <p:cNvPr id="19" name="Text 17"/>
-          <p:cNvSpPr/>
-          <p:nvPr/>
-        </p:nvSpPr>
-        <p:spPr>
-          <a:xfrm>
-            <a:off x="365760" y="3182112"/>
+          <p:cNvPr id="23" name="Text 21"/>
+          <p:cNvSpPr/>
+          <p:nvPr/>
+        </p:nvSpPr>
+        <p:spPr>
+          <a:xfrm>
+            <a:off x="365760" y="4096512"/>
             <a:ext cx="1371600" cy="658368"/>
           </a:xfrm>
           <a:prstGeom prst="rect">
@@ -18335,7 +19145,7 @@
                 <a:ea typeface="Trebuchet MS" pitchFamily="34" charset="-122"/>
                 <a:cs typeface="Trebuchet MS" pitchFamily="34" charset="-120"/>
               </a:rPr>
-              <a:t>Syllables</a:t>
+              <a:t>Phonemes</a:t>
             </a:r>
             <a:endParaRPr lang="en-US" sz="1100" dirty="0"/>
           </a:p>
@@ -18343,13 +19153,13 @@
       </p:sp>
       <p:sp>
         <p:nvSpPr>
-          <p:cNvPr id="20" name="Shape 18"/>
-          <p:cNvSpPr/>
-          <p:nvPr/>
-        </p:nvSpPr>
-        <p:spPr>
-          <a:xfrm>
-            <a:off x="1874520" y="3182112"/>
+          <p:cNvPr id="24" name="Shape 22"/>
+          <p:cNvSpPr/>
+          <p:nvPr/>
+        </p:nvSpPr>
+        <p:spPr>
+          <a:xfrm>
+            <a:off x="1874520" y="4096512"/>
             <a:ext cx="6903720" cy="658368"/>
           </a:xfrm>
           <a:prstGeom prst="rect">
@@ -18370,145 +19180,13 @@
       </p:sp>
       <p:sp>
         <p:nvSpPr>
-          <p:cNvPr id="21" name="Text 19"/>
-          <p:cNvSpPr/>
-          <p:nvPr/>
-        </p:nvSpPr>
-        <p:spPr>
-          <a:xfrm>
-            <a:off x="1874520" y="3182112"/>
-            <a:ext cx="6903720" cy="658368"/>
-          </a:xfrm>
-          <a:prstGeom prst="rect">
-            <a:avLst/>
-          </a:prstGeom>
-          <a:noFill/>
-          <a:ln/>
-        </p:spPr>
-        <p:txBody>
-          <a:bodyPr wrap="square" rtlCol="0" anchor="ctr"/>
-          <a:lstStyle/>
-          <a:p>
-            <a:pPr algn="ctr" indent="0" marL="0">
-              <a:buNone/>
-            </a:pPr>
-            <a:r>
-              <a:rPr lang="en-US" sz="1100" i="1" dirty="0">
-                <a:solidFill>
-                  <a:srgbClr val="CBD5E1"/>
-                </a:solidFill>
-                <a:latin typeface="Calibri" pitchFamily="34" charset="0"/>
-                <a:ea typeface="Calibri" pitchFamily="34" charset="-122"/>
-                <a:cs typeface="Calibri" pitchFamily="34" charset="-120"/>
-              </a:rPr>
-              <a:t>Write here...</a:t>
-            </a:r>
-            <a:endParaRPr lang="en-US" sz="1100" dirty="0"/>
-          </a:p>
-        </p:txBody>
-      </p:sp>
-      <p:sp>
-        <p:nvSpPr>
-          <p:cNvPr id="22" name="Shape 20"/>
-          <p:cNvSpPr/>
-          <p:nvPr/>
-        </p:nvSpPr>
-        <p:spPr>
-          <a:xfrm>
-            <a:off x="365760" y="4005072"/>
-            <a:ext cx="1371600" cy="658368"/>
-          </a:xfrm>
-          <a:prstGeom prst="rect">
-            <a:avLst>
-              <a:gd name="adj" fmla="val 8333"/>
-            </a:avLst>
-          </a:prstGeom>
-          <a:solidFill>
-            <a:srgbClr val="E2E8F0"/>
-          </a:solidFill>
-          <a:ln w="12700">
-            <a:solidFill>
-              <a:srgbClr val="E2E8F0"/>
-            </a:solidFill>
-            <a:prstDash val="solid"/>
-          </a:ln>
-        </p:spPr>
-      </p:sp>
-      <p:sp>
-        <p:nvSpPr>
-          <p:cNvPr id="23" name="Text 21"/>
-          <p:cNvSpPr/>
-          <p:nvPr/>
-        </p:nvSpPr>
-        <p:spPr>
-          <a:xfrm>
-            <a:off x="365760" y="4005072"/>
-            <a:ext cx="1371600" cy="658368"/>
-          </a:xfrm>
-          <a:prstGeom prst="rect">
-            <a:avLst/>
-          </a:prstGeom>
-          <a:noFill/>
-          <a:ln/>
-        </p:spPr>
-        <p:txBody>
-          <a:bodyPr wrap="square" lIns="0" tIns="0" rIns="0" bIns="0" rtlCol="0" anchor="ctr"/>
-          <a:lstStyle/>
-          <a:p>
-            <a:pPr algn="ctr" indent="0" marL="0">
-              <a:buNone/>
-            </a:pPr>
-            <a:r>
-              <a:rPr lang="en-US" sz="1100" b="1" dirty="0">
-                <a:solidFill>
-                  <a:srgbClr val="475569"/>
-                </a:solidFill>
-                <a:latin typeface="Trebuchet MS" pitchFamily="34" charset="0"/>
-                <a:ea typeface="Trebuchet MS" pitchFamily="34" charset="-122"/>
-                <a:cs typeface="Trebuchet MS" pitchFamily="34" charset="-120"/>
-              </a:rPr>
-              <a:t>Phonemes</a:t>
-            </a:r>
-            <a:endParaRPr lang="en-US" sz="1100" dirty="0"/>
-          </a:p>
-        </p:txBody>
-      </p:sp>
-      <p:sp>
-        <p:nvSpPr>
-          <p:cNvPr id="24" name="Shape 22"/>
-          <p:cNvSpPr/>
-          <p:nvPr/>
-        </p:nvSpPr>
-        <p:spPr>
-          <a:xfrm>
-            <a:off x="1874520" y="4005072"/>
-            <a:ext cx="6903720" cy="658368"/>
-          </a:xfrm>
-          <a:prstGeom prst="rect">
-            <a:avLst>
-              <a:gd name="adj" fmla="val 8333"/>
-            </a:avLst>
-          </a:prstGeom>
-          <a:solidFill>
-            <a:srgbClr val="F8FAFC"/>
-          </a:solidFill>
-          <a:ln w="12700">
-            <a:solidFill>
-              <a:srgbClr val="E2E8F0"/>
-            </a:solidFill>
-            <a:prstDash val="dash"/>
-          </a:ln>
-        </p:spPr>
-      </p:sp>
-      <p:sp>
-        <p:nvSpPr>
           <p:cNvPr id="25" name="Text 23"/>
           <p:cNvSpPr/>
           <p:nvPr/>
         </p:nvSpPr>
         <p:spPr>
           <a:xfrm>
-            <a:off x="1874520" y="4005072"/>
+            <a:off x="1874520" y="4096512"/>
             <a:ext cx="6903720" cy="658368"/>
           </a:xfrm>
           <a:prstGeom prst="rect">
@@ -18964,7 +19642,7 @@
                 <a:ea typeface="Trebuchet MS" pitchFamily="34" charset="-122"/>
                 <a:cs typeface="Trebuchet MS" pitchFamily="34" charset="-120"/>
               </a:rPr>
-              <a:t>reorganise</a:t>
+              <a:t>reviewing</a:t>
             </a:r>
             <a:endParaRPr lang="en-US" sz="2800" dirty="0"/>
           </a:p>
@@ -18979,11 +19657,11 @@
         <p:spPr>
           <a:xfrm>
             <a:off x="365760" y="2240280"/>
-            <a:ext cx="1371600" cy="658368"/>
+            <a:ext cx="1371600" cy="841248"/>
           </a:xfrm>
           <a:prstGeom prst="rect">
             <a:avLst>
-              <a:gd name="adj" fmla="val 8333"/>
+              <a:gd name="adj" fmla="val 6522"/>
             </a:avLst>
           </a:prstGeom>
           <a:solidFill>
@@ -19006,7 +19684,7 @@
         <p:spPr>
           <a:xfrm>
             <a:off x="365760" y="2240280"/>
-            <a:ext cx="1371600" cy="658368"/>
+            <a:ext cx="1371600" cy="841248"/>
           </a:xfrm>
           <a:prstGeom prst="rect">
             <a:avLst/>
@@ -19045,11 +19723,11 @@
         <p:spPr>
           <a:xfrm>
             <a:off x="2221992" y="2258568"/>
-            <a:ext cx="1828800" cy="347472"/>
+            <a:ext cx="1828800" cy="292608"/>
           </a:xfrm>
           <a:prstGeom prst="rect">
             <a:avLst>
-              <a:gd name="adj" fmla="val 21053"/>
+              <a:gd name="adj" fmla="val 25000"/>
             </a:avLst>
           </a:prstGeom>
           <a:solidFill>
@@ -19079,7 +19757,7 @@
         <p:spPr>
           <a:xfrm>
             <a:off x="2221992" y="2258568"/>
-            <a:ext cx="1828800" cy="347472"/>
+            <a:ext cx="1828800" cy="292608"/>
           </a:xfrm>
           <a:prstGeom prst="rect">
             <a:avLst/>
@@ -19117,8 +19795,8 @@
         </p:nvSpPr>
         <p:spPr>
           <a:xfrm>
-            <a:off x="2221992" y="2624328"/>
-            <a:ext cx="1828800" cy="256032"/>
+            <a:off x="2221992" y="2569464"/>
+            <a:ext cx="1828800" cy="201168"/>
           </a:xfrm>
           <a:prstGeom prst="rect">
             <a:avLst/>
@@ -19157,11 +19835,11 @@
         <p:spPr>
           <a:xfrm>
             <a:off x="4370832" y="2258568"/>
-            <a:ext cx="1828800" cy="347472"/>
+            <a:ext cx="1828800" cy="292608"/>
           </a:xfrm>
           <a:prstGeom prst="rect">
             <a:avLst>
-              <a:gd name="adj" fmla="val 21053"/>
+              <a:gd name="adj" fmla="val 25000"/>
             </a:avLst>
           </a:prstGeom>
           <a:solidFill>
@@ -19191,7 +19869,7 @@
         <p:spPr>
           <a:xfrm>
             <a:off x="4370832" y="2258568"/>
-            <a:ext cx="1828800" cy="347472"/>
+            <a:ext cx="1828800" cy="292608"/>
           </a:xfrm>
           <a:prstGeom prst="rect">
             <a:avLst/>
@@ -19215,7 +19893,7 @@
                 <a:ea typeface="Trebuchet MS" pitchFamily="34" charset="-122"/>
                 <a:cs typeface="Trebuchet MS" pitchFamily="34" charset="-120"/>
               </a:rPr>
-              <a:t>organ</a:t>
+              <a:t>view</a:t>
             </a:r>
             <a:endParaRPr lang="en-US" sz="1300" dirty="0"/>
           </a:p>
@@ -19229,8 +19907,8 @@
         </p:nvSpPr>
         <p:spPr>
           <a:xfrm>
-            <a:off x="4370832" y="2624328"/>
-            <a:ext cx="1828800" cy="256032"/>
+            <a:off x="4370832" y="2569464"/>
+            <a:ext cx="1828800" cy="201168"/>
           </a:xfrm>
           <a:prstGeom prst="rect">
             <a:avLst/>
@@ -19254,7 +19932,7 @@
                 <a:ea typeface="Calibri" pitchFamily="34" charset="-122"/>
                 <a:cs typeface="Calibri" pitchFamily="34" charset="-120"/>
               </a:rPr>
-              <a:t>to arrange in order</a:t>
+              <a:t>to look at</a:t>
             </a:r>
             <a:endParaRPr lang="en-US" sz="850" dirty="0"/>
           </a:p>
@@ -19269,11 +19947,11 @@
         <p:spPr>
           <a:xfrm>
             <a:off x="6519672" y="2258568"/>
-            <a:ext cx="1828800" cy="347472"/>
+            <a:ext cx="1828800" cy="292608"/>
           </a:xfrm>
           <a:prstGeom prst="rect">
             <a:avLst>
-              <a:gd name="adj" fmla="val 21053"/>
+              <a:gd name="adj" fmla="val 25000"/>
             </a:avLst>
           </a:prstGeom>
           <a:solidFill>
@@ -19303,7 +19981,7 @@
         <p:spPr>
           <a:xfrm>
             <a:off x="6519672" y="2258568"/>
-            <a:ext cx="1828800" cy="347472"/>
+            <a:ext cx="1828800" cy="292608"/>
           </a:xfrm>
           <a:prstGeom prst="rect">
             <a:avLst/>
@@ -19327,7 +20005,7 @@
                 <a:ea typeface="Trebuchet MS" pitchFamily="34" charset="-122"/>
                 <a:cs typeface="Trebuchet MS" pitchFamily="34" charset="-120"/>
               </a:rPr>
-              <a:t>ise</a:t>
+              <a:t>ing</a:t>
             </a:r>
             <a:endParaRPr lang="en-US" sz="1300" dirty="0"/>
           </a:p>
@@ -19341,8 +20019,8 @@
         </p:nvSpPr>
         <p:spPr>
           <a:xfrm>
-            <a:off x="6519672" y="2624328"/>
-            <a:ext cx="1828800" cy="256032"/>
+            <a:off x="6519672" y="2569464"/>
+            <a:ext cx="1828800" cy="201168"/>
           </a:xfrm>
           <a:prstGeom prst="rect">
             <a:avLst/>
@@ -19366,7 +20044,7 @@
                 <a:ea typeface="Calibri" pitchFamily="34" charset="-122"/>
                 <a:cs typeface="Calibri" pitchFamily="34" charset="-120"/>
               </a:rPr>
-              <a:t>to make or do</a:t>
+              <a:t>happening now or ongoing</a:t>
             </a:r>
             <a:endParaRPr lang="en-US" sz="850" dirty="0"/>
           </a:p>
@@ -19380,7 +20058,7 @@
         </p:nvSpPr>
         <p:spPr>
           <a:xfrm>
-            <a:off x="365760" y="3182112"/>
+            <a:off x="365760" y="3273552"/>
             <a:ext cx="1371600" cy="658368"/>
           </a:xfrm>
           <a:prstGeom prst="rect">
@@ -19407,7 +20085,7 @@
         </p:nvSpPr>
         <p:spPr>
           <a:xfrm>
-            <a:off x="365760" y="3182112"/>
+            <a:off x="365760" y="3273552"/>
             <a:ext cx="1371600" cy="658368"/>
           </a:xfrm>
           <a:prstGeom prst="rect">
@@ -19446,7 +20124,7 @@
         </p:nvSpPr>
         <p:spPr>
           <a:xfrm>
-            <a:off x="1874520" y="3182112"/>
+            <a:off x="1874520" y="3273552"/>
             <a:ext cx="6903720" cy="658368"/>
           </a:xfrm>
           <a:prstGeom prst="rect">
@@ -19473,7 +20151,7 @@
         </p:nvSpPr>
         <p:spPr>
           <a:xfrm>
-            <a:off x="1874520" y="3182112"/>
+            <a:off x="1874520" y="3273552"/>
             <a:ext cx="6903720" cy="658368"/>
           </a:xfrm>
           <a:prstGeom prst="rect">
@@ -19512,7 +20190,7 @@
         </p:nvSpPr>
         <p:spPr>
           <a:xfrm>
-            <a:off x="365760" y="4005072"/>
+            <a:off x="365760" y="4096512"/>
             <a:ext cx="1371600" cy="658368"/>
           </a:xfrm>
           <a:prstGeom prst="rect">
@@ -19539,7 +20217,7 @@
         </p:nvSpPr>
         <p:spPr>
           <a:xfrm>
-            <a:off x="365760" y="4005072"/>
+            <a:off x="365760" y="4096512"/>
             <a:ext cx="1371600" cy="658368"/>
           </a:xfrm>
           <a:prstGeom prst="rect">
@@ -19578,7 +20256,7 @@
         </p:nvSpPr>
         <p:spPr>
           <a:xfrm>
-            <a:off x="1874520" y="4005072"/>
+            <a:off x="1874520" y="4096512"/>
             <a:ext cx="6903720" cy="658368"/>
           </a:xfrm>
           <a:prstGeom prst="rect">
@@ -19605,7 +20283,7 @@
         </p:nvSpPr>
         <p:spPr>
           <a:xfrm>
-            <a:off x="1874520" y="4005072"/>
+            <a:off x="1874520" y="4096512"/>
             <a:ext cx="6903720" cy="658368"/>
           </a:xfrm>
           <a:prstGeom prst="rect">
@@ -20061,7 +20739,7 @@
                 <a:ea typeface="Trebuchet MS" pitchFamily="34" charset="-122"/>
                 <a:cs typeface="Trebuchet MS" pitchFamily="34" charset="-120"/>
               </a:rPr>
-              <a:t>reorganise</a:t>
+              <a:t>reviewing</a:t>
             </a:r>
             <a:endParaRPr lang="en-US" sz="2800" dirty="0"/>
           </a:p>
@@ -20076,11 +20754,11 @@
         <p:spPr>
           <a:xfrm>
             <a:off x="365760" y="2240280"/>
-            <a:ext cx="1371600" cy="658368"/>
+            <a:ext cx="1371600" cy="841248"/>
           </a:xfrm>
           <a:prstGeom prst="rect">
             <a:avLst>
-              <a:gd name="adj" fmla="val 8333"/>
+              <a:gd name="adj" fmla="val 6522"/>
             </a:avLst>
           </a:prstGeom>
           <a:solidFill>
@@ -20103,7 +20781,7 @@
         <p:spPr>
           <a:xfrm>
             <a:off x="365760" y="2240280"/>
-            <a:ext cx="1371600" cy="658368"/>
+            <a:ext cx="1371600" cy="841248"/>
           </a:xfrm>
           <a:prstGeom prst="rect">
             <a:avLst/>
@@ -20142,11 +20820,11 @@
         <p:spPr>
           <a:xfrm>
             <a:off x="2221992" y="2258568"/>
-            <a:ext cx="1828800" cy="347472"/>
+            <a:ext cx="1828800" cy="292608"/>
           </a:xfrm>
           <a:prstGeom prst="rect">
             <a:avLst>
-              <a:gd name="adj" fmla="val 21053"/>
+              <a:gd name="adj" fmla="val 25000"/>
             </a:avLst>
           </a:prstGeom>
           <a:solidFill>
@@ -20176,7 +20854,7 @@
         <p:spPr>
           <a:xfrm>
             <a:off x="2221992" y="2258568"/>
-            <a:ext cx="1828800" cy="347472"/>
+            <a:ext cx="1828800" cy="292608"/>
           </a:xfrm>
           <a:prstGeom prst="rect">
             <a:avLst/>
@@ -20214,8 +20892,8 @@
         </p:nvSpPr>
         <p:spPr>
           <a:xfrm>
-            <a:off x="2221992" y="2624328"/>
-            <a:ext cx="1828800" cy="256032"/>
+            <a:off x="2221992" y="2569464"/>
+            <a:ext cx="1828800" cy="201168"/>
           </a:xfrm>
           <a:prstGeom prst="rect">
             <a:avLst/>
@@ -20254,11 +20932,11 @@
         <p:spPr>
           <a:xfrm>
             <a:off x="4370832" y="2258568"/>
-            <a:ext cx="1828800" cy="347472"/>
+            <a:ext cx="1828800" cy="292608"/>
           </a:xfrm>
           <a:prstGeom prst="rect">
             <a:avLst>
-              <a:gd name="adj" fmla="val 21053"/>
+              <a:gd name="adj" fmla="val 25000"/>
             </a:avLst>
           </a:prstGeom>
           <a:solidFill>
@@ -20288,7 +20966,7 @@
         <p:spPr>
           <a:xfrm>
             <a:off x="4370832" y="2258568"/>
-            <a:ext cx="1828800" cy="347472"/>
+            <a:ext cx="1828800" cy="292608"/>
           </a:xfrm>
           <a:prstGeom prst="rect">
             <a:avLst/>
@@ -20312,7 +20990,7 @@
                 <a:ea typeface="Trebuchet MS" pitchFamily="34" charset="-122"/>
                 <a:cs typeface="Trebuchet MS" pitchFamily="34" charset="-120"/>
               </a:rPr>
-              <a:t>organ</a:t>
+              <a:t>view</a:t>
             </a:r>
             <a:endParaRPr lang="en-US" sz="1300" dirty="0"/>
           </a:p>
@@ -20326,8 +21004,8 @@
         </p:nvSpPr>
         <p:spPr>
           <a:xfrm>
-            <a:off x="4370832" y="2624328"/>
-            <a:ext cx="1828800" cy="256032"/>
+            <a:off x="4370832" y="2569464"/>
+            <a:ext cx="1828800" cy="201168"/>
           </a:xfrm>
           <a:prstGeom prst="rect">
             <a:avLst/>
@@ -20351,7 +21029,7 @@
                 <a:ea typeface="Calibri" pitchFamily="34" charset="-122"/>
                 <a:cs typeface="Calibri" pitchFamily="34" charset="-120"/>
               </a:rPr>
-              <a:t>to arrange in order</a:t>
+              <a:t>to look at</a:t>
             </a:r>
             <a:endParaRPr lang="en-US" sz="850" dirty="0"/>
           </a:p>
@@ -20366,11 +21044,11 @@
         <p:spPr>
           <a:xfrm>
             <a:off x="6519672" y="2258568"/>
-            <a:ext cx="1828800" cy="347472"/>
+            <a:ext cx="1828800" cy="292608"/>
           </a:xfrm>
           <a:prstGeom prst="rect">
             <a:avLst>
-              <a:gd name="adj" fmla="val 21053"/>
+              <a:gd name="adj" fmla="val 25000"/>
             </a:avLst>
           </a:prstGeom>
           <a:solidFill>
@@ -20400,7 +21078,7 @@
         <p:spPr>
           <a:xfrm>
             <a:off x="6519672" y="2258568"/>
-            <a:ext cx="1828800" cy="347472"/>
+            <a:ext cx="1828800" cy="292608"/>
           </a:xfrm>
           <a:prstGeom prst="rect">
             <a:avLst/>
@@ -20424,7 +21102,7 @@
                 <a:ea typeface="Trebuchet MS" pitchFamily="34" charset="-122"/>
                 <a:cs typeface="Trebuchet MS" pitchFamily="34" charset="-120"/>
               </a:rPr>
-              <a:t>ise</a:t>
+              <a:t>ing</a:t>
             </a:r>
             <a:endParaRPr lang="en-US" sz="1300" dirty="0"/>
           </a:p>
@@ -20438,8 +21116,8 @@
         </p:nvSpPr>
         <p:spPr>
           <a:xfrm>
-            <a:off x="6519672" y="2624328"/>
-            <a:ext cx="1828800" cy="256032"/>
+            <a:off x="6519672" y="2569464"/>
+            <a:ext cx="1828800" cy="201168"/>
           </a:xfrm>
           <a:prstGeom prst="rect">
             <a:avLst/>
@@ -20463,7 +21141,7 @@
                 <a:ea typeface="Calibri" pitchFamily="34" charset="-122"/>
                 <a:cs typeface="Calibri" pitchFamily="34" charset="-120"/>
               </a:rPr>
-              <a:t>to make or do</a:t>
+              <a:t>happening now or ongoing</a:t>
             </a:r>
             <a:endParaRPr lang="en-US" sz="850" dirty="0"/>
           </a:p>
@@ -20477,7 +21155,7 @@
         </p:nvSpPr>
         <p:spPr>
           <a:xfrm>
-            <a:off x="365760" y="3182112"/>
+            <a:off x="365760" y="3273552"/>
             <a:ext cx="1371600" cy="658368"/>
           </a:xfrm>
           <a:prstGeom prst="rect">
@@ -20504,7 +21182,7 @@
         </p:nvSpPr>
         <p:spPr>
           <a:xfrm>
-            <a:off x="365760" y="3182112"/>
+            <a:off x="365760" y="3273552"/>
             <a:ext cx="1371600" cy="658368"/>
           </a:xfrm>
           <a:prstGeom prst="rect">
@@ -20543,7 +21221,7 @@
         </p:nvSpPr>
         <p:spPr>
           <a:xfrm>
-            <a:off x="1874520" y="3182112"/>
+            <a:off x="1874520" y="3273552"/>
             <a:ext cx="6903720" cy="658368"/>
           </a:xfrm>
           <a:prstGeom prst="rect">
@@ -20570,8 +21248,8 @@
         </p:nvSpPr>
         <p:spPr>
           <a:xfrm>
-            <a:off x="1975104" y="3273552"/>
-            <a:ext cx="1554480" cy="475488"/>
+            <a:off x="2313432" y="3364992"/>
+            <a:ext cx="1645920" cy="475488"/>
           </a:xfrm>
           <a:prstGeom prst="rect">
             <a:avLst>
@@ -20597,8 +21275,8 @@
         </p:nvSpPr>
         <p:spPr>
           <a:xfrm>
-            <a:off x="1975104" y="3273552"/>
-            <a:ext cx="1554480" cy="475488"/>
+            <a:off x="2313432" y="3364992"/>
+            <a:ext cx="1645920" cy="475488"/>
           </a:xfrm>
           <a:prstGeom prst="rect">
             <a:avLst/>
@@ -20636,8 +21314,8 @@
         </p:nvSpPr>
         <p:spPr>
           <a:xfrm>
-            <a:off x="3529584" y="3273552"/>
-            <a:ext cx="73152" cy="475488"/>
+            <a:off x="3959352" y="3364992"/>
+            <a:ext cx="411480" cy="475488"/>
           </a:xfrm>
           <a:prstGeom prst="rect">
             <a:avLst/>
@@ -20675,8 +21353,8 @@
         </p:nvSpPr>
         <p:spPr>
           <a:xfrm>
-            <a:off x="3602736" y="3273552"/>
-            <a:ext cx="1554480" cy="475488"/>
+            <a:off x="4370832" y="3364992"/>
+            <a:ext cx="1645920" cy="475488"/>
           </a:xfrm>
           <a:prstGeom prst="rect">
             <a:avLst>
@@ -20702,8 +21380,8 @@
         </p:nvSpPr>
         <p:spPr>
           <a:xfrm>
-            <a:off x="3602736" y="3273552"/>
-            <a:ext cx="1554480" cy="475488"/>
+            <a:off x="4370832" y="3364992"/>
+            <a:ext cx="1645920" cy="475488"/>
           </a:xfrm>
           <a:prstGeom prst="rect">
             <a:avLst/>
@@ -20727,7 +21405,7 @@
                 <a:ea typeface="Trebuchet MS" pitchFamily="34" charset="-122"/>
                 <a:cs typeface="Trebuchet MS" pitchFamily="34" charset="-120"/>
               </a:rPr>
-              <a:t>or</a:t>
+              <a:t>view</a:t>
             </a:r>
             <a:endParaRPr lang="en-US" sz="1400" dirty="0"/>
           </a:p>
@@ -20741,8 +21419,8 @@
         </p:nvSpPr>
         <p:spPr>
           <a:xfrm>
-            <a:off x="5157216" y="3273552"/>
-            <a:ext cx="73152" cy="475488"/>
+            <a:off x="6016752" y="3364992"/>
+            <a:ext cx="411480" cy="475488"/>
           </a:xfrm>
           <a:prstGeom prst="rect">
             <a:avLst/>
@@ -20780,8 +21458,8 @@
         </p:nvSpPr>
         <p:spPr>
           <a:xfrm>
-            <a:off x="5230368" y="3273552"/>
-            <a:ext cx="1554480" cy="475488"/>
+            <a:off x="6428232" y="3364992"/>
+            <a:ext cx="1645920" cy="475488"/>
           </a:xfrm>
           <a:prstGeom prst="rect">
             <a:avLst>
@@ -20807,8 +21485,8 @@
         </p:nvSpPr>
         <p:spPr>
           <a:xfrm>
-            <a:off x="5230368" y="3273552"/>
-            <a:ext cx="1554480" cy="475488"/>
+            <a:off x="6428232" y="3364992"/>
+            <a:ext cx="1645920" cy="475488"/>
           </a:xfrm>
           <a:prstGeom prst="rect">
             <a:avLst/>
@@ -20832,7 +21510,7 @@
                 <a:ea typeface="Trebuchet MS" pitchFamily="34" charset="-122"/>
                 <a:cs typeface="Trebuchet MS" pitchFamily="34" charset="-120"/>
               </a:rPr>
-              <a:t>gan</a:t>
+              <a:t>ing</a:t>
             </a:r>
             <a:endParaRPr lang="en-US" sz="1400" dirty="0"/>
           </a:p>
@@ -20840,119 +21518,80 @@
       </p:sp>
       <p:sp>
         <p:nvSpPr>
-          <p:cNvPr id="36" name="Text 34"/>
-          <p:cNvSpPr/>
-          <p:nvPr/>
-        </p:nvSpPr>
-        <p:spPr>
-          <a:xfrm>
-            <a:off x="6784848" y="3273552"/>
-            <a:ext cx="73152" cy="475488"/>
-          </a:xfrm>
-          <a:prstGeom prst="rect">
-            <a:avLst/>
-          </a:prstGeom>
-          <a:noFill/>
-          <a:ln/>
-        </p:spPr>
-        <p:txBody>
-          <a:bodyPr wrap="square" lIns="0" tIns="0" rIns="0" bIns="0" rtlCol="0" anchor="ctr"/>
-          <a:lstStyle/>
-          <a:p>
-            <a:pPr algn="ctr" indent="0" marL="0">
-              <a:buNone/>
-            </a:pPr>
-            <a:r>
-              <a:rPr lang="en-US" sz="1600" b="1" dirty="0">
-                <a:solidFill>
-                  <a:srgbClr val="0D9488"/>
+          <p:cNvPr id="36" name="Shape 34"/>
+          <p:cNvSpPr/>
+          <p:nvPr/>
+        </p:nvSpPr>
+        <p:spPr>
+          <a:xfrm>
+            <a:off x="365760" y="4096512"/>
+            <a:ext cx="1371600" cy="658368"/>
+          </a:xfrm>
+          <a:prstGeom prst="rect">
+            <a:avLst>
+              <a:gd name="adj" fmla="val 8333"/>
+            </a:avLst>
+          </a:prstGeom>
+          <a:solidFill>
+            <a:srgbClr val="E2E8F0"/>
+          </a:solidFill>
+          <a:ln w="12700">
+            <a:solidFill>
+              <a:srgbClr val="E2E8F0"/>
+            </a:solidFill>
+            <a:prstDash val="solid"/>
+          </a:ln>
+        </p:spPr>
+      </p:sp>
+      <p:sp>
+        <p:nvSpPr>
+          <p:cNvPr id="37" name="Text 35"/>
+          <p:cNvSpPr/>
+          <p:nvPr/>
+        </p:nvSpPr>
+        <p:spPr>
+          <a:xfrm>
+            <a:off x="365760" y="4096512"/>
+            <a:ext cx="1371600" cy="658368"/>
+          </a:xfrm>
+          <a:prstGeom prst="rect">
+            <a:avLst/>
+          </a:prstGeom>
+          <a:noFill/>
+          <a:ln/>
+        </p:spPr>
+        <p:txBody>
+          <a:bodyPr wrap="square" lIns="0" tIns="0" rIns="0" bIns="0" rtlCol="0" anchor="ctr"/>
+          <a:lstStyle/>
+          <a:p>
+            <a:pPr algn="ctr" indent="0" marL="0">
+              <a:buNone/>
+            </a:pPr>
+            <a:r>
+              <a:rPr lang="en-US" sz="1100" b="1" dirty="0">
+                <a:solidFill>
+                  <a:srgbClr val="475569"/>
                 </a:solidFill>
                 <a:latin typeface="Trebuchet MS" pitchFamily="34" charset="0"/>
                 <a:ea typeface="Trebuchet MS" pitchFamily="34" charset="-122"/>
                 <a:cs typeface="Trebuchet MS" pitchFamily="34" charset="-120"/>
               </a:rPr>
-              <a:t>·</a:t>
-            </a:r>
-            <a:endParaRPr lang="en-US" sz="1600" dirty="0"/>
-          </a:p>
-        </p:txBody>
-      </p:sp>
-      <p:sp>
-        <p:nvSpPr>
-          <p:cNvPr id="37" name="Shape 35"/>
-          <p:cNvSpPr/>
-          <p:nvPr/>
-        </p:nvSpPr>
-        <p:spPr>
-          <a:xfrm>
-            <a:off x="6858000" y="3273552"/>
-            <a:ext cx="1554480" cy="475488"/>
-          </a:xfrm>
-          <a:prstGeom prst="rect">
-            <a:avLst>
-              <a:gd name="adj" fmla="val 9615"/>
-            </a:avLst>
-          </a:prstGeom>
-          <a:solidFill>
-            <a:srgbClr val="FFFFFF"/>
-          </a:solidFill>
-          <a:ln w="12700">
-            <a:solidFill>
-              <a:srgbClr val="0D9488"/>
-            </a:solidFill>
-            <a:prstDash val="solid"/>
-          </a:ln>
-        </p:spPr>
-      </p:sp>
-      <p:sp>
-        <p:nvSpPr>
-          <p:cNvPr id="38" name="Text 36"/>
-          <p:cNvSpPr/>
-          <p:nvPr/>
-        </p:nvSpPr>
-        <p:spPr>
-          <a:xfrm>
-            <a:off x="6858000" y="3273552"/>
-            <a:ext cx="1554480" cy="475488"/>
-          </a:xfrm>
-          <a:prstGeom prst="rect">
-            <a:avLst/>
-          </a:prstGeom>
-          <a:noFill/>
-          <a:ln/>
-        </p:spPr>
-        <p:txBody>
-          <a:bodyPr wrap="square" lIns="0" tIns="0" rIns="0" bIns="0" rtlCol="0" anchor="ctr"/>
-          <a:lstStyle/>
-          <a:p>
-            <a:pPr algn="ctr" indent="0" marL="0">
-              <a:buNone/>
-            </a:pPr>
-            <a:r>
-              <a:rPr lang="en-US" sz="1400" b="1" dirty="0">
-                <a:solidFill>
-                  <a:srgbClr val="0D9488"/>
-                </a:solidFill>
-                <a:latin typeface="Trebuchet MS" pitchFamily="34" charset="0"/>
-                <a:ea typeface="Trebuchet MS" pitchFamily="34" charset="-122"/>
-                <a:cs typeface="Trebuchet MS" pitchFamily="34" charset="-120"/>
-              </a:rPr>
-              <a:t>ise</a:t>
-            </a:r>
-            <a:endParaRPr lang="en-US" sz="1400" dirty="0"/>
-          </a:p>
-        </p:txBody>
-      </p:sp>
-      <p:sp>
-        <p:nvSpPr>
-          <p:cNvPr id="39" name="Shape 37"/>
-          <p:cNvSpPr/>
-          <p:nvPr/>
-        </p:nvSpPr>
-        <p:spPr>
-          <a:xfrm>
-            <a:off x="365760" y="4005072"/>
-            <a:ext cx="1371600" cy="658368"/>
+              <a:t>Phonemes</a:t>
+            </a:r>
+            <a:endParaRPr lang="en-US" sz="1100" dirty="0"/>
+          </a:p>
+        </p:txBody>
+      </p:sp>
+      <p:sp>
+        <p:nvSpPr>
+          <p:cNvPr id="38" name="Shape 36"/>
+          <p:cNvSpPr/>
+          <p:nvPr/>
+        </p:nvSpPr>
+        <p:spPr>
+          <a:xfrm>
+            <a:off x="1874520" y="4096512"/>
+            <a:ext cx="6903720" cy="658368"/>
           </a:xfrm>
           <a:prstGeom prst="rect">
             <a:avLst>
@@ -20960,91 +21599,25 @@
             </a:avLst>
           </a:prstGeom>
           <a:solidFill>
-            <a:srgbClr val="E2E8F0"/>
+            <a:srgbClr val="F8FAFC"/>
           </a:solidFill>
           <a:ln w="12700">
             <a:solidFill>
               <a:srgbClr val="E2E8F0"/>
             </a:solidFill>
-            <a:prstDash val="solid"/>
-          </a:ln>
-        </p:spPr>
-      </p:sp>
-      <p:sp>
-        <p:nvSpPr>
-          <p:cNvPr id="40" name="Text 38"/>
-          <p:cNvSpPr/>
-          <p:nvPr/>
-        </p:nvSpPr>
-        <p:spPr>
-          <a:xfrm>
-            <a:off x="365760" y="4005072"/>
-            <a:ext cx="1371600" cy="658368"/>
-          </a:xfrm>
-          <a:prstGeom prst="rect">
-            <a:avLst/>
-          </a:prstGeom>
-          <a:noFill/>
-          <a:ln/>
-        </p:spPr>
-        <p:txBody>
-          <a:bodyPr wrap="square" lIns="0" tIns="0" rIns="0" bIns="0" rtlCol="0" anchor="ctr"/>
-          <a:lstStyle/>
-          <a:p>
-            <a:pPr algn="ctr" indent="0" marL="0">
-              <a:buNone/>
-            </a:pPr>
-            <a:r>
-              <a:rPr lang="en-US" sz="1100" b="1" dirty="0">
-                <a:solidFill>
-                  <a:srgbClr val="475569"/>
-                </a:solidFill>
-                <a:latin typeface="Trebuchet MS" pitchFamily="34" charset="0"/>
-                <a:ea typeface="Trebuchet MS" pitchFamily="34" charset="-122"/>
-                <a:cs typeface="Trebuchet MS" pitchFamily="34" charset="-120"/>
-              </a:rPr>
-              <a:t>Phonemes</a:t>
-            </a:r>
-            <a:endParaRPr lang="en-US" sz="1100" dirty="0"/>
-          </a:p>
-        </p:txBody>
-      </p:sp>
-      <p:sp>
-        <p:nvSpPr>
-          <p:cNvPr id="41" name="Shape 39"/>
-          <p:cNvSpPr/>
-          <p:nvPr/>
-        </p:nvSpPr>
-        <p:spPr>
-          <a:xfrm>
-            <a:off x="1874520" y="4005072"/>
-            <a:ext cx="6903720" cy="658368"/>
-          </a:xfrm>
-          <a:prstGeom prst="rect">
-            <a:avLst>
-              <a:gd name="adj" fmla="val 8333"/>
-            </a:avLst>
-          </a:prstGeom>
-          <a:solidFill>
-            <a:srgbClr val="F8FAFC"/>
-          </a:solidFill>
-          <a:ln w="12700">
-            <a:solidFill>
-              <a:srgbClr val="E2E8F0"/>
-            </a:solidFill>
             <a:prstDash val="dash"/>
           </a:ln>
         </p:spPr>
       </p:sp>
       <p:sp>
         <p:nvSpPr>
-          <p:cNvPr id="42" name="Text 40"/>
-          <p:cNvSpPr/>
-          <p:nvPr/>
-        </p:nvSpPr>
-        <p:spPr>
-          <a:xfrm>
-            <a:off x="1874520" y="4005072"/>
+          <p:cNvPr id="39" name="Text 37"/>
+          <p:cNvSpPr/>
+          <p:nvPr/>
+        </p:nvSpPr>
+        <p:spPr>
+          <a:xfrm>
+            <a:off x="1874520" y="4096512"/>
             <a:ext cx="6903720" cy="658368"/>
           </a:xfrm>
           <a:prstGeom prst="rect">
@@ -21500,7 +22073,7 @@
                 <a:ea typeface="Trebuchet MS" pitchFamily="34" charset="-122"/>
                 <a:cs typeface="Trebuchet MS" pitchFamily="34" charset="-120"/>
               </a:rPr>
-              <a:t>reorganise</a:t>
+              <a:t>reviewing</a:t>
             </a:r>
             <a:endParaRPr lang="en-US" sz="2800" dirty="0"/>
           </a:p>
@@ -21515,11 +22088,11 @@
         <p:spPr>
           <a:xfrm>
             <a:off x="365760" y="2240280"/>
-            <a:ext cx="1371600" cy="658368"/>
+            <a:ext cx="1371600" cy="841248"/>
           </a:xfrm>
           <a:prstGeom prst="rect">
             <a:avLst>
-              <a:gd name="adj" fmla="val 8333"/>
+              <a:gd name="adj" fmla="val 6522"/>
             </a:avLst>
           </a:prstGeom>
           <a:solidFill>
@@ -21542,7 +22115,7 @@
         <p:spPr>
           <a:xfrm>
             <a:off x="365760" y="2240280"/>
-            <a:ext cx="1371600" cy="658368"/>
+            <a:ext cx="1371600" cy="841248"/>
           </a:xfrm>
           <a:prstGeom prst="rect">
             <a:avLst/>
@@ -21581,11 +22154,11 @@
         <p:spPr>
           <a:xfrm>
             <a:off x="2221992" y="2258568"/>
-            <a:ext cx="1828800" cy="347472"/>
+            <a:ext cx="1828800" cy="292608"/>
           </a:xfrm>
           <a:prstGeom prst="rect">
             <a:avLst>
-              <a:gd name="adj" fmla="val 21053"/>
+              <a:gd name="adj" fmla="val 25000"/>
             </a:avLst>
           </a:prstGeom>
           <a:solidFill>
@@ -21615,7 +22188,7 @@
         <p:spPr>
           <a:xfrm>
             <a:off x="2221992" y="2258568"/>
-            <a:ext cx="1828800" cy="347472"/>
+            <a:ext cx="1828800" cy="292608"/>
           </a:xfrm>
           <a:prstGeom prst="rect">
             <a:avLst/>
@@ -21653,8 +22226,8 @@
         </p:nvSpPr>
         <p:spPr>
           <a:xfrm>
-            <a:off x="2221992" y="2624328"/>
-            <a:ext cx="1828800" cy="256032"/>
+            <a:off x="2221992" y="2569464"/>
+            <a:ext cx="1828800" cy="201168"/>
           </a:xfrm>
           <a:prstGeom prst="rect">
             <a:avLst/>
@@ -21693,11 +22266,11 @@
         <p:spPr>
           <a:xfrm>
             <a:off x="4370832" y="2258568"/>
-            <a:ext cx="1828800" cy="347472"/>
+            <a:ext cx="1828800" cy="292608"/>
           </a:xfrm>
           <a:prstGeom prst="rect">
             <a:avLst>
-              <a:gd name="adj" fmla="val 21053"/>
+              <a:gd name="adj" fmla="val 25000"/>
             </a:avLst>
           </a:prstGeom>
           <a:solidFill>
@@ -21727,7 +22300,7 @@
         <p:spPr>
           <a:xfrm>
             <a:off x="4370832" y="2258568"/>
-            <a:ext cx="1828800" cy="347472"/>
+            <a:ext cx="1828800" cy="292608"/>
           </a:xfrm>
           <a:prstGeom prst="rect">
             <a:avLst/>
@@ -21751,7 +22324,7 @@
                 <a:ea typeface="Trebuchet MS" pitchFamily="34" charset="-122"/>
                 <a:cs typeface="Trebuchet MS" pitchFamily="34" charset="-120"/>
               </a:rPr>
-              <a:t>organ</a:t>
+              <a:t>view</a:t>
             </a:r>
             <a:endParaRPr lang="en-US" sz="1300" dirty="0"/>
           </a:p>
@@ -21765,8 +22338,8 @@
         </p:nvSpPr>
         <p:spPr>
           <a:xfrm>
-            <a:off x="4370832" y="2624328"/>
-            <a:ext cx="1828800" cy="256032"/>
+            <a:off x="4370832" y="2569464"/>
+            <a:ext cx="1828800" cy="201168"/>
           </a:xfrm>
           <a:prstGeom prst="rect">
             <a:avLst/>
@@ -21790,7 +22363,7 @@
                 <a:ea typeface="Calibri" pitchFamily="34" charset="-122"/>
                 <a:cs typeface="Calibri" pitchFamily="34" charset="-120"/>
               </a:rPr>
-              <a:t>to arrange in order</a:t>
+              <a:t>to look at</a:t>
             </a:r>
             <a:endParaRPr lang="en-US" sz="850" dirty="0"/>
           </a:p>
@@ -21805,11 +22378,11 @@
         <p:spPr>
           <a:xfrm>
             <a:off x="6519672" y="2258568"/>
-            <a:ext cx="1828800" cy="347472"/>
+            <a:ext cx="1828800" cy="292608"/>
           </a:xfrm>
           <a:prstGeom prst="rect">
             <a:avLst>
-              <a:gd name="adj" fmla="val 21053"/>
+              <a:gd name="adj" fmla="val 25000"/>
             </a:avLst>
           </a:prstGeom>
           <a:solidFill>
@@ -21839,7 +22412,7 @@
         <p:spPr>
           <a:xfrm>
             <a:off x="6519672" y="2258568"/>
-            <a:ext cx="1828800" cy="347472"/>
+            <a:ext cx="1828800" cy="292608"/>
           </a:xfrm>
           <a:prstGeom prst="rect">
             <a:avLst/>
@@ -21863,7 +22436,7 @@
                 <a:ea typeface="Trebuchet MS" pitchFamily="34" charset="-122"/>
                 <a:cs typeface="Trebuchet MS" pitchFamily="34" charset="-120"/>
               </a:rPr>
-              <a:t>ise</a:t>
+              <a:t>ing</a:t>
             </a:r>
             <a:endParaRPr lang="en-US" sz="1300" dirty="0"/>
           </a:p>
@@ -21877,8 +22450,8 @@
         </p:nvSpPr>
         <p:spPr>
           <a:xfrm>
-            <a:off x="6519672" y="2624328"/>
-            <a:ext cx="1828800" cy="256032"/>
+            <a:off x="6519672" y="2569464"/>
+            <a:ext cx="1828800" cy="201168"/>
           </a:xfrm>
           <a:prstGeom prst="rect">
             <a:avLst/>
@@ -21902,7 +22475,7 @@
                 <a:ea typeface="Calibri" pitchFamily="34" charset="-122"/>
                 <a:cs typeface="Calibri" pitchFamily="34" charset="-120"/>
               </a:rPr>
-              <a:t>to make or do</a:t>
+              <a:t>happening now or ongoing</a:t>
             </a:r>
             <a:endParaRPr lang="en-US" sz="850" dirty="0"/>
           </a:p>
@@ -21916,7 +22489,7 @@
         </p:nvSpPr>
         <p:spPr>
           <a:xfrm>
-            <a:off x="365760" y="3182112"/>
+            <a:off x="365760" y="3273552"/>
             <a:ext cx="1371600" cy="658368"/>
           </a:xfrm>
           <a:prstGeom prst="rect">
@@ -21943,7 +22516,7 @@
         </p:nvSpPr>
         <p:spPr>
           <a:xfrm>
-            <a:off x="365760" y="3182112"/>
+            <a:off x="365760" y="3273552"/>
             <a:ext cx="1371600" cy="658368"/>
           </a:xfrm>
           <a:prstGeom prst="rect">
@@ -21982,7 +22555,7 @@
         </p:nvSpPr>
         <p:spPr>
           <a:xfrm>
-            <a:off x="1874520" y="3182112"/>
+            <a:off x="1874520" y="3273552"/>
             <a:ext cx="6903720" cy="658368"/>
           </a:xfrm>
           <a:prstGeom prst="rect">
@@ -22009,8 +22582,8 @@
         </p:nvSpPr>
         <p:spPr>
           <a:xfrm>
-            <a:off x="1975104" y="3273552"/>
-            <a:ext cx="1554480" cy="475488"/>
+            <a:off x="2313432" y="3364992"/>
+            <a:ext cx="1645920" cy="475488"/>
           </a:xfrm>
           <a:prstGeom prst="rect">
             <a:avLst>
@@ -22036,8 +22609,8 @@
         </p:nvSpPr>
         <p:spPr>
           <a:xfrm>
-            <a:off x="1975104" y="3273552"/>
-            <a:ext cx="1554480" cy="475488"/>
+            <a:off x="2313432" y="3364992"/>
+            <a:ext cx="1645920" cy="475488"/>
           </a:xfrm>
           <a:prstGeom prst="rect">
             <a:avLst/>
@@ -22075,8 +22648,8 @@
         </p:nvSpPr>
         <p:spPr>
           <a:xfrm>
-            <a:off x="3529584" y="3273552"/>
-            <a:ext cx="73152" cy="475488"/>
+            <a:off x="3959352" y="3364992"/>
+            <a:ext cx="411480" cy="475488"/>
           </a:xfrm>
           <a:prstGeom prst="rect">
             <a:avLst/>
@@ -22114,8 +22687,8 @@
         </p:nvSpPr>
         <p:spPr>
           <a:xfrm>
-            <a:off x="3602736" y="3273552"/>
-            <a:ext cx="1554480" cy="475488"/>
+            <a:off x="4370832" y="3364992"/>
+            <a:ext cx="1645920" cy="475488"/>
           </a:xfrm>
           <a:prstGeom prst="rect">
             <a:avLst>
@@ -22141,8 +22714,8 @@
         </p:nvSpPr>
         <p:spPr>
           <a:xfrm>
-            <a:off x="3602736" y="3273552"/>
-            <a:ext cx="1554480" cy="475488"/>
+            <a:off x="4370832" y="3364992"/>
+            <a:ext cx="1645920" cy="475488"/>
           </a:xfrm>
           <a:prstGeom prst="rect">
             <a:avLst/>
@@ -22166,7 +22739,7 @@
                 <a:ea typeface="Trebuchet MS" pitchFamily="34" charset="-122"/>
                 <a:cs typeface="Trebuchet MS" pitchFamily="34" charset="-120"/>
               </a:rPr>
-              <a:t>or</a:t>
+              <a:t>view</a:t>
             </a:r>
             <a:endParaRPr lang="en-US" sz="1400" dirty="0"/>
           </a:p>
@@ -22180,8 +22753,8 @@
         </p:nvSpPr>
         <p:spPr>
           <a:xfrm>
-            <a:off x="5157216" y="3273552"/>
-            <a:ext cx="73152" cy="475488"/>
+            <a:off x="6016752" y="3364992"/>
+            <a:ext cx="411480" cy="475488"/>
           </a:xfrm>
           <a:prstGeom prst="rect">
             <a:avLst/>
@@ -22219,8 +22792,8 @@
         </p:nvSpPr>
         <p:spPr>
           <a:xfrm>
-            <a:off x="5230368" y="3273552"/>
-            <a:ext cx="1554480" cy="475488"/>
+            <a:off x="6428232" y="3364992"/>
+            <a:ext cx="1645920" cy="475488"/>
           </a:xfrm>
           <a:prstGeom prst="rect">
             <a:avLst>
@@ -22246,8 +22819,8 @@
         </p:nvSpPr>
         <p:spPr>
           <a:xfrm>
-            <a:off x="5230368" y="3273552"/>
-            <a:ext cx="1554480" cy="475488"/>
+            <a:off x="6428232" y="3364992"/>
+            <a:ext cx="1645920" cy="475488"/>
           </a:xfrm>
           <a:prstGeom prst="rect">
             <a:avLst/>
@@ -22271,7 +22844,7 @@
                 <a:ea typeface="Trebuchet MS" pitchFamily="34" charset="-122"/>
                 <a:cs typeface="Trebuchet MS" pitchFamily="34" charset="-120"/>
               </a:rPr>
-              <a:t>gan</a:t>
+              <a:t>ing</a:t>
             </a:r>
             <a:endParaRPr lang="en-US" sz="1400" dirty="0"/>
           </a:p>
@@ -22279,211 +22852,238 @@
       </p:sp>
       <p:sp>
         <p:nvSpPr>
-          <p:cNvPr id="36" name="Text 34"/>
-          <p:cNvSpPr/>
-          <p:nvPr/>
-        </p:nvSpPr>
-        <p:spPr>
-          <a:xfrm>
-            <a:off x="6784848" y="3273552"/>
-            <a:ext cx="73152" cy="475488"/>
-          </a:xfrm>
-          <a:prstGeom prst="rect">
-            <a:avLst/>
-          </a:prstGeom>
-          <a:noFill/>
-          <a:ln/>
-        </p:spPr>
-        <p:txBody>
-          <a:bodyPr wrap="square" lIns="0" tIns="0" rIns="0" bIns="0" rtlCol="0" anchor="ctr"/>
-          <a:lstStyle/>
-          <a:p>
-            <a:pPr algn="ctr" indent="0" marL="0">
-              <a:buNone/>
-            </a:pPr>
-            <a:r>
-              <a:rPr lang="en-US" sz="1600" b="1" dirty="0">
-                <a:solidFill>
-                  <a:srgbClr val="0D9488"/>
+          <p:cNvPr id="36" name="Shape 34"/>
+          <p:cNvSpPr/>
+          <p:nvPr/>
+        </p:nvSpPr>
+        <p:spPr>
+          <a:xfrm>
+            <a:off x="365760" y="4096512"/>
+            <a:ext cx="1371600" cy="658368"/>
+          </a:xfrm>
+          <a:prstGeom prst="rect">
+            <a:avLst>
+              <a:gd name="adj" fmla="val 8333"/>
+            </a:avLst>
+          </a:prstGeom>
+          <a:solidFill>
+            <a:srgbClr val="E2E8F0"/>
+          </a:solidFill>
+          <a:ln w="12700">
+            <a:solidFill>
+              <a:srgbClr val="E2E8F0"/>
+            </a:solidFill>
+            <a:prstDash val="solid"/>
+          </a:ln>
+        </p:spPr>
+      </p:sp>
+      <p:sp>
+        <p:nvSpPr>
+          <p:cNvPr id="37" name="Text 35"/>
+          <p:cNvSpPr/>
+          <p:nvPr/>
+        </p:nvSpPr>
+        <p:spPr>
+          <a:xfrm>
+            <a:off x="365760" y="4096512"/>
+            <a:ext cx="1371600" cy="658368"/>
+          </a:xfrm>
+          <a:prstGeom prst="rect">
+            <a:avLst/>
+          </a:prstGeom>
+          <a:noFill/>
+          <a:ln/>
+        </p:spPr>
+        <p:txBody>
+          <a:bodyPr wrap="square" lIns="0" tIns="0" rIns="0" bIns="0" rtlCol="0" anchor="ctr"/>
+          <a:lstStyle/>
+          <a:p>
+            <a:pPr algn="ctr" indent="0" marL="0">
+              <a:buNone/>
+            </a:pPr>
+            <a:r>
+              <a:rPr lang="en-US" sz="1100" b="1" dirty="0">
+                <a:solidFill>
+                  <a:srgbClr val="475569"/>
                 </a:solidFill>
                 <a:latin typeface="Trebuchet MS" pitchFamily="34" charset="0"/>
                 <a:ea typeface="Trebuchet MS" pitchFamily="34" charset="-122"/>
                 <a:cs typeface="Trebuchet MS" pitchFamily="34" charset="-120"/>
               </a:rPr>
-              <a:t>·</a:t>
-            </a:r>
-            <a:endParaRPr lang="en-US" sz="1600" dirty="0"/>
-          </a:p>
-        </p:txBody>
-      </p:sp>
-      <p:sp>
-        <p:nvSpPr>
-          <p:cNvPr id="37" name="Shape 35"/>
-          <p:cNvSpPr/>
-          <p:nvPr/>
-        </p:nvSpPr>
-        <p:spPr>
-          <a:xfrm>
-            <a:off x="6858000" y="3273552"/>
-            <a:ext cx="1554480" cy="475488"/>
+              <a:t>Phonemes</a:t>
+            </a:r>
+            <a:endParaRPr lang="en-US" sz="1100" dirty="0"/>
+          </a:p>
+        </p:txBody>
+      </p:sp>
+      <p:sp>
+        <p:nvSpPr>
+          <p:cNvPr id="38" name="Shape 36"/>
+          <p:cNvSpPr/>
+          <p:nvPr/>
+        </p:nvSpPr>
+        <p:spPr>
+          <a:xfrm>
+            <a:off x="1874520" y="4096512"/>
+            <a:ext cx="6903720" cy="658368"/>
           </a:xfrm>
           <a:prstGeom prst="rect">
             <a:avLst>
-              <a:gd name="adj" fmla="val 9615"/>
+              <a:gd name="adj" fmla="val 8333"/>
             </a:avLst>
           </a:prstGeom>
           <a:solidFill>
+            <a:srgbClr val="FCE7F3"/>
+          </a:solidFill>
+          <a:ln w="12700">
+            <a:solidFill>
+              <a:srgbClr val="DB2777"/>
+            </a:solidFill>
+            <a:prstDash val="solid"/>
+          </a:ln>
+        </p:spPr>
+      </p:sp>
+      <p:sp>
+        <p:nvSpPr>
+          <p:cNvPr id="39" name="Shape 37"/>
+          <p:cNvSpPr/>
+          <p:nvPr/>
+        </p:nvSpPr>
+        <p:spPr>
+          <a:xfrm>
+            <a:off x="2254649" y="4187952"/>
+            <a:ext cx="685800" cy="475488"/>
+          </a:xfrm>
+          <a:prstGeom prst="rect">
+            <a:avLst>
+              <a:gd name="adj" fmla="val 7692"/>
+            </a:avLst>
+          </a:prstGeom>
+          <a:solidFill>
             <a:srgbClr val="FFFFFF"/>
           </a:solidFill>
           <a:ln w="12700">
             <a:solidFill>
-              <a:srgbClr val="0D9488"/>
-            </a:solidFill>
-            <a:prstDash val="solid"/>
-          </a:ln>
-        </p:spPr>
-      </p:sp>
-      <p:sp>
-        <p:nvSpPr>
-          <p:cNvPr id="38" name="Text 36"/>
-          <p:cNvSpPr/>
-          <p:nvPr/>
-        </p:nvSpPr>
-        <p:spPr>
-          <a:xfrm>
-            <a:off x="6858000" y="3273552"/>
-            <a:ext cx="1554480" cy="475488"/>
-          </a:xfrm>
-          <a:prstGeom prst="rect">
-            <a:avLst/>
-          </a:prstGeom>
-          <a:noFill/>
-          <a:ln/>
-        </p:spPr>
-        <p:txBody>
-          <a:bodyPr wrap="square" lIns="0" tIns="0" rIns="0" bIns="0" rtlCol="0" anchor="ctr"/>
-          <a:lstStyle/>
-          <a:p>
-            <a:pPr algn="ctr" indent="0" marL="0">
-              <a:buNone/>
-            </a:pPr>
-            <a:r>
-              <a:rPr lang="en-US" sz="1400" b="1" dirty="0">
-                <a:solidFill>
-                  <a:srgbClr val="0D9488"/>
+              <a:srgbClr val="DB2777"/>
+            </a:solidFill>
+            <a:prstDash val="solid"/>
+          </a:ln>
+        </p:spPr>
+      </p:sp>
+      <p:sp>
+        <p:nvSpPr>
+          <p:cNvPr id="40" name="Text 38"/>
+          <p:cNvSpPr/>
+          <p:nvPr/>
+        </p:nvSpPr>
+        <p:spPr>
+          <a:xfrm>
+            <a:off x="2254649" y="4187952"/>
+            <a:ext cx="685800" cy="475488"/>
+          </a:xfrm>
+          <a:prstGeom prst="rect">
+            <a:avLst/>
+          </a:prstGeom>
+          <a:noFill/>
+          <a:ln/>
+        </p:spPr>
+        <p:txBody>
+          <a:bodyPr wrap="square" lIns="0" tIns="0" rIns="0" bIns="0" rtlCol="0" anchor="ctr"/>
+          <a:lstStyle/>
+          <a:p>
+            <a:pPr algn="ctr" indent="0" marL="0">
+              <a:buNone/>
+            </a:pPr>
+            <a:r>
+              <a:rPr lang="en-US" sz="900" b="1" dirty="0">
+                <a:solidFill>
+                  <a:srgbClr val="9D174D"/>
                 </a:solidFill>
                 <a:latin typeface="Trebuchet MS" pitchFamily="34" charset="0"/>
                 <a:ea typeface="Trebuchet MS" pitchFamily="34" charset="-122"/>
                 <a:cs typeface="Trebuchet MS" pitchFamily="34" charset="-120"/>
               </a:rPr>
-              <a:t>ise</a:t>
-            </a:r>
-            <a:endParaRPr lang="en-US" sz="1400" dirty="0"/>
-          </a:p>
-        </p:txBody>
-      </p:sp>
-      <p:sp>
-        <p:nvSpPr>
-          <p:cNvPr id="39" name="Shape 37"/>
-          <p:cNvSpPr/>
-          <p:nvPr/>
-        </p:nvSpPr>
-        <p:spPr>
-          <a:xfrm>
-            <a:off x="365760" y="4005072"/>
-            <a:ext cx="1371600" cy="658368"/>
+              <a:t>r</a:t>
+            </a:r>
+            <a:endParaRPr lang="en-US" sz="900" dirty="0"/>
+          </a:p>
+        </p:txBody>
+      </p:sp>
+      <p:sp>
+        <p:nvSpPr>
+          <p:cNvPr id="41" name="Shape 39"/>
+          <p:cNvSpPr/>
+          <p:nvPr/>
+        </p:nvSpPr>
+        <p:spPr>
+          <a:xfrm>
+            <a:off x="3293146" y="4187952"/>
+            <a:ext cx="685800" cy="475488"/>
           </a:xfrm>
           <a:prstGeom prst="rect">
             <a:avLst>
-              <a:gd name="adj" fmla="val 8333"/>
+              <a:gd name="adj" fmla="val 7692"/>
             </a:avLst>
           </a:prstGeom>
           <a:solidFill>
-            <a:srgbClr val="E2E8F0"/>
-          </a:solidFill>
-          <a:ln w="12700">
-            <a:solidFill>
-              <a:srgbClr val="E2E8F0"/>
-            </a:solidFill>
-            <a:prstDash val="solid"/>
-          </a:ln>
-        </p:spPr>
-      </p:sp>
-      <p:sp>
-        <p:nvSpPr>
-          <p:cNvPr id="40" name="Text 38"/>
-          <p:cNvSpPr/>
-          <p:nvPr/>
-        </p:nvSpPr>
-        <p:spPr>
-          <a:xfrm>
-            <a:off x="365760" y="4005072"/>
-            <a:ext cx="1371600" cy="658368"/>
-          </a:xfrm>
-          <a:prstGeom prst="rect">
-            <a:avLst/>
-          </a:prstGeom>
-          <a:noFill/>
-          <a:ln/>
-        </p:spPr>
-        <p:txBody>
-          <a:bodyPr wrap="square" lIns="0" tIns="0" rIns="0" bIns="0" rtlCol="0" anchor="ctr"/>
-          <a:lstStyle/>
-          <a:p>
-            <a:pPr algn="ctr" indent="0" marL="0">
-              <a:buNone/>
-            </a:pPr>
-            <a:r>
-              <a:rPr lang="en-US" sz="1100" b="1" dirty="0">
-                <a:solidFill>
-                  <a:srgbClr val="475569"/>
+            <a:srgbClr val="FFFFFF"/>
+          </a:solidFill>
+          <a:ln w="12700">
+            <a:solidFill>
+              <a:srgbClr val="DB2777"/>
+            </a:solidFill>
+            <a:prstDash val="solid"/>
+          </a:ln>
+        </p:spPr>
+      </p:sp>
+      <p:sp>
+        <p:nvSpPr>
+          <p:cNvPr id="42" name="Text 40"/>
+          <p:cNvSpPr/>
+          <p:nvPr/>
+        </p:nvSpPr>
+        <p:spPr>
+          <a:xfrm>
+            <a:off x="3293146" y="4187952"/>
+            <a:ext cx="685800" cy="475488"/>
+          </a:xfrm>
+          <a:prstGeom prst="rect">
+            <a:avLst/>
+          </a:prstGeom>
+          <a:noFill/>
+          <a:ln/>
+        </p:spPr>
+        <p:txBody>
+          <a:bodyPr wrap="square" lIns="0" tIns="0" rIns="0" bIns="0" rtlCol="0" anchor="ctr"/>
+          <a:lstStyle/>
+          <a:p>
+            <a:pPr algn="ctr" indent="0" marL="0">
+              <a:buNone/>
+            </a:pPr>
+            <a:r>
+              <a:rPr lang="en-US" sz="900" b="1" dirty="0">
+                <a:solidFill>
+                  <a:srgbClr val="9D174D"/>
                 </a:solidFill>
                 <a:latin typeface="Trebuchet MS" pitchFamily="34" charset="0"/>
                 <a:ea typeface="Trebuchet MS" pitchFamily="34" charset="-122"/>
                 <a:cs typeface="Trebuchet MS" pitchFamily="34" charset="-120"/>
               </a:rPr>
-              <a:t>Phonemes</a:t>
-            </a:r>
-            <a:endParaRPr lang="en-US" sz="1100" dirty="0"/>
-          </a:p>
-        </p:txBody>
-      </p:sp>
-      <p:sp>
-        <p:nvSpPr>
-          <p:cNvPr id="41" name="Shape 39"/>
-          <p:cNvSpPr/>
-          <p:nvPr/>
-        </p:nvSpPr>
-        <p:spPr>
-          <a:xfrm>
-            <a:off x="1874520" y="4005072"/>
-            <a:ext cx="6903720" cy="658368"/>
-          </a:xfrm>
-          <a:prstGeom prst="rect">
-            <a:avLst>
-              <a:gd name="adj" fmla="val 8333"/>
-            </a:avLst>
-          </a:prstGeom>
-          <a:solidFill>
-            <a:srgbClr val="FCE7F3"/>
-          </a:solidFill>
-          <a:ln w="12700">
-            <a:solidFill>
-              <a:srgbClr val="DB2777"/>
-            </a:solidFill>
-            <a:prstDash val="solid"/>
-          </a:ln>
-        </p:spPr>
-      </p:sp>
-      <p:sp>
-        <p:nvSpPr>
-          <p:cNvPr id="42" name="Shape 40"/>
-          <p:cNvSpPr/>
-          <p:nvPr/>
-        </p:nvSpPr>
-        <p:spPr>
-          <a:xfrm>
-            <a:off x="2023872" y="4096512"/>
+              <a:t>e</a:t>
+            </a:r>
+            <a:endParaRPr lang="en-US" sz="900" dirty="0"/>
+          </a:p>
+        </p:txBody>
+      </p:sp>
+      <p:sp>
+        <p:nvSpPr>
+          <p:cNvPr id="43" name="Shape 41"/>
+          <p:cNvSpPr/>
+          <p:nvPr/>
+        </p:nvSpPr>
+        <p:spPr>
+          <a:xfrm>
+            <a:off x="4331643" y="4187952"/>
             <a:ext cx="685800" cy="475488"/>
           </a:xfrm>
           <a:prstGeom prst="rect">
@@ -22504,13 +23104,13 @@
       </p:sp>
       <p:sp>
         <p:nvSpPr>
-          <p:cNvPr id="43" name="Text 41"/>
-          <p:cNvSpPr/>
-          <p:nvPr/>
-        </p:nvSpPr>
-        <p:spPr>
-          <a:xfrm>
-            <a:off x="2023872" y="4096512"/>
+          <p:cNvPr id="44" name="Text 42"/>
+          <p:cNvSpPr/>
+          <p:nvPr/>
+        </p:nvSpPr>
+        <p:spPr>
+          <a:xfrm>
+            <a:off x="4331643" y="4187952"/>
             <a:ext cx="685800" cy="475488"/>
           </a:xfrm>
           <a:prstGeom prst="rect">
@@ -22535,7 +23135,7 @@
                 <a:ea typeface="Trebuchet MS" pitchFamily="34" charset="-122"/>
                 <a:cs typeface="Trebuchet MS" pitchFamily="34" charset="-120"/>
               </a:rPr>
-              <a:t>r</a:t>
+              <a:t>v</a:t>
             </a:r>
             <a:endParaRPr lang="en-US" sz="900" dirty="0"/>
           </a:p>
@@ -22543,13 +23143,13 @@
       </p:sp>
       <p:sp>
         <p:nvSpPr>
-          <p:cNvPr id="44" name="Shape 42"/>
-          <p:cNvSpPr/>
-          <p:nvPr/>
-        </p:nvSpPr>
-        <p:spPr>
-          <a:xfrm>
-            <a:off x="2831592" y="4096512"/>
+          <p:cNvPr id="45" name="Shape 43"/>
+          <p:cNvSpPr/>
+          <p:nvPr/>
+        </p:nvSpPr>
+        <p:spPr>
+          <a:xfrm>
+            <a:off x="5370141" y="4187952"/>
             <a:ext cx="685800" cy="475488"/>
           </a:xfrm>
           <a:prstGeom prst="rect">
@@ -22570,13 +23170,13 @@
       </p:sp>
       <p:sp>
         <p:nvSpPr>
-          <p:cNvPr id="45" name="Text 43"/>
-          <p:cNvSpPr/>
-          <p:nvPr/>
-        </p:nvSpPr>
-        <p:spPr>
-          <a:xfrm>
-            <a:off x="2831592" y="4096512"/>
+          <p:cNvPr id="46" name="Text 44"/>
+          <p:cNvSpPr/>
+          <p:nvPr/>
+        </p:nvSpPr>
+        <p:spPr>
+          <a:xfrm>
+            <a:off x="5370141" y="4187952"/>
             <a:ext cx="685800" cy="475488"/>
           </a:xfrm>
           <a:prstGeom prst="rect">
@@ -22601,7 +23201,7 @@
                 <a:ea typeface="Trebuchet MS" pitchFamily="34" charset="-122"/>
                 <a:cs typeface="Trebuchet MS" pitchFamily="34" charset="-120"/>
               </a:rPr>
-              <a:t>e</a:t>
+              <a:t>ew</a:t>
             </a:r>
             <a:endParaRPr lang="en-US" sz="900" dirty="0"/>
           </a:p>
@@ -22609,13 +23209,13 @@
       </p:sp>
       <p:sp>
         <p:nvSpPr>
-          <p:cNvPr id="46" name="Shape 44"/>
-          <p:cNvSpPr/>
-          <p:nvPr/>
-        </p:nvSpPr>
-        <p:spPr>
-          <a:xfrm>
-            <a:off x="3639312" y="4096512"/>
+          <p:cNvPr id="47" name="Shape 45"/>
+          <p:cNvSpPr/>
+          <p:nvPr/>
+        </p:nvSpPr>
+        <p:spPr>
+          <a:xfrm>
+            <a:off x="6408638" y="4187952"/>
             <a:ext cx="685800" cy="475488"/>
           </a:xfrm>
           <a:prstGeom prst="rect">
@@ -22636,13 +23236,13 @@
       </p:sp>
       <p:sp>
         <p:nvSpPr>
-          <p:cNvPr id="47" name="Text 45"/>
-          <p:cNvSpPr/>
-          <p:nvPr/>
-        </p:nvSpPr>
-        <p:spPr>
-          <a:xfrm>
-            <a:off x="3639312" y="4096512"/>
+          <p:cNvPr id="48" name="Text 46"/>
+          <p:cNvSpPr/>
+          <p:nvPr/>
+        </p:nvSpPr>
+        <p:spPr>
+          <a:xfrm>
+            <a:off x="6408638" y="4187952"/>
             <a:ext cx="685800" cy="475488"/>
           </a:xfrm>
           <a:prstGeom prst="rect">
@@ -22667,7 +23267,7 @@
                 <a:ea typeface="Trebuchet MS" pitchFamily="34" charset="-122"/>
                 <a:cs typeface="Trebuchet MS" pitchFamily="34" charset="-120"/>
               </a:rPr>
-              <a:t>or</a:t>
+              <a:t>i</a:t>
             </a:r>
             <a:endParaRPr lang="en-US" sz="900" dirty="0"/>
           </a:p>
@@ -22675,13 +23275,13 @@
       </p:sp>
       <p:sp>
         <p:nvSpPr>
-          <p:cNvPr id="48" name="Shape 46"/>
-          <p:cNvSpPr/>
-          <p:nvPr/>
-        </p:nvSpPr>
-        <p:spPr>
-          <a:xfrm>
-            <a:off x="4447032" y="4096512"/>
+          <p:cNvPr id="49" name="Shape 47"/>
+          <p:cNvSpPr/>
+          <p:nvPr/>
+        </p:nvSpPr>
+        <p:spPr>
+          <a:xfrm>
+            <a:off x="7447135" y="4187952"/>
             <a:ext cx="685800" cy="475488"/>
           </a:xfrm>
           <a:prstGeom prst="rect">
@@ -22702,13 +23302,13 @@
       </p:sp>
       <p:sp>
         <p:nvSpPr>
-          <p:cNvPr id="49" name="Text 47"/>
-          <p:cNvSpPr/>
-          <p:nvPr/>
-        </p:nvSpPr>
-        <p:spPr>
-          <a:xfrm>
-            <a:off x="4447032" y="4096512"/>
+          <p:cNvPr id="50" name="Text 48"/>
+          <p:cNvSpPr/>
+          <p:nvPr/>
+        </p:nvSpPr>
+        <p:spPr>
+          <a:xfrm>
+            <a:off x="7447135" y="4187952"/>
             <a:ext cx="685800" cy="475488"/>
           </a:xfrm>
           <a:prstGeom prst="rect">
@@ -22733,271 +23333,7 @@
                 <a:ea typeface="Trebuchet MS" pitchFamily="34" charset="-122"/>
                 <a:cs typeface="Trebuchet MS" pitchFamily="34" charset="-120"/>
               </a:rPr>
-              <a:t>g</a:t>
-            </a:r>
-            <a:endParaRPr lang="en-US" sz="900" dirty="0"/>
-          </a:p>
-        </p:txBody>
-      </p:sp>
-      <p:sp>
-        <p:nvSpPr>
-          <p:cNvPr id="50" name="Shape 48"/>
-          <p:cNvSpPr/>
-          <p:nvPr/>
-        </p:nvSpPr>
-        <p:spPr>
-          <a:xfrm>
-            <a:off x="5254752" y="4096512"/>
-            <a:ext cx="685800" cy="475488"/>
-          </a:xfrm>
-          <a:prstGeom prst="rect">
-            <a:avLst>
-              <a:gd name="adj" fmla="val 7692"/>
-            </a:avLst>
-          </a:prstGeom>
-          <a:solidFill>
-            <a:srgbClr val="FFFFFF"/>
-          </a:solidFill>
-          <a:ln w="12700">
-            <a:solidFill>
-              <a:srgbClr val="DB2777"/>
-            </a:solidFill>
-            <a:prstDash val="solid"/>
-          </a:ln>
-        </p:spPr>
-      </p:sp>
-      <p:sp>
-        <p:nvSpPr>
-          <p:cNvPr id="51" name="Text 49"/>
-          <p:cNvSpPr/>
-          <p:nvPr/>
-        </p:nvSpPr>
-        <p:spPr>
-          <a:xfrm>
-            <a:off x="5254752" y="4096512"/>
-            <a:ext cx="685800" cy="475488"/>
-          </a:xfrm>
-          <a:prstGeom prst="rect">
-            <a:avLst/>
-          </a:prstGeom>
-          <a:noFill/>
-          <a:ln/>
-        </p:spPr>
-        <p:txBody>
-          <a:bodyPr wrap="square" lIns="0" tIns="0" rIns="0" bIns="0" rtlCol="0" anchor="ctr"/>
-          <a:lstStyle/>
-          <a:p>
-            <a:pPr algn="ctr" indent="0" marL="0">
-              <a:buNone/>
-            </a:pPr>
-            <a:r>
-              <a:rPr lang="en-US" sz="900" b="1" dirty="0">
-                <a:solidFill>
-                  <a:srgbClr val="9D174D"/>
-                </a:solidFill>
-                <a:latin typeface="Trebuchet MS" pitchFamily="34" charset="0"/>
-                <a:ea typeface="Trebuchet MS" pitchFamily="34" charset="-122"/>
-                <a:cs typeface="Trebuchet MS" pitchFamily="34" charset="-120"/>
-              </a:rPr>
-              <a:t>a</a:t>
-            </a:r>
-            <a:endParaRPr lang="en-US" sz="900" dirty="0"/>
-          </a:p>
-        </p:txBody>
-      </p:sp>
-      <p:sp>
-        <p:nvSpPr>
-          <p:cNvPr id="52" name="Shape 50"/>
-          <p:cNvSpPr/>
-          <p:nvPr/>
-        </p:nvSpPr>
-        <p:spPr>
-          <a:xfrm>
-            <a:off x="6062472" y="4096512"/>
-            <a:ext cx="685800" cy="475488"/>
-          </a:xfrm>
-          <a:prstGeom prst="rect">
-            <a:avLst>
-              <a:gd name="adj" fmla="val 7692"/>
-            </a:avLst>
-          </a:prstGeom>
-          <a:solidFill>
-            <a:srgbClr val="FFFFFF"/>
-          </a:solidFill>
-          <a:ln w="12700">
-            <a:solidFill>
-              <a:srgbClr val="DB2777"/>
-            </a:solidFill>
-            <a:prstDash val="solid"/>
-          </a:ln>
-        </p:spPr>
-      </p:sp>
-      <p:sp>
-        <p:nvSpPr>
-          <p:cNvPr id="53" name="Text 51"/>
-          <p:cNvSpPr/>
-          <p:nvPr/>
-        </p:nvSpPr>
-        <p:spPr>
-          <a:xfrm>
-            <a:off x="6062472" y="4096512"/>
-            <a:ext cx="685800" cy="475488"/>
-          </a:xfrm>
-          <a:prstGeom prst="rect">
-            <a:avLst/>
-          </a:prstGeom>
-          <a:noFill/>
-          <a:ln/>
-        </p:spPr>
-        <p:txBody>
-          <a:bodyPr wrap="square" lIns="0" tIns="0" rIns="0" bIns="0" rtlCol="0" anchor="ctr"/>
-          <a:lstStyle/>
-          <a:p>
-            <a:pPr algn="ctr" indent="0" marL="0">
-              <a:buNone/>
-            </a:pPr>
-            <a:r>
-              <a:rPr lang="en-US" sz="900" b="1" dirty="0">
-                <a:solidFill>
-                  <a:srgbClr val="9D174D"/>
-                </a:solidFill>
-                <a:latin typeface="Trebuchet MS" pitchFamily="34" charset="0"/>
-                <a:ea typeface="Trebuchet MS" pitchFamily="34" charset="-122"/>
-                <a:cs typeface="Trebuchet MS" pitchFamily="34" charset="-120"/>
-              </a:rPr>
-              <a:t>n</a:t>
-            </a:r>
-            <a:endParaRPr lang="en-US" sz="900" dirty="0"/>
-          </a:p>
-        </p:txBody>
-      </p:sp>
-      <p:sp>
-        <p:nvSpPr>
-          <p:cNvPr id="54" name="Shape 52"/>
-          <p:cNvSpPr/>
-          <p:nvPr/>
-        </p:nvSpPr>
-        <p:spPr>
-          <a:xfrm>
-            <a:off x="6870192" y="4096512"/>
-            <a:ext cx="685800" cy="475488"/>
-          </a:xfrm>
-          <a:prstGeom prst="rect">
-            <a:avLst>
-              <a:gd name="adj" fmla="val 7692"/>
-            </a:avLst>
-          </a:prstGeom>
-          <a:solidFill>
-            <a:srgbClr val="FFFFFF"/>
-          </a:solidFill>
-          <a:ln w="12700">
-            <a:solidFill>
-              <a:srgbClr val="DB2777"/>
-            </a:solidFill>
-            <a:prstDash val="solid"/>
-          </a:ln>
-        </p:spPr>
-      </p:sp>
-      <p:sp>
-        <p:nvSpPr>
-          <p:cNvPr id="55" name="Text 53"/>
-          <p:cNvSpPr/>
-          <p:nvPr/>
-        </p:nvSpPr>
-        <p:spPr>
-          <a:xfrm>
-            <a:off x="6870192" y="4096512"/>
-            <a:ext cx="685800" cy="475488"/>
-          </a:xfrm>
-          <a:prstGeom prst="rect">
-            <a:avLst/>
-          </a:prstGeom>
-          <a:noFill/>
-          <a:ln/>
-        </p:spPr>
-        <p:txBody>
-          <a:bodyPr wrap="square" lIns="0" tIns="0" rIns="0" bIns="0" rtlCol="0" anchor="ctr"/>
-          <a:lstStyle/>
-          <a:p>
-            <a:pPr algn="ctr" indent="0" marL="0">
-              <a:buNone/>
-            </a:pPr>
-            <a:r>
-              <a:rPr lang="en-US" sz="900" b="1" dirty="0">
-                <a:solidFill>
-                  <a:srgbClr val="9D174D"/>
-                </a:solidFill>
-                <a:latin typeface="Trebuchet MS" pitchFamily="34" charset="0"/>
-                <a:ea typeface="Trebuchet MS" pitchFamily="34" charset="-122"/>
-                <a:cs typeface="Trebuchet MS" pitchFamily="34" charset="-120"/>
-              </a:rPr>
-              <a:t>ie</a:t>
-            </a:r>
-            <a:endParaRPr lang="en-US" sz="900" dirty="0"/>
-          </a:p>
-        </p:txBody>
-      </p:sp>
-      <p:sp>
-        <p:nvSpPr>
-          <p:cNvPr id="56" name="Shape 54"/>
-          <p:cNvSpPr/>
-          <p:nvPr/>
-        </p:nvSpPr>
-        <p:spPr>
-          <a:xfrm>
-            <a:off x="7677912" y="4096512"/>
-            <a:ext cx="685800" cy="475488"/>
-          </a:xfrm>
-          <a:prstGeom prst="rect">
-            <a:avLst>
-              <a:gd name="adj" fmla="val 7692"/>
-            </a:avLst>
-          </a:prstGeom>
-          <a:solidFill>
-            <a:srgbClr val="FFFFFF"/>
-          </a:solidFill>
-          <a:ln w="12700">
-            <a:solidFill>
-              <a:srgbClr val="DB2777"/>
-            </a:solidFill>
-            <a:prstDash val="solid"/>
-          </a:ln>
-        </p:spPr>
-      </p:sp>
-      <p:sp>
-        <p:nvSpPr>
-          <p:cNvPr id="57" name="Text 55"/>
-          <p:cNvSpPr/>
-          <p:nvPr/>
-        </p:nvSpPr>
-        <p:spPr>
-          <a:xfrm>
-            <a:off x="7677912" y="4096512"/>
-            <a:ext cx="685800" cy="475488"/>
-          </a:xfrm>
-          <a:prstGeom prst="rect">
-            <a:avLst/>
-          </a:prstGeom>
-          <a:noFill/>
-          <a:ln/>
-        </p:spPr>
-        <p:txBody>
-          <a:bodyPr wrap="square" lIns="0" tIns="0" rIns="0" bIns="0" rtlCol="0" anchor="ctr"/>
-          <a:lstStyle/>
-          <a:p>
-            <a:pPr algn="ctr" indent="0" marL="0">
-              <a:buNone/>
-            </a:pPr>
-            <a:r>
-              <a:rPr lang="en-US" sz="900" b="1" dirty="0">
-                <a:solidFill>
-                  <a:srgbClr val="9D174D"/>
-                </a:solidFill>
-                <a:latin typeface="Trebuchet MS" pitchFamily="34" charset="0"/>
-                <a:ea typeface="Trebuchet MS" pitchFamily="34" charset="-122"/>
-                <a:cs typeface="Trebuchet MS" pitchFamily="34" charset="-120"/>
-              </a:rPr>
-              <a:t>z</a:t>
+              <a:t>ng</a:t>
             </a:r>
             <a:endParaRPr lang="en-US" sz="900" dirty="0"/>
           </a:p>
@@ -23428,7 +23764,7 @@
                 <a:ea typeface="Trebuchet MS" pitchFamily="34" charset="-122"/>
                 <a:cs typeface="Trebuchet MS" pitchFamily="34" charset="-120"/>
               </a:rPr>
-              <a:t>rewrite</a:t>
+              <a:t>redesign</a:t>
             </a:r>
             <a:endParaRPr lang="en-US" sz="2800" dirty="0"/>
           </a:p>
@@ -23443,6 +23779,138 @@
         <p:spPr>
           <a:xfrm>
             <a:off x="365760" y="2240280"/>
+            <a:ext cx="1371600" cy="841248"/>
+          </a:xfrm>
+          <a:prstGeom prst="rect">
+            <a:avLst>
+              <a:gd name="adj" fmla="val 6522"/>
+            </a:avLst>
+          </a:prstGeom>
+          <a:solidFill>
+            <a:srgbClr val="E2E8F0"/>
+          </a:solidFill>
+          <a:ln w="12700">
+            <a:solidFill>
+              <a:srgbClr val="E2E8F0"/>
+            </a:solidFill>
+            <a:prstDash val="solid"/>
+          </a:ln>
+        </p:spPr>
+      </p:sp>
+      <p:sp>
+        <p:nvSpPr>
+          <p:cNvPr id="15" name="Text 13"/>
+          <p:cNvSpPr/>
+          <p:nvPr/>
+        </p:nvSpPr>
+        <p:spPr>
+          <a:xfrm>
+            <a:off x="365760" y="2240280"/>
+            <a:ext cx="1371600" cy="841248"/>
+          </a:xfrm>
+          <a:prstGeom prst="rect">
+            <a:avLst/>
+          </a:prstGeom>
+          <a:noFill/>
+          <a:ln/>
+        </p:spPr>
+        <p:txBody>
+          <a:bodyPr wrap="square" lIns="0" tIns="0" rIns="0" bIns="0" rtlCol="0" anchor="ctr"/>
+          <a:lstStyle/>
+          <a:p>
+            <a:pPr algn="ctr" indent="0" marL="0">
+              <a:buNone/>
+            </a:pPr>
+            <a:r>
+              <a:rPr lang="en-US" sz="1100" b="1" dirty="0">
+                <a:solidFill>
+                  <a:srgbClr val="475569"/>
+                </a:solidFill>
+                <a:latin typeface="Trebuchet MS" pitchFamily="34" charset="0"/>
+                <a:ea typeface="Trebuchet MS" pitchFamily="34" charset="-122"/>
+                <a:cs typeface="Trebuchet MS" pitchFamily="34" charset="-120"/>
+              </a:rPr>
+              <a:t>Morphemes</a:t>
+            </a:r>
+            <a:endParaRPr lang="en-US" sz="1100" dirty="0"/>
+          </a:p>
+        </p:txBody>
+      </p:sp>
+      <p:sp>
+        <p:nvSpPr>
+          <p:cNvPr id="16" name="Shape 14"/>
+          <p:cNvSpPr/>
+          <p:nvPr/>
+        </p:nvSpPr>
+        <p:spPr>
+          <a:xfrm>
+            <a:off x="1874520" y="2240280"/>
+            <a:ext cx="6903720" cy="841248"/>
+          </a:xfrm>
+          <a:prstGeom prst="rect">
+            <a:avLst>
+              <a:gd name="adj" fmla="val 6522"/>
+            </a:avLst>
+          </a:prstGeom>
+          <a:solidFill>
+            <a:srgbClr val="F8FAFC"/>
+          </a:solidFill>
+          <a:ln w="12700">
+            <a:solidFill>
+              <a:srgbClr val="E2E8F0"/>
+            </a:solidFill>
+            <a:prstDash val="dash"/>
+          </a:ln>
+        </p:spPr>
+      </p:sp>
+      <p:sp>
+        <p:nvSpPr>
+          <p:cNvPr id="17" name="Text 15"/>
+          <p:cNvSpPr/>
+          <p:nvPr/>
+        </p:nvSpPr>
+        <p:spPr>
+          <a:xfrm>
+            <a:off x="1874520" y="2240280"/>
+            <a:ext cx="6903720" cy="841248"/>
+          </a:xfrm>
+          <a:prstGeom prst="rect">
+            <a:avLst/>
+          </a:prstGeom>
+          <a:noFill/>
+          <a:ln/>
+        </p:spPr>
+        <p:txBody>
+          <a:bodyPr wrap="square" rtlCol="0" anchor="ctr"/>
+          <a:lstStyle/>
+          <a:p>
+            <a:pPr algn="ctr" indent="0" marL="0">
+              <a:buNone/>
+            </a:pPr>
+            <a:r>
+              <a:rPr lang="en-US" sz="1100" i="1" dirty="0">
+                <a:solidFill>
+                  <a:srgbClr val="CBD5E1"/>
+                </a:solidFill>
+                <a:latin typeface="Calibri" pitchFamily="34" charset="0"/>
+                <a:ea typeface="Calibri" pitchFamily="34" charset="-122"/>
+                <a:cs typeface="Calibri" pitchFamily="34" charset="-120"/>
+              </a:rPr>
+              <a:t>Write here...</a:t>
+            </a:r>
+            <a:endParaRPr lang="en-US" sz="1100" dirty="0"/>
+          </a:p>
+        </p:txBody>
+      </p:sp>
+      <p:sp>
+        <p:nvSpPr>
+          <p:cNvPr id="18" name="Shape 16"/>
+          <p:cNvSpPr/>
+          <p:nvPr/>
+        </p:nvSpPr>
+        <p:spPr>
+          <a:xfrm>
+            <a:off x="365760" y="3273552"/>
             <a:ext cx="1371600" cy="658368"/>
           </a:xfrm>
           <a:prstGeom prst="rect">
@@ -23463,13 +23931,13 @@
       </p:sp>
       <p:sp>
         <p:nvSpPr>
-          <p:cNvPr id="15" name="Text 13"/>
-          <p:cNvSpPr/>
-          <p:nvPr/>
-        </p:nvSpPr>
-        <p:spPr>
-          <a:xfrm>
-            <a:off x="365760" y="2240280"/>
+          <p:cNvPr id="19" name="Text 17"/>
+          <p:cNvSpPr/>
+          <p:nvPr/>
+        </p:nvSpPr>
+        <p:spPr>
+          <a:xfrm>
+            <a:off x="365760" y="3273552"/>
             <a:ext cx="1371600" cy="658368"/>
           </a:xfrm>
           <a:prstGeom prst="rect">
@@ -23494,7 +23962,7 @@
                 <a:ea typeface="Trebuchet MS" pitchFamily="34" charset="-122"/>
                 <a:cs typeface="Trebuchet MS" pitchFamily="34" charset="-120"/>
               </a:rPr>
-              <a:t>Morphemes</a:t>
+              <a:t>Syllables</a:t>
             </a:r>
             <a:endParaRPr lang="en-US" sz="1100" dirty="0"/>
           </a:p>
@@ -23502,13 +23970,13 @@
       </p:sp>
       <p:sp>
         <p:nvSpPr>
-          <p:cNvPr id="16" name="Shape 14"/>
-          <p:cNvSpPr/>
-          <p:nvPr/>
-        </p:nvSpPr>
-        <p:spPr>
-          <a:xfrm>
-            <a:off x="1874520" y="2240280"/>
+          <p:cNvPr id="20" name="Shape 18"/>
+          <p:cNvSpPr/>
+          <p:nvPr/>
+        </p:nvSpPr>
+        <p:spPr>
+          <a:xfrm>
+            <a:off x="1874520" y="3273552"/>
             <a:ext cx="6903720" cy="658368"/>
           </a:xfrm>
           <a:prstGeom prst="rect">
@@ -23529,13 +23997,13 @@
       </p:sp>
       <p:sp>
         <p:nvSpPr>
-          <p:cNvPr id="17" name="Text 15"/>
-          <p:cNvSpPr/>
-          <p:nvPr/>
-        </p:nvSpPr>
-        <p:spPr>
-          <a:xfrm>
-            <a:off x="1874520" y="2240280"/>
+          <p:cNvPr id="21" name="Text 19"/>
+          <p:cNvSpPr/>
+          <p:nvPr/>
+        </p:nvSpPr>
+        <p:spPr>
+          <a:xfrm>
+            <a:off x="1874520" y="3273552"/>
             <a:ext cx="6903720" cy="658368"/>
           </a:xfrm>
           <a:prstGeom prst="rect">
@@ -23568,13 +24036,13 @@
       </p:sp>
       <p:sp>
         <p:nvSpPr>
-          <p:cNvPr id="18" name="Shape 16"/>
-          <p:cNvSpPr/>
-          <p:nvPr/>
-        </p:nvSpPr>
-        <p:spPr>
-          <a:xfrm>
-            <a:off x="365760" y="3182112"/>
+          <p:cNvPr id="22" name="Shape 20"/>
+          <p:cNvSpPr/>
+          <p:nvPr/>
+        </p:nvSpPr>
+        <p:spPr>
+          <a:xfrm>
+            <a:off x="365760" y="4096512"/>
             <a:ext cx="1371600" cy="658368"/>
           </a:xfrm>
           <a:prstGeom prst="rect">
@@ -23595,13 +24063,13 @@
       </p:sp>
       <p:sp>
         <p:nvSpPr>
-          <p:cNvPr id="19" name="Text 17"/>
-          <p:cNvSpPr/>
-          <p:nvPr/>
-        </p:nvSpPr>
-        <p:spPr>
-          <a:xfrm>
-            <a:off x="365760" y="3182112"/>
+          <p:cNvPr id="23" name="Text 21"/>
+          <p:cNvSpPr/>
+          <p:nvPr/>
+        </p:nvSpPr>
+        <p:spPr>
+          <a:xfrm>
+            <a:off x="365760" y="4096512"/>
             <a:ext cx="1371600" cy="658368"/>
           </a:xfrm>
           <a:prstGeom prst="rect">
@@ -23626,7 +24094,7 @@
                 <a:ea typeface="Trebuchet MS" pitchFamily="34" charset="-122"/>
                 <a:cs typeface="Trebuchet MS" pitchFamily="34" charset="-120"/>
               </a:rPr>
-              <a:t>Syllables</a:t>
+              <a:t>Phonemes</a:t>
             </a:r>
             <a:endParaRPr lang="en-US" sz="1100" dirty="0"/>
           </a:p>
@@ -23634,13 +24102,13 @@
       </p:sp>
       <p:sp>
         <p:nvSpPr>
-          <p:cNvPr id="20" name="Shape 18"/>
-          <p:cNvSpPr/>
-          <p:nvPr/>
-        </p:nvSpPr>
-        <p:spPr>
-          <a:xfrm>
-            <a:off x="1874520" y="3182112"/>
+          <p:cNvPr id="24" name="Shape 22"/>
+          <p:cNvSpPr/>
+          <p:nvPr/>
+        </p:nvSpPr>
+        <p:spPr>
+          <a:xfrm>
+            <a:off x="1874520" y="4096512"/>
             <a:ext cx="6903720" cy="658368"/>
           </a:xfrm>
           <a:prstGeom prst="rect">
@@ -23661,145 +24129,13 @@
       </p:sp>
       <p:sp>
         <p:nvSpPr>
-          <p:cNvPr id="21" name="Text 19"/>
-          <p:cNvSpPr/>
-          <p:nvPr/>
-        </p:nvSpPr>
-        <p:spPr>
-          <a:xfrm>
-            <a:off x="1874520" y="3182112"/>
-            <a:ext cx="6903720" cy="658368"/>
-          </a:xfrm>
-          <a:prstGeom prst="rect">
-            <a:avLst/>
-          </a:prstGeom>
-          <a:noFill/>
-          <a:ln/>
-        </p:spPr>
-        <p:txBody>
-          <a:bodyPr wrap="square" rtlCol="0" anchor="ctr"/>
-          <a:lstStyle/>
-          <a:p>
-            <a:pPr algn="ctr" indent="0" marL="0">
-              <a:buNone/>
-            </a:pPr>
-            <a:r>
-              <a:rPr lang="en-US" sz="1100" i="1" dirty="0">
-                <a:solidFill>
-                  <a:srgbClr val="CBD5E1"/>
-                </a:solidFill>
-                <a:latin typeface="Calibri" pitchFamily="34" charset="0"/>
-                <a:ea typeface="Calibri" pitchFamily="34" charset="-122"/>
-                <a:cs typeface="Calibri" pitchFamily="34" charset="-120"/>
-              </a:rPr>
-              <a:t>Write here...</a:t>
-            </a:r>
-            <a:endParaRPr lang="en-US" sz="1100" dirty="0"/>
-          </a:p>
-        </p:txBody>
-      </p:sp>
-      <p:sp>
-        <p:nvSpPr>
-          <p:cNvPr id="22" name="Shape 20"/>
-          <p:cNvSpPr/>
-          <p:nvPr/>
-        </p:nvSpPr>
-        <p:spPr>
-          <a:xfrm>
-            <a:off x="365760" y="4005072"/>
-            <a:ext cx="1371600" cy="658368"/>
-          </a:xfrm>
-          <a:prstGeom prst="rect">
-            <a:avLst>
-              <a:gd name="adj" fmla="val 8333"/>
-            </a:avLst>
-          </a:prstGeom>
-          <a:solidFill>
-            <a:srgbClr val="E2E8F0"/>
-          </a:solidFill>
-          <a:ln w="12700">
-            <a:solidFill>
-              <a:srgbClr val="E2E8F0"/>
-            </a:solidFill>
-            <a:prstDash val="solid"/>
-          </a:ln>
-        </p:spPr>
-      </p:sp>
-      <p:sp>
-        <p:nvSpPr>
-          <p:cNvPr id="23" name="Text 21"/>
-          <p:cNvSpPr/>
-          <p:nvPr/>
-        </p:nvSpPr>
-        <p:spPr>
-          <a:xfrm>
-            <a:off x="365760" y="4005072"/>
-            <a:ext cx="1371600" cy="658368"/>
-          </a:xfrm>
-          <a:prstGeom prst="rect">
-            <a:avLst/>
-          </a:prstGeom>
-          <a:noFill/>
-          <a:ln/>
-        </p:spPr>
-        <p:txBody>
-          <a:bodyPr wrap="square" lIns="0" tIns="0" rIns="0" bIns="0" rtlCol="0" anchor="ctr"/>
-          <a:lstStyle/>
-          <a:p>
-            <a:pPr algn="ctr" indent="0" marL="0">
-              <a:buNone/>
-            </a:pPr>
-            <a:r>
-              <a:rPr lang="en-US" sz="1100" b="1" dirty="0">
-                <a:solidFill>
-                  <a:srgbClr val="475569"/>
-                </a:solidFill>
-                <a:latin typeface="Trebuchet MS" pitchFamily="34" charset="0"/>
-                <a:ea typeface="Trebuchet MS" pitchFamily="34" charset="-122"/>
-                <a:cs typeface="Trebuchet MS" pitchFamily="34" charset="-120"/>
-              </a:rPr>
-              <a:t>Phonemes</a:t>
-            </a:r>
-            <a:endParaRPr lang="en-US" sz="1100" dirty="0"/>
-          </a:p>
-        </p:txBody>
-      </p:sp>
-      <p:sp>
-        <p:nvSpPr>
-          <p:cNvPr id="24" name="Shape 22"/>
-          <p:cNvSpPr/>
-          <p:nvPr/>
-        </p:nvSpPr>
-        <p:spPr>
-          <a:xfrm>
-            <a:off x="1874520" y="4005072"/>
-            <a:ext cx="6903720" cy="658368"/>
-          </a:xfrm>
-          <a:prstGeom prst="rect">
-            <a:avLst>
-              <a:gd name="adj" fmla="val 8333"/>
-            </a:avLst>
-          </a:prstGeom>
-          <a:solidFill>
-            <a:srgbClr val="F8FAFC"/>
-          </a:solidFill>
-          <a:ln w="12700">
-            <a:solidFill>
-              <a:srgbClr val="E2E8F0"/>
-            </a:solidFill>
-            <a:prstDash val="dash"/>
-          </a:ln>
-        </p:spPr>
-      </p:sp>
-      <p:sp>
-        <p:nvSpPr>
           <p:cNvPr id="25" name="Text 23"/>
           <p:cNvSpPr/>
           <p:nvPr/>
         </p:nvSpPr>
         <p:spPr>
           <a:xfrm>
-            <a:off x="1874520" y="4005072"/>
+            <a:off x="1874520" y="4096512"/>
             <a:ext cx="6903720" cy="658368"/>
           </a:xfrm>
           <a:prstGeom prst="rect">
@@ -24255,7 +24591,7 @@
                 <a:ea typeface="Trebuchet MS" pitchFamily="34" charset="-122"/>
                 <a:cs typeface="Trebuchet MS" pitchFamily="34" charset="-120"/>
               </a:rPr>
-              <a:t>rewrite</a:t>
+              <a:t>redesign</a:t>
             </a:r>
             <a:endParaRPr lang="en-US" sz="2800" dirty="0"/>
           </a:p>
@@ -24270,11 +24606,11 @@
         <p:spPr>
           <a:xfrm>
             <a:off x="365760" y="2240280"/>
-            <a:ext cx="1371600" cy="658368"/>
+            <a:ext cx="1371600" cy="841248"/>
           </a:xfrm>
           <a:prstGeom prst="rect">
             <a:avLst>
-              <a:gd name="adj" fmla="val 8333"/>
+              <a:gd name="adj" fmla="val 6522"/>
             </a:avLst>
           </a:prstGeom>
           <a:solidFill>
@@ -24297,7 +24633,7 @@
         <p:spPr>
           <a:xfrm>
             <a:off x="365760" y="2240280"/>
-            <a:ext cx="1371600" cy="658368"/>
+            <a:ext cx="1371600" cy="841248"/>
           </a:xfrm>
           <a:prstGeom prst="rect">
             <a:avLst/>
@@ -24336,11 +24672,11 @@
         <p:spPr>
           <a:xfrm>
             <a:off x="2938272" y="2258568"/>
-            <a:ext cx="1828800" cy="347472"/>
+            <a:ext cx="1828800" cy="292608"/>
           </a:xfrm>
           <a:prstGeom prst="rect">
             <a:avLst>
-              <a:gd name="adj" fmla="val 21053"/>
+              <a:gd name="adj" fmla="val 25000"/>
             </a:avLst>
           </a:prstGeom>
           <a:solidFill>
@@ -24370,7 +24706,7 @@
         <p:spPr>
           <a:xfrm>
             <a:off x="2938272" y="2258568"/>
-            <a:ext cx="1828800" cy="347472"/>
+            <a:ext cx="1828800" cy="292608"/>
           </a:xfrm>
           <a:prstGeom prst="rect">
             <a:avLst/>
@@ -24408,8 +24744,8 @@
         </p:nvSpPr>
         <p:spPr>
           <a:xfrm>
-            <a:off x="2938272" y="2624328"/>
-            <a:ext cx="1828800" cy="256032"/>
+            <a:off x="2938272" y="2569464"/>
+            <a:ext cx="1828800" cy="201168"/>
           </a:xfrm>
           <a:prstGeom prst="rect">
             <a:avLst/>
@@ -24448,11 +24784,11 @@
         <p:spPr>
           <a:xfrm>
             <a:off x="5803392" y="2258568"/>
-            <a:ext cx="1828800" cy="347472"/>
+            <a:ext cx="1828800" cy="292608"/>
           </a:xfrm>
           <a:prstGeom prst="rect">
             <a:avLst>
-              <a:gd name="adj" fmla="val 21053"/>
+              <a:gd name="adj" fmla="val 25000"/>
             </a:avLst>
           </a:prstGeom>
           <a:solidFill>
@@ -24482,7 +24818,7 @@
         <p:spPr>
           <a:xfrm>
             <a:off x="5803392" y="2258568"/>
-            <a:ext cx="1828800" cy="347472"/>
+            <a:ext cx="1828800" cy="292608"/>
           </a:xfrm>
           <a:prstGeom prst="rect">
             <a:avLst/>
@@ -24506,7 +24842,7 @@
                 <a:ea typeface="Trebuchet MS" pitchFamily="34" charset="-122"/>
                 <a:cs typeface="Trebuchet MS" pitchFamily="34" charset="-120"/>
               </a:rPr>
-              <a:t>write</a:t>
+              <a:t>design</a:t>
             </a:r>
             <a:endParaRPr lang="en-US" sz="1300" dirty="0"/>
           </a:p>
@@ -24520,8 +24856,8 @@
         </p:nvSpPr>
         <p:spPr>
           <a:xfrm>
-            <a:off x="5803392" y="2624328"/>
-            <a:ext cx="1828800" cy="256032"/>
+            <a:off x="5803392" y="2569464"/>
+            <a:ext cx="1828800" cy="201168"/>
           </a:xfrm>
           <a:prstGeom prst="rect">
             <a:avLst/>
@@ -24545,7 +24881,7 @@
                 <a:ea typeface="Calibri" pitchFamily="34" charset="-122"/>
                 <a:cs typeface="Calibri" pitchFamily="34" charset="-120"/>
               </a:rPr>
-              <a:t>to put words on paper</a:t>
+              <a:t>to plan or create the look of something</a:t>
             </a:r>
             <a:endParaRPr lang="en-US" sz="850" dirty="0"/>
           </a:p>
@@ -24559,7 +24895,7 @@
         </p:nvSpPr>
         <p:spPr>
           <a:xfrm>
-            <a:off x="365760" y="3182112"/>
+            <a:off x="365760" y="3273552"/>
             <a:ext cx="1371600" cy="658368"/>
           </a:xfrm>
           <a:prstGeom prst="rect">
@@ -24586,7 +24922,7 @@
         </p:nvSpPr>
         <p:spPr>
           <a:xfrm>
-            <a:off x="365760" y="3182112"/>
+            <a:off x="365760" y="3273552"/>
             <a:ext cx="1371600" cy="658368"/>
           </a:xfrm>
           <a:prstGeom prst="rect">
@@ -24625,7 +24961,7 @@
         </p:nvSpPr>
         <p:spPr>
           <a:xfrm>
-            <a:off x="1874520" y="3182112"/>
+            <a:off x="1874520" y="3273552"/>
             <a:ext cx="6903720" cy="658368"/>
           </a:xfrm>
           <a:prstGeom prst="rect">
@@ -24652,7 +24988,7 @@
         </p:nvSpPr>
         <p:spPr>
           <a:xfrm>
-            <a:off x="1874520" y="3182112"/>
+            <a:off x="1874520" y="3273552"/>
             <a:ext cx="6903720" cy="658368"/>
           </a:xfrm>
           <a:prstGeom prst="rect">
@@ -24691,7 +25027,7 @@
         </p:nvSpPr>
         <p:spPr>
           <a:xfrm>
-            <a:off x="365760" y="4005072"/>
+            <a:off x="365760" y="4096512"/>
             <a:ext cx="1371600" cy="658368"/>
           </a:xfrm>
           <a:prstGeom prst="rect">
@@ -24718,7 +25054,7 @@
         </p:nvSpPr>
         <p:spPr>
           <a:xfrm>
-            <a:off x="365760" y="4005072"/>
+            <a:off x="365760" y="4096512"/>
             <a:ext cx="1371600" cy="658368"/>
           </a:xfrm>
           <a:prstGeom prst="rect">
@@ -24757,7 +25093,7 @@
         </p:nvSpPr>
         <p:spPr>
           <a:xfrm>
-            <a:off x="1874520" y="4005072"/>
+            <a:off x="1874520" y="4096512"/>
             <a:ext cx="6903720" cy="658368"/>
           </a:xfrm>
           <a:prstGeom prst="rect">
@@ -24784,7 +25120,7 @@
         </p:nvSpPr>
         <p:spPr>
           <a:xfrm>
-            <a:off x="1874520" y="4005072"/>
+            <a:off x="1874520" y="4096512"/>
             <a:ext cx="6903720" cy="658368"/>
           </a:xfrm>
           <a:prstGeom prst="rect">
@@ -25959,7 +26295,7 @@
                 <a:ea typeface="Trebuchet MS" pitchFamily="34" charset="-122"/>
                 <a:cs typeface="Trebuchet MS" pitchFamily="34" charset="-120"/>
               </a:rPr>
-              <a:t>rewrite</a:t>
+              <a:t>redesign</a:t>
             </a:r>
             <a:endParaRPr lang="en-US" sz="2800" dirty="0"/>
           </a:p>
@@ -25974,11 +26310,11 @@
         <p:spPr>
           <a:xfrm>
             <a:off x="365760" y="2240280"/>
-            <a:ext cx="1371600" cy="658368"/>
+            <a:ext cx="1371600" cy="841248"/>
           </a:xfrm>
           <a:prstGeom prst="rect">
             <a:avLst>
-              <a:gd name="adj" fmla="val 8333"/>
+              <a:gd name="adj" fmla="val 6522"/>
             </a:avLst>
           </a:prstGeom>
           <a:solidFill>
@@ -26001,7 +26337,7 @@
         <p:spPr>
           <a:xfrm>
             <a:off x="365760" y="2240280"/>
-            <a:ext cx="1371600" cy="658368"/>
+            <a:ext cx="1371600" cy="841248"/>
           </a:xfrm>
           <a:prstGeom prst="rect">
             <a:avLst/>
@@ -26040,11 +26376,11 @@
         <p:spPr>
           <a:xfrm>
             <a:off x="2938272" y="2258568"/>
-            <a:ext cx="1828800" cy="347472"/>
+            <a:ext cx="1828800" cy="292608"/>
           </a:xfrm>
           <a:prstGeom prst="rect">
             <a:avLst>
-              <a:gd name="adj" fmla="val 21053"/>
+              <a:gd name="adj" fmla="val 25000"/>
             </a:avLst>
           </a:prstGeom>
           <a:solidFill>
@@ -26074,7 +26410,7 @@
         <p:spPr>
           <a:xfrm>
             <a:off x="2938272" y="2258568"/>
-            <a:ext cx="1828800" cy="347472"/>
+            <a:ext cx="1828800" cy="292608"/>
           </a:xfrm>
           <a:prstGeom prst="rect">
             <a:avLst/>
@@ -26112,8 +26448,8 @@
         </p:nvSpPr>
         <p:spPr>
           <a:xfrm>
-            <a:off x="2938272" y="2624328"/>
-            <a:ext cx="1828800" cy="256032"/>
+            <a:off x="2938272" y="2569464"/>
+            <a:ext cx="1828800" cy="201168"/>
           </a:xfrm>
           <a:prstGeom prst="rect">
             <a:avLst/>
@@ -26152,11 +26488,11 @@
         <p:spPr>
           <a:xfrm>
             <a:off x="5803392" y="2258568"/>
-            <a:ext cx="1828800" cy="347472"/>
+            <a:ext cx="1828800" cy="292608"/>
           </a:xfrm>
           <a:prstGeom prst="rect">
             <a:avLst>
-              <a:gd name="adj" fmla="val 21053"/>
+              <a:gd name="adj" fmla="val 25000"/>
             </a:avLst>
           </a:prstGeom>
           <a:solidFill>
@@ -26186,7 +26522,7 @@
         <p:spPr>
           <a:xfrm>
             <a:off x="5803392" y="2258568"/>
-            <a:ext cx="1828800" cy="347472"/>
+            <a:ext cx="1828800" cy="292608"/>
           </a:xfrm>
           <a:prstGeom prst="rect">
             <a:avLst/>
@@ -26210,7 +26546,7 @@
                 <a:ea typeface="Trebuchet MS" pitchFamily="34" charset="-122"/>
                 <a:cs typeface="Trebuchet MS" pitchFamily="34" charset="-120"/>
               </a:rPr>
-              <a:t>write</a:t>
+              <a:t>design</a:t>
             </a:r>
             <a:endParaRPr lang="en-US" sz="1300" dirty="0"/>
           </a:p>
@@ -26224,8 +26560,8 @@
         </p:nvSpPr>
         <p:spPr>
           <a:xfrm>
-            <a:off x="5803392" y="2624328"/>
-            <a:ext cx="1828800" cy="256032"/>
+            <a:off x="5803392" y="2569464"/>
+            <a:ext cx="1828800" cy="201168"/>
           </a:xfrm>
           <a:prstGeom prst="rect">
             <a:avLst/>
@@ -26249,7 +26585,7 @@
                 <a:ea typeface="Calibri" pitchFamily="34" charset="-122"/>
                 <a:cs typeface="Calibri" pitchFamily="34" charset="-120"/>
               </a:rPr>
-              <a:t>to put words on paper</a:t>
+              <a:t>to plan or create the look of something</a:t>
             </a:r>
             <a:endParaRPr lang="en-US" sz="850" dirty="0"/>
           </a:p>
@@ -26263,7 +26599,7 @@
         </p:nvSpPr>
         <p:spPr>
           <a:xfrm>
-            <a:off x="365760" y="3182112"/>
+            <a:off x="365760" y="3273552"/>
             <a:ext cx="1371600" cy="658368"/>
           </a:xfrm>
           <a:prstGeom prst="rect">
@@ -26290,7 +26626,7 @@
         </p:nvSpPr>
         <p:spPr>
           <a:xfrm>
-            <a:off x="365760" y="3182112"/>
+            <a:off x="365760" y="3273552"/>
             <a:ext cx="1371600" cy="658368"/>
           </a:xfrm>
           <a:prstGeom prst="rect">
@@ -26329,7 +26665,7 @@
         </p:nvSpPr>
         <p:spPr>
           <a:xfrm>
-            <a:off x="1874520" y="3182112"/>
+            <a:off x="1874520" y="3273552"/>
             <a:ext cx="6903720" cy="658368"/>
           </a:xfrm>
           <a:prstGeom prst="rect">
@@ -26356,7 +26692,7 @@
         </p:nvSpPr>
         <p:spPr>
           <a:xfrm>
-            <a:off x="2999232" y="3273552"/>
+            <a:off x="2313432" y="3364992"/>
             <a:ext cx="1645920" cy="475488"/>
           </a:xfrm>
           <a:prstGeom prst="rect">
@@ -26383,7 +26719,7 @@
         </p:nvSpPr>
         <p:spPr>
           <a:xfrm>
-            <a:off x="2999232" y="3273552"/>
+            <a:off x="2313432" y="3364992"/>
             <a:ext cx="1645920" cy="475488"/>
           </a:xfrm>
           <a:prstGeom prst="rect">
@@ -26422,8 +26758,8 @@
         </p:nvSpPr>
         <p:spPr>
           <a:xfrm>
-            <a:off x="4645152" y="3273552"/>
-            <a:ext cx="1097280" cy="475488"/>
+            <a:off x="3959352" y="3364992"/>
+            <a:ext cx="411480" cy="475488"/>
           </a:xfrm>
           <a:prstGeom prst="rect">
             <a:avLst/>
@@ -26461,7 +26797,7 @@
         </p:nvSpPr>
         <p:spPr>
           <a:xfrm>
-            <a:off x="5742432" y="3273552"/>
+            <a:off x="4370832" y="3364992"/>
             <a:ext cx="1645920" cy="475488"/>
           </a:xfrm>
           <a:prstGeom prst="rect">
@@ -26488,7 +26824,7 @@
         </p:nvSpPr>
         <p:spPr>
           <a:xfrm>
-            <a:off x="5742432" y="3273552"/>
+            <a:off x="4370832" y="3364992"/>
             <a:ext cx="1645920" cy="475488"/>
           </a:xfrm>
           <a:prstGeom prst="rect">
@@ -26513,7 +26849,7 @@
                 <a:ea typeface="Trebuchet MS" pitchFamily="34" charset="-122"/>
                 <a:cs typeface="Trebuchet MS" pitchFamily="34" charset="-120"/>
               </a:rPr>
-              <a:t>write</a:t>
+              <a:t>de</a:t>
             </a:r>
             <a:endParaRPr lang="en-US" sz="1400" dirty="0"/>
           </a:p>
@@ -26521,13 +26857,118 @@
       </p:sp>
       <p:sp>
         <p:nvSpPr>
-          <p:cNvPr id="30" name="Shape 28"/>
-          <p:cNvSpPr/>
-          <p:nvPr/>
-        </p:nvSpPr>
-        <p:spPr>
-          <a:xfrm>
-            <a:off x="365760" y="4005072"/>
+          <p:cNvPr id="30" name="Text 28"/>
+          <p:cNvSpPr/>
+          <p:nvPr/>
+        </p:nvSpPr>
+        <p:spPr>
+          <a:xfrm>
+            <a:off x="6016752" y="3364992"/>
+            <a:ext cx="411480" cy="475488"/>
+          </a:xfrm>
+          <a:prstGeom prst="rect">
+            <a:avLst/>
+          </a:prstGeom>
+          <a:noFill/>
+          <a:ln/>
+        </p:spPr>
+        <p:txBody>
+          <a:bodyPr wrap="square" lIns="0" tIns="0" rIns="0" bIns="0" rtlCol="0" anchor="ctr"/>
+          <a:lstStyle/>
+          <a:p>
+            <a:pPr algn="ctr" indent="0" marL="0">
+              <a:buNone/>
+            </a:pPr>
+            <a:r>
+              <a:rPr lang="en-US" sz="1600" b="1" dirty="0">
+                <a:solidFill>
+                  <a:srgbClr val="0D9488"/>
+                </a:solidFill>
+                <a:latin typeface="Trebuchet MS" pitchFamily="34" charset="0"/>
+                <a:ea typeface="Trebuchet MS" pitchFamily="34" charset="-122"/>
+                <a:cs typeface="Trebuchet MS" pitchFamily="34" charset="-120"/>
+              </a:rPr>
+              <a:t>·</a:t>
+            </a:r>
+            <a:endParaRPr lang="en-US" sz="1600" dirty="0"/>
+          </a:p>
+        </p:txBody>
+      </p:sp>
+      <p:sp>
+        <p:nvSpPr>
+          <p:cNvPr id="31" name="Shape 29"/>
+          <p:cNvSpPr/>
+          <p:nvPr/>
+        </p:nvSpPr>
+        <p:spPr>
+          <a:xfrm>
+            <a:off x="6428232" y="3364992"/>
+            <a:ext cx="1645920" cy="475488"/>
+          </a:xfrm>
+          <a:prstGeom prst="rect">
+            <a:avLst>
+              <a:gd name="adj" fmla="val 9615"/>
+            </a:avLst>
+          </a:prstGeom>
+          <a:solidFill>
+            <a:srgbClr val="FFFFFF"/>
+          </a:solidFill>
+          <a:ln w="12700">
+            <a:solidFill>
+              <a:srgbClr val="0D9488"/>
+            </a:solidFill>
+            <a:prstDash val="solid"/>
+          </a:ln>
+        </p:spPr>
+      </p:sp>
+      <p:sp>
+        <p:nvSpPr>
+          <p:cNvPr id="32" name="Text 30"/>
+          <p:cNvSpPr/>
+          <p:nvPr/>
+        </p:nvSpPr>
+        <p:spPr>
+          <a:xfrm>
+            <a:off x="6428232" y="3364992"/>
+            <a:ext cx="1645920" cy="475488"/>
+          </a:xfrm>
+          <a:prstGeom prst="rect">
+            <a:avLst/>
+          </a:prstGeom>
+          <a:noFill/>
+          <a:ln/>
+        </p:spPr>
+        <p:txBody>
+          <a:bodyPr wrap="square" lIns="0" tIns="0" rIns="0" bIns="0" rtlCol="0" anchor="ctr"/>
+          <a:lstStyle/>
+          <a:p>
+            <a:pPr algn="ctr" indent="0" marL="0">
+              <a:buNone/>
+            </a:pPr>
+            <a:r>
+              <a:rPr lang="en-US" sz="1400" b="1" dirty="0">
+                <a:solidFill>
+                  <a:srgbClr val="0D9488"/>
+                </a:solidFill>
+                <a:latin typeface="Trebuchet MS" pitchFamily="34" charset="0"/>
+                <a:ea typeface="Trebuchet MS" pitchFamily="34" charset="-122"/>
+                <a:cs typeface="Trebuchet MS" pitchFamily="34" charset="-120"/>
+              </a:rPr>
+              <a:t>sign</a:t>
+            </a:r>
+            <a:endParaRPr lang="en-US" sz="1400" dirty="0"/>
+          </a:p>
+        </p:txBody>
+      </p:sp>
+      <p:sp>
+        <p:nvSpPr>
+          <p:cNvPr id="33" name="Shape 31"/>
+          <p:cNvSpPr/>
+          <p:nvPr/>
+        </p:nvSpPr>
+        <p:spPr>
+          <a:xfrm>
+            <a:off x="365760" y="4096512"/>
             <a:ext cx="1371600" cy="658368"/>
           </a:xfrm>
           <a:prstGeom prst="rect">
@@ -26548,13 +26989,13 @@
       </p:sp>
       <p:sp>
         <p:nvSpPr>
-          <p:cNvPr id="31" name="Text 29"/>
-          <p:cNvSpPr/>
-          <p:nvPr/>
-        </p:nvSpPr>
-        <p:spPr>
-          <a:xfrm>
-            <a:off x="365760" y="4005072"/>
+          <p:cNvPr id="34" name="Text 32"/>
+          <p:cNvSpPr/>
+          <p:nvPr/>
+        </p:nvSpPr>
+        <p:spPr>
+          <a:xfrm>
+            <a:off x="365760" y="4096512"/>
             <a:ext cx="1371600" cy="658368"/>
           </a:xfrm>
           <a:prstGeom prst="rect">
@@ -26587,13 +27028,13 @@
       </p:sp>
       <p:sp>
         <p:nvSpPr>
-          <p:cNvPr id="32" name="Shape 30"/>
-          <p:cNvSpPr/>
-          <p:nvPr/>
-        </p:nvSpPr>
-        <p:spPr>
-          <a:xfrm>
-            <a:off x="1874520" y="4005072"/>
+          <p:cNvPr id="35" name="Shape 33"/>
+          <p:cNvSpPr/>
+          <p:nvPr/>
+        </p:nvSpPr>
+        <p:spPr>
+          <a:xfrm>
+            <a:off x="1874520" y="4096512"/>
             <a:ext cx="6903720" cy="658368"/>
           </a:xfrm>
           <a:prstGeom prst="rect">
@@ -26614,13 +27055,13 @@
       </p:sp>
       <p:sp>
         <p:nvSpPr>
-          <p:cNvPr id="33" name="Text 31"/>
-          <p:cNvSpPr/>
-          <p:nvPr/>
-        </p:nvSpPr>
-        <p:spPr>
-          <a:xfrm>
-            <a:off x="1874520" y="4005072"/>
+          <p:cNvPr id="36" name="Text 34"/>
+          <p:cNvSpPr/>
+          <p:nvPr/>
+        </p:nvSpPr>
+        <p:spPr>
+          <a:xfrm>
+            <a:off x="1874520" y="4096512"/>
             <a:ext cx="6903720" cy="658368"/>
           </a:xfrm>
           <a:prstGeom prst="rect">
@@ -27076,7 +27517,7 @@
                 <a:ea typeface="Trebuchet MS" pitchFamily="34" charset="-122"/>
                 <a:cs typeface="Trebuchet MS" pitchFamily="34" charset="-120"/>
               </a:rPr>
-              <a:t>rewrite</a:t>
+              <a:t>redesign</a:t>
             </a:r>
             <a:endParaRPr lang="en-US" sz="2800" dirty="0"/>
           </a:p>
@@ -27091,11 +27532,11 @@
         <p:spPr>
           <a:xfrm>
             <a:off x="365760" y="2240280"/>
-            <a:ext cx="1371600" cy="658368"/>
+            <a:ext cx="1371600" cy="841248"/>
           </a:xfrm>
           <a:prstGeom prst="rect">
             <a:avLst>
-              <a:gd name="adj" fmla="val 8333"/>
+              <a:gd name="adj" fmla="val 6522"/>
             </a:avLst>
           </a:prstGeom>
           <a:solidFill>
@@ -27118,7 +27559,7 @@
         <p:spPr>
           <a:xfrm>
             <a:off x="365760" y="2240280"/>
-            <a:ext cx="1371600" cy="658368"/>
+            <a:ext cx="1371600" cy="841248"/>
           </a:xfrm>
           <a:prstGeom prst="rect">
             <a:avLst/>
@@ -27157,11 +27598,11 @@
         <p:spPr>
           <a:xfrm>
             <a:off x="2938272" y="2258568"/>
-            <a:ext cx="1828800" cy="347472"/>
+            <a:ext cx="1828800" cy="292608"/>
           </a:xfrm>
           <a:prstGeom prst="rect">
             <a:avLst>
-              <a:gd name="adj" fmla="val 21053"/>
+              <a:gd name="adj" fmla="val 25000"/>
             </a:avLst>
           </a:prstGeom>
           <a:solidFill>
@@ -27191,7 +27632,7 @@
         <p:spPr>
           <a:xfrm>
             <a:off x="2938272" y="2258568"/>
-            <a:ext cx="1828800" cy="347472"/>
+            <a:ext cx="1828800" cy="292608"/>
           </a:xfrm>
           <a:prstGeom prst="rect">
             <a:avLst/>
@@ -27229,8 +27670,8 @@
         </p:nvSpPr>
         <p:spPr>
           <a:xfrm>
-            <a:off x="2938272" y="2624328"/>
-            <a:ext cx="1828800" cy="256032"/>
+            <a:off x="2938272" y="2569464"/>
+            <a:ext cx="1828800" cy="201168"/>
           </a:xfrm>
           <a:prstGeom prst="rect">
             <a:avLst/>
@@ -27269,11 +27710,11 @@
         <p:spPr>
           <a:xfrm>
             <a:off x="5803392" y="2258568"/>
-            <a:ext cx="1828800" cy="347472"/>
+            <a:ext cx="1828800" cy="292608"/>
           </a:xfrm>
           <a:prstGeom prst="rect">
             <a:avLst>
-              <a:gd name="adj" fmla="val 21053"/>
+              <a:gd name="adj" fmla="val 25000"/>
             </a:avLst>
           </a:prstGeom>
           <a:solidFill>
@@ -27303,7 +27744,7 @@
         <p:spPr>
           <a:xfrm>
             <a:off x="5803392" y="2258568"/>
-            <a:ext cx="1828800" cy="347472"/>
+            <a:ext cx="1828800" cy="292608"/>
           </a:xfrm>
           <a:prstGeom prst="rect">
             <a:avLst/>
@@ -27327,7 +27768,7 @@
                 <a:ea typeface="Trebuchet MS" pitchFamily="34" charset="-122"/>
                 <a:cs typeface="Trebuchet MS" pitchFamily="34" charset="-120"/>
               </a:rPr>
-              <a:t>write</a:t>
+              <a:t>design</a:t>
             </a:r>
             <a:endParaRPr lang="en-US" sz="1300" dirty="0"/>
           </a:p>
@@ -27341,8 +27782,8 @@
         </p:nvSpPr>
         <p:spPr>
           <a:xfrm>
-            <a:off x="5803392" y="2624328"/>
-            <a:ext cx="1828800" cy="256032"/>
+            <a:off x="5803392" y="2569464"/>
+            <a:ext cx="1828800" cy="201168"/>
           </a:xfrm>
           <a:prstGeom prst="rect">
             <a:avLst/>
@@ -27366,7 +27807,7 @@
                 <a:ea typeface="Calibri" pitchFamily="34" charset="-122"/>
                 <a:cs typeface="Calibri" pitchFamily="34" charset="-120"/>
               </a:rPr>
-              <a:t>to put words on paper</a:t>
+              <a:t>to plan or create the look of something</a:t>
             </a:r>
             <a:endParaRPr lang="en-US" sz="850" dirty="0"/>
           </a:p>
@@ -27380,7 +27821,7 @@
         </p:nvSpPr>
         <p:spPr>
           <a:xfrm>
-            <a:off x="365760" y="3182112"/>
+            <a:off x="365760" y="3273552"/>
             <a:ext cx="1371600" cy="658368"/>
           </a:xfrm>
           <a:prstGeom prst="rect">
@@ -27407,7 +27848,7 @@
         </p:nvSpPr>
         <p:spPr>
           <a:xfrm>
-            <a:off x="365760" y="3182112"/>
+            <a:off x="365760" y="3273552"/>
             <a:ext cx="1371600" cy="658368"/>
           </a:xfrm>
           <a:prstGeom prst="rect">
@@ -27446,7 +27887,7 @@
         </p:nvSpPr>
         <p:spPr>
           <a:xfrm>
-            <a:off x="1874520" y="3182112"/>
+            <a:off x="1874520" y="3273552"/>
             <a:ext cx="6903720" cy="658368"/>
           </a:xfrm>
           <a:prstGeom prst="rect">
@@ -27473,7 +27914,7 @@
         </p:nvSpPr>
         <p:spPr>
           <a:xfrm>
-            <a:off x="2999232" y="3273552"/>
+            <a:off x="2313432" y="3364992"/>
             <a:ext cx="1645920" cy="475488"/>
           </a:xfrm>
           <a:prstGeom prst="rect">
@@ -27500,7 +27941,7 @@
         </p:nvSpPr>
         <p:spPr>
           <a:xfrm>
-            <a:off x="2999232" y="3273552"/>
+            <a:off x="2313432" y="3364992"/>
             <a:ext cx="1645920" cy="475488"/>
           </a:xfrm>
           <a:prstGeom prst="rect">
@@ -27539,8 +27980,8 @@
         </p:nvSpPr>
         <p:spPr>
           <a:xfrm>
-            <a:off x="4645152" y="3273552"/>
-            <a:ext cx="1097280" cy="475488"/>
+            <a:off x="3959352" y="3364992"/>
+            <a:ext cx="411480" cy="475488"/>
           </a:xfrm>
           <a:prstGeom prst="rect">
             <a:avLst/>
@@ -27578,7 +28019,7 @@
         </p:nvSpPr>
         <p:spPr>
           <a:xfrm>
-            <a:off x="5742432" y="3273552"/>
+            <a:off x="4370832" y="3364992"/>
             <a:ext cx="1645920" cy="475488"/>
           </a:xfrm>
           <a:prstGeom prst="rect">
@@ -27605,7 +28046,7 @@
         </p:nvSpPr>
         <p:spPr>
           <a:xfrm>
-            <a:off x="5742432" y="3273552"/>
+            <a:off x="4370832" y="3364992"/>
             <a:ext cx="1645920" cy="475488"/>
           </a:xfrm>
           <a:prstGeom prst="rect">
@@ -27630,7 +28071,7 @@
                 <a:ea typeface="Trebuchet MS" pitchFamily="34" charset="-122"/>
                 <a:cs typeface="Trebuchet MS" pitchFamily="34" charset="-120"/>
               </a:rPr>
-              <a:t>write</a:t>
+              <a:t>de</a:t>
             </a:r>
             <a:endParaRPr lang="en-US" sz="1400" dirty="0"/>
           </a:p>
@@ -27638,13 +28079,118 @@
       </p:sp>
       <p:sp>
         <p:nvSpPr>
-          <p:cNvPr id="30" name="Shape 28"/>
-          <p:cNvSpPr/>
-          <p:nvPr/>
-        </p:nvSpPr>
-        <p:spPr>
-          <a:xfrm>
-            <a:off x="365760" y="4005072"/>
+          <p:cNvPr id="30" name="Text 28"/>
+          <p:cNvSpPr/>
+          <p:nvPr/>
+        </p:nvSpPr>
+        <p:spPr>
+          <a:xfrm>
+            <a:off x="6016752" y="3364992"/>
+            <a:ext cx="411480" cy="475488"/>
+          </a:xfrm>
+          <a:prstGeom prst="rect">
+            <a:avLst/>
+          </a:prstGeom>
+          <a:noFill/>
+          <a:ln/>
+        </p:spPr>
+        <p:txBody>
+          <a:bodyPr wrap="square" lIns="0" tIns="0" rIns="0" bIns="0" rtlCol="0" anchor="ctr"/>
+          <a:lstStyle/>
+          <a:p>
+            <a:pPr algn="ctr" indent="0" marL="0">
+              <a:buNone/>
+            </a:pPr>
+            <a:r>
+              <a:rPr lang="en-US" sz="1600" b="1" dirty="0">
+                <a:solidFill>
+                  <a:srgbClr val="0D9488"/>
+                </a:solidFill>
+                <a:latin typeface="Trebuchet MS" pitchFamily="34" charset="0"/>
+                <a:ea typeface="Trebuchet MS" pitchFamily="34" charset="-122"/>
+                <a:cs typeface="Trebuchet MS" pitchFamily="34" charset="-120"/>
+              </a:rPr>
+              <a:t>·</a:t>
+            </a:r>
+            <a:endParaRPr lang="en-US" sz="1600" dirty="0"/>
+          </a:p>
+        </p:txBody>
+      </p:sp>
+      <p:sp>
+        <p:nvSpPr>
+          <p:cNvPr id="31" name="Shape 29"/>
+          <p:cNvSpPr/>
+          <p:nvPr/>
+        </p:nvSpPr>
+        <p:spPr>
+          <a:xfrm>
+            <a:off x="6428232" y="3364992"/>
+            <a:ext cx="1645920" cy="475488"/>
+          </a:xfrm>
+          <a:prstGeom prst="rect">
+            <a:avLst>
+              <a:gd name="adj" fmla="val 9615"/>
+            </a:avLst>
+          </a:prstGeom>
+          <a:solidFill>
+            <a:srgbClr val="FFFFFF"/>
+          </a:solidFill>
+          <a:ln w="12700">
+            <a:solidFill>
+              <a:srgbClr val="0D9488"/>
+            </a:solidFill>
+            <a:prstDash val="solid"/>
+          </a:ln>
+        </p:spPr>
+      </p:sp>
+      <p:sp>
+        <p:nvSpPr>
+          <p:cNvPr id="32" name="Text 30"/>
+          <p:cNvSpPr/>
+          <p:nvPr/>
+        </p:nvSpPr>
+        <p:spPr>
+          <a:xfrm>
+            <a:off x="6428232" y="3364992"/>
+            <a:ext cx="1645920" cy="475488"/>
+          </a:xfrm>
+          <a:prstGeom prst="rect">
+            <a:avLst/>
+          </a:prstGeom>
+          <a:noFill/>
+          <a:ln/>
+        </p:spPr>
+        <p:txBody>
+          <a:bodyPr wrap="square" lIns="0" tIns="0" rIns="0" bIns="0" rtlCol="0" anchor="ctr"/>
+          <a:lstStyle/>
+          <a:p>
+            <a:pPr algn="ctr" indent="0" marL="0">
+              <a:buNone/>
+            </a:pPr>
+            <a:r>
+              <a:rPr lang="en-US" sz="1400" b="1" dirty="0">
+                <a:solidFill>
+                  <a:srgbClr val="0D9488"/>
+                </a:solidFill>
+                <a:latin typeface="Trebuchet MS" pitchFamily="34" charset="0"/>
+                <a:ea typeface="Trebuchet MS" pitchFamily="34" charset="-122"/>
+                <a:cs typeface="Trebuchet MS" pitchFamily="34" charset="-120"/>
+              </a:rPr>
+              <a:t>sign</a:t>
+            </a:r>
+            <a:endParaRPr lang="en-US" sz="1400" dirty="0"/>
+          </a:p>
+        </p:txBody>
+      </p:sp>
+      <p:sp>
+        <p:nvSpPr>
+          <p:cNvPr id="33" name="Shape 31"/>
+          <p:cNvSpPr/>
+          <p:nvPr/>
+        </p:nvSpPr>
+        <p:spPr>
+          <a:xfrm>
+            <a:off x="365760" y="4096512"/>
             <a:ext cx="1371600" cy="658368"/>
           </a:xfrm>
           <a:prstGeom prst="rect">
@@ -27665,13 +28211,13 @@
       </p:sp>
       <p:sp>
         <p:nvSpPr>
-          <p:cNvPr id="31" name="Text 29"/>
-          <p:cNvSpPr/>
-          <p:nvPr/>
-        </p:nvSpPr>
-        <p:spPr>
-          <a:xfrm>
-            <a:off x="365760" y="4005072"/>
+          <p:cNvPr id="34" name="Text 32"/>
+          <p:cNvSpPr/>
+          <p:nvPr/>
+        </p:nvSpPr>
+        <p:spPr>
+          <a:xfrm>
+            <a:off x="365760" y="4096512"/>
             <a:ext cx="1371600" cy="658368"/>
           </a:xfrm>
           <a:prstGeom prst="rect">
@@ -27704,13 +28250,13 @@
       </p:sp>
       <p:sp>
         <p:nvSpPr>
-          <p:cNvPr id="32" name="Shape 30"/>
-          <p:cNvSpPr/>
-          <p:nvPr/>
-        </p:nvSpPr>
-        <p:spPr>
-          <a:xfrm>
-            <a:off x="1874520" y="4005072"/>
+          <p:cNvPr id="35" name="Shape 33"/>
+          <p:cNvSpPr/>
+          <p:nvPr/>
+        </p:nvSpPr>
+        <p:spPr>
+          <a:xfrm>
+            <a:off x="1874520" y="4096512"/>
             <a:ext cx="6903720" cy="658368"/>
           </a:xfrm>
           <a:prstGeom prst="rect">
@@ -27731,13 +28277,13 @@
       </p:sp>
       <p:sp>
         <p:nvSpPr>
-          <p:cNvPr id="33" name="Shape 31"/>
-          <p:cNvSpPr/>
-          <p:nvPr/>
-        </p:nvSpPr>
-        <p:spPr>
-          <a:xfrm>
-            <a:off x="2427732" y="4096512"/>
+          <p:cNvPr id="36" name="Shape 34"/>
+          <p:cNvSpPr/>
+          <p:nvPr/>
+        </p:nvSpPr>
+        <p:spPr>
+          <a:xfrm>
+            <a:off x="2124837" y="4187952"/>
             <a:ext cx="685800" cy="475488"/>
           </a:xfrm>
           <a:prstGeom prst="rect">
@@ -27758,13 +28304,13 @@
       </p:sp>
       <p:sp>
         <p:nvSpPr>
-          <p:cNvPr id="34" name="Text 32"/>
-          <p:cNvSpPr/>
-          <p:nvPr/>
-        </p:nvSpPr>
-        <p:spPr>
-          <a:xfrm>
-            <a:off x="2427732" y="4096512"/>
+          <p:cNvPr id="37" name="Text 35"/>
+          <p:cNvSpPr/>
+          <p:nvPr/>
+        </p:nvSpPr>
+        <p:spPr>
+          <a:xfrm>
+            <a:off x="2124837" y="4187952"/>
             <a:ext cx="685800" cy="475488"/>
           </a:xfrm>
           <a:prstGeom prst="rect">
@@ -27797,13 +28343,13 @@
       </p:sp>
       <p:sp>
         <p:nvSpPr>
-          <p:cNvPr id="35" name="Shape 33"/>
-          <p:cNvSpPr/>
-          <p:nvPr/>
-        </p:nvSpPr>
-        <p:spPr>
-          <a:xfrm>
-            <a:off x="3639312" y="4096512"/>
+          <p:cNvPr id="38" name="Shape 36"/>
+          <p:cNvSpPr/>
+          <p:nvPr/>
+        </p:nvSpPr>
+        <p:spPr>
+          <a:xfrm>
+            <a:off x="3033522" y="4187952"/>
             <a:ext cx="685800" cy="475488"/>
           </a:xfrm>
           <a:prstGeom prst="rect">
@@ -27824,13 +28370,13 @@
       </p:sp>
       <p:sp>
         <p:nvSpPr>
-          <p:cNvPr id="36" name="Text 34"/>
-          <p:cNvSpPr/>
-          <p:nvPr/>
-        </p:nvSpPr>
-        <p:spPr>
-          <a:xfrm>
-            <a:off x="3639312" y="4096512"/>
+          <p:cNvPr id="39" name="Text 37"/>
+          <p:cNvSpPr/>
+          <p:nvPr/>
+        </p:nvSpPr>
+        <p:spPr>
+          <a:xfrm>
+            <a:off x="3033522" y="4187952"/>
             <a:ext cx="685800" cy="475488"/>
           </a:xfrm>
           <a:prstGeom prst="rect">
@@ -27863,13 +28409,13 @@
       </p:sp>
       <p:sp>
         <p:nvSpPr>
-          <p:cNvPr id="37" name="Shape 35"/>
-          <p:cNvSpPr/>
-          <p:nvPr/>
-        </p:nvSpPr>
-        <p:spPr>
-          <a:xfrm>
-            <a:off x="4850892" y="4096512"/>
+          <p:cNvPr id="40" name="Shape 38"/>
+          <p:cNvSpPr/>
+          <p:nvPr/>
+        </p:nvSpPr>
+        <p:spPr>
+          <a:xfrm>
+            <a:off x="3942207" y="4187952"/>
             <a:ext cx="685800" cy="475488"/>
           </a:xfrm>
           <a:prstGeom prst="rect">
@@ -27890,13 +28436,13 @@
       </p:sp>
       <p:sp>
         <p:nvSpPr>
-          <p:cNvPr id="38" name="Text 36"/>
-          <p:cNvSpPr/>
-          <p:nvPr/>
-        </p:nvSpPr>
-        <p:spPr>
-          <a:xfrm>
-            <a:off x="4850892" y="4096512"/>
+          <p:cNvPr id="41" name="Text 39"/>
+          <p:cNvSpPr/>
+          <p:nvPr/>
+        </p:nvSpPr>
+        <p:spPr>
+          <a:xfrm>
+            <a:off x="3942207" y="4187952"/>
             <a:ext cx="685800" cy="475488"/>
           </a:xfrm>
           <a:prstGeom prst="rect">
@@ -27921,7 +28467,7 @@
                 <a:ea typeface="Trebuchet MS" pitchFamily="34" charset="-122"/>
                 <a:cs typeface="Trebuchet MS" pitchFamily="34" charset="-120"/>
               </a:rPr>
-              <a:t>r</a:t>
+              <a:t>d</a:t>
             </a:r>
             <a:endParaRPr lang="en-US" sz="900" dirty="0"/>
           </a:p>
@@ -27929,13 +28475,13 @@
       </p:sp>
       <p:sp>
         <p:nvSpPr>
-          <p:cNvPr id="39" name="Shape 37"/>
-          <p:cNvSpPr/>
-          <p:nvPr/>
-        </p:nvSpPr>
-        <p:spPr>
-          <a:xfrm>
-            <a:off x="6062472" y="4096512"/>
+          <p:cNvPr id="42" name="Shape 40"/>
+          <p:cNvSpPr/>
+          <p:nvPr/>
+        </p:nvSpPr>
+        <p:spPr>
+          <a:xfrm>
+            <a:off x="4850892" y="4187952"/>
             <a:ext cx="685800" cy="475488"/>
           </a:xfrm>
           <a:prstGeom prst="rect">
@@ -27956,13 +28502,13 @@
       </p:sp>
       <p:sp>
         <p:nvSpPr>
-          <p:cNvPr id="40" name="Text 38"/>
-          <p:cNvSpPr/>
-          <p:nvPr/>
-        </p:nvSpPr>
-        <p:spPr>
-          <a:xfrm>
-            <a:off x="6062472" y="4096512"/>
+          <p:cNvPr id="43" name="Text 41"/>
+          <p:cNvSpPr/>
+          <p:nvPr/>
+        </p:nvSpPr>
+        <p:spPr>
+          <a:xfrm>
+            <a:off x="4850892" y="4187952"/>
             <a:ext cx="685800" cy="475488"/>
           </a:xfrm>
           <a:prstGeom prst="rect">
@@ -27987,7 +28533,7 @@
                 <a:ea typeface="Trebuchet MS" pitchFamily="34" charset="-122"/>
                 <a:cs typeface="Trebuchet MS" pitchFamily="34" charset="-120"/>
               </a:rPr>
-              <a:t>ie</a:t>
+              <a:t>e</a:t>
             </a:r>
             <a:endParaRPr lang="en-US" sz="900" dirty="0"/>
           </a:p>
@@ -27995,13 +28541,13 @@
       </p:sp>
       <p:sp>
         <p:nvSpPr>
-          <p:cNvPr id="41" name="Shape 39"/>
-          <p:cNvSpPr/>
-          <p:nvPr/>
-        </p:nvSpPr>
-        <p:spPr>
-          <a:xfrm>
-            <a:off x="7274052" y="4096512"/>
+          <p:cNvPr id="44" name="Shape 42"/>
+          <p:cNvSpPr/>
+          <p:nvPr/>
+        </p:nvSpPr>
+        <p:spPr>
+          <a:xfrm>
+            <a:off x="5759577" y="4187952"/>
             <a:ext cx="685800" cy="475488"/>
           </a:xfrm>
           <a:prstGeom prst="rect">
@@ -28022,13 +28568,13 @@
       </p:sp>
       <p:sp>
         <p:nvSpPr>
-          <p:cNvPr id="42" name="Text 40"/>
-          <p:cNvSpPr/>
-          <p:nvPr/>
-        </p:nvSpPr>
-        <p:spPr>
-          <a:xfrm>
-            <a:off x="7274052" y="4096512"/>
+          <p:cNvPr id="45" name="Text 43"/>
+          <p:cNvSpPr/>
+          <p:nvPr/>
+        </p:nvSpPr>
+        <p:spPr>
+          <a:xfrm>
+            <a:off x="5759577" y="4187952"/>
             <a:ext cx="685800" cy="475488"/>
           </a:xfrm>
           <a:prstGeom prst="rect">
@@ -28053,7 +28599,139 @@
                 <a:ea typeface="Trebuchet MS" pitchFamily="34" charset="-122"/>
                 <a:cs typeface="Trebuchet MS" pitchFamily="34" charset="-120"/>
               </a:rPr>
-              <a:t>t</a:t>
+              <a:t>s</a:t>
+            </a:r>
+            <a:endParaRPr lang="en-US" sz="900" dirty="0"/>
+          </a:p>
+        </p:txBody>
+      </p:sp>
+      <p:sp>
+        <p:nvSpPr>
+          <p:cNvPr id="46" name="Shape 44"/>
+          <p:cNvSpPr/>
+          <p:nvPr/>
+        </p:nvSpPr>
+        <p:spPr>
+          <a:xfrm>
+            <a:off x="6668262" y="4187952"/>
+            <a:ext cx="685800" cy="475488"/>
+          </a:xfrm>
+          <a:prstGeom prst="rect">
+            <a:avLst>
+              <a:gd name="adj" fmla="val 7692"/>
+            </a:avLst>
+          </a:prstGeom>
+          <a:solidFill>
+            <a:srgbClr val="FFFFFF"/>
+          </a:solidFill>
+          <a:ln w="12700">
+            <a:solidFill>
+              <a:srgbClr val="DB2777"/>
+            </a:solidFill>
+            <a:prstDash val="solid"/>
+          </a:ln>
+        </p:spPr>
+      </p:sp>
+      <p:sp>
+        <p:nvSpPr>
+          <p:cNvPr id="47" name="Text 45"/>
+          <p:cNvSpPr/>
+          <p:nvPr/>
+        </p:nvSpPr>
+        <p:spPr>
+          <a:xfrm>
+            <a:off x="6668262" y="4187952"/>
+            <a:ext cx="685800" cy="475488"/>
+          </a:xfrm>
+          <a:prstGeom prst="rect">
+            <a:avLst/>
+          </a:prstGeom>
+          <a:noFill/>
+          <a:ln/>
+        </p:spPr>
+        <p:txBody>
+          <a:bodyPr wrap="square" lIns="0" tIns="0" rIns="0" bIns="0" rtlCol="0" anchor="ctr"/>
+          <a:lstStyle/>
+          <a:p>
+            <a:pPr algn="ctr" indent="0" marL="0">
+              <a:buNone/>
+            </a:pPr>
+            <a:r>
+              <a:rPr lang="en-US" sz="900" b="1" dirty="0">
+                <a:solidFill>
+                  <a:srgbClr val="9D174D"/>
+                </a:solidFill>
+                <a:latin typeface="Trebuchet MS" pitchFamily="34" charset="0"/>
+                <a:ea typeface="Trebuchet MS" pitchFamily="34" charset="-122"/>
+                <a:cs typeface="Trebuchet MS" pitchFamily="34" charset="-120"/>
+              </a:rPr>
+              <a:t>igh</a:t>
+            </a:r>
+            <a:endParaRPr lang="en-US" sz="900" dirty="0"/>
+          </a:p>
+        </p:txBody>
+      </p:sp>
+      <p:sp>
+        <p:nvSpPr>
+          <p:cNvPr id="48" name="Shape 46"/>
+          <p:cNvSpPr/>
+          <p:nvPr/>
+        </p:nvSpPr>
+        <p:spPr>
+          <a:xfrm>
+            <a:off x="7576947" y="4187952"/>
+            <a:ext cx="685800" cy="475488"/>
+          </a:xfrm>
+          <a:prstGeom prst="rect">
+            <a:avLst>
+              <a:gd name="adj" fmla="val 7692"/>
+            </a:avLst>
+          </a:prstGeom>
+          <a:solidFill>
+            <a:srgbClr val="FFFFFF"/>
+          </a:solidFill>
+          <a:ln w="12700">
+            <a:solidFill>
+              <a:srgbClr val="DB2777"/>
+            </a:solidFill>
+            <a:prstDash val="solid"/>
+          </a:ln>
+        </p:spPr>
+      </p:sp>
+      <p:sp>
+        <p:nvSpPr>
+          <p:cNvPr id="49" name="Text 47"/>
+          <p:cNvSpPr/>
+          <p:nvPr/>
+        </p:nvSpPr>
+        <p:spPr>
+          <a:xfrm>
+            <a:off x="7576947" y="4187952"/>
+            <a:ext cx="685800" cy="475488"/>
+          </a:xfrm>
+          <a:prstGeom prst="rect">
+            <a:avLst/>
+          </a:prstGeom>
+          <a:noFill/>
+          <a:ln/>
+        </p:spPr>
+        <p:txBody>
+          <a:bodyPr wrap="square" lIns="0" tIns="0" rIns="0" bIns="0" rtlCol="0" anchor="ctr"/>
+          <a:lstStyle/>
+          <a:p>
+            <a:pPr algn="ctr" indent="0" marL="0">
+              <a:buNone/>
+            </a:pPr>
+            <a:r>
+              <a:rPr lang="en-US" sz="900" b="1" dirty="0">
+                <a:solidFill>
+                  <a:srgbClr val="9D174D"/>
+                </a:solidFill>
+                <a:latin typeface="Trebuchet MS" pitchFamily="34" charset="0"/>
+                <a:ea typeface="Trebuchet MS" pitchFamily="34" charset="-122"/>
+                <a:cs typeface="Trebuchet MS" pitchFamily="34" charset="-120"/>
+              </a:rPr>
+              <a:t>n</a:t>
             </a:r>
             <a:endParaRPr lang="en-US" sz="900" dirty="0"/>
           </a:p>
@@ -28484,7 +29162,7 @@
                 <a:ea typeface="Trebuchet MS" pitchFamily="34" charset="-122"/>
                 <a:cs typeface="Trebuchet MS" pitchFamily="34" charset="-120"/>
               </a:rPr>
-              <a:t>rebuild</a:t>
+              <a:t>reprint</a:t>
             </a:r>
             <a:endParaRPr lang="en-US" sz="2800" dirty="0"/>
           </a:p>
@@ -28499,6 +29177,138 @@
         <p:spPr>
           <a:xfrm>
             <a:off x="365760" y="2240280"/>
+            <a:ext cx="1371600" cy="841248"/>
+          </a:xfrm>
+          <a:prstGeom prst="rect">
+            <a:avLst>
+              <a:gd name="adj" fmla="val 6522"/>
+            </a:avLst>
+          </a:prstGeom>
+          <a:solidFill>
+            <a:srgbClr val="E2E8F0"/>
+          </a:solidFill>
+          <a:ln w="12700">
+            <a:solidFill>
+              <a:srgbClr val="E2E8F0"/>
+            </a:solidFill>
+            <a:prstDash val="solid"/>
+          </a:ln>
+        </p:spPr>
+      </p:sp>
+      <p:sp>
+        <p:nvSpPr>
+          <p:cNvPr id="15" name="Text 13"/>
+          <p:cNvSpPr/>
+          <p:nvPr/>
+        </p:nvSpPr>
+        <p:spPr>
+          <a:xfrm>
+            <a:off x="365760" y="2240280"/>
+            <a:ext cx="1371600" cy="841248"/>
+          </a:xfrm>
+          <a:prstGeom prst="rect">
+            <a:avLst/>
+          </a:prstGeom>
+          <a:noFill/>
+          <a:ln/>
+        </p:spPr>
+        <p:txBody>
+          <a:bodyPr wrap="square" lIns="0" tIns="0" rIns="0" bIns="0" rtlCol="0" anchor="ctr"/>
+          <a:lstStyle/>
+          <a:p>
+            <a:pPr algn="ctr" indent="0" marL="0">
+              <a:buNone/>
+            </a:pPr>
+            <a:r>
+              <a:rPr lang="en-US" sz="1100" b="1" dirty="0">
+                <a:solidFill>
+                  <a:srgbClr val="475569"/>
+                </a:solidFill>
+                <a:latin typeface="Trebuchet MS" pitchFamily="34" charset="0"/>
+                <a:ea typeface="Trebuchet MS" pitchFamily="34" charset="-122"/>
+                <a:cs typeface="Trebuchet MS" pitchFamily="34" charset="-120"/>
+              </a:rPr>
+              <a:t>Morphemes</a:t>
+            </a:r>
+            <a:endParaRPr lang="en-US" sz="1100" dirty="0"/>
+          </a:p>
+        </p:txBody>
+      </p:sp>
+      <p:sp>
+        <p:nvSpPr>
+          <p:cNvPr id="16" name="Shape 14"/>
+          <p:cNvSpPr/>
+          <p:nvPr/>
+        </p:nvSpPr>
+        <p:spPr>
+          <a:xfrm>
+            <a:off x="1874520" y="2240280"/>
+            <a:ext cx="6903720" cy="841248"/>
+          </a:xfrm>
+          <a:prstGeom prst="rect">
+            <a:avLst>
+              <a:gd name="adj" fmla="val 6522"/>
+            </a:avLst>
+          </a:prstGeom>
+          <a:solidFill>
+            <a:srgbClr val="F8FAFC"/>
+          </a:solidFill>
+          <a:ln w="12700">
+            <a:solidFill>
+              <a:srgbClr val="E2E8F0"/>
+            </a:solidFill>
+            <a:prstDash val="dash"/>
+          </a:ln>
+        </p:spPr>
+      </p:sp>
+      <p:sp>
+        <p:nvSpPr>
+          <p:cNvPr id="17" name="Text 15"/>
+          <p:cNvSpPr/>
+          <p:nvPr/>
+        </p:nvSpPr>
+        <p:spPr>
+          <a:xfrm>
+            <a:off x="1874520" y="2240280"/>
+            <a:ext cx="6903720" cy="841248"/>
+          </a:xfrm>
+          <a:prstGeom prst="rect">
+            <a:avLst/>
+          </a:prstGeom>
+          <a:noFill/>
+          <a:ln/>
+        </p:spPr>
+        <p:txBody>
+          <a:bodyPr wrap="square" rtlCol="0" anchor="ctr"/>
+          <a:lstStyle/>
+          <a:p>
+            <a:pPr algn="ctr" indent="0" marL="0">
+              <a:buNone/>
+            </a:pPr>
+            <a:r>
+              <a:rPr lang="en-US" sz="1100" i="1" dirty="0">
+                <a:solidFill>
+                  <a:srgbClr val="CBD5E1"/>
+                </a:solidFill>
+                <a:latin typeface="Calibri" pitchFamily="34" charset="0"/>
+                <a:ea typeface="Calibri" pitchFamily="34" charset="-122"/>
+                <a:cs typeface="Calibri" pitchFamily="34" charset="-120"/>
+              </a:rPr>
+              <a:t>Write here...</a:t>
+            </a:r>
+            <a:endParaRPr lang="en-US" sz="1100" dirty="0"/>
+          </a:p>
+        </p:txBody>
+      </p:sp>
+      <p:sp>
+        <p:nvSpPr>
+          <p:cNvPr id="18" name="Shape 16"/>
+          <p:cNvSpPr/>
+          <p:nvPr/>
+        </p:nvSpPr>
+        <p:spPr>
+          <a:xfrm>
+            <a:off x="365760" y="3273552"/>
             <a:ext cx="1371600" cy="658368"/>
           </a:xfrm>
           <a:prstGeom prst="rect">
@@ -28519,13 +29329,13 @@
       </p:sp>
       <p:sp>
         <p:nvSpPr>
-          <p:cNvPr id="15" name="Text 13"/>
-          <p:cNvSpPr/>
-          <p:nvPr/>
-        </p:nvSpPr>
-        <p:spPr>
-          <a:xfrm>
-            <a:off x="365760" y="2240280"/>
+          <p:cNvPr id="19" name="Text 17"/>
+          <p:cNvSpPr/>
+          <p:nvPr/>
+        </p:nvSpPr>
+        <p:spPr>
+          <a:xfrm>
+            <a:off x="365760" y="3273552"/>
             <a:ext cx="1371600" cy="658368"/>
           </a:xfrm>
           <a:prstGeom prst="rect">
@@ -28550,7 +29360,7 @@
                 <a:ea typeface="Trebuchet MS" pitchFamily="34" charset="-122"/>
                 <a:cs typeface="Trebuchet MS" pitchFamily="34" charset="-120"/>
               </a:rPr>
-              <a:t>Morphemes</a:t>
+              <a:t>Syllables</a:t>
             </a:r>
             <a:endParaRPr lang="en-US" sz="1100" dirty="0"/>
           </a:p>
@@ -28558,13 +29368,13 @@
       </p:sp>
       <p:sp>
         <p:nvSpPr>
-          <p:cNvPr id="16" name="Shape 14"/>
-          <p:cNvSpPr/>
-          <p:nvPr/>
-        </p:nvSpPr>
-        <p:spPr>
-          <a:xfrm>
-            <a:off x="1874520" y="2240280"/>
+          <p:cNvPr id="20" name="Shape 18"/>
+          <p:cNvSpPr/>
+          <p:nvPr/>
+        </p:nvSpPr>
+        <p:spPr>
+          <a:xfrm>
+            <a:off x="1874520" y="3273552"/>
             <a:ext cx="6903720" cy="658368"/>
           </a:xfrm>
           <a:prstGeom prst="rect">
@@ -28585,13 +29395,13 @@
       </p:sp>
       <p:sp>
         <p:nvSpPr>
-          <p:cNvPr id="17" name="Text 15"/>
-          <p:cNvSpPr/>
-          <p:nvPr/>
-        </p:nvSpPr>
-        <p:spPr>
-          <a:xfrm>
-            <a:off x="1874520" y="2240280"/>
+          <p:cNvPr id="21" name="Text 19"/>
+          <p:cNvSpPr/>
+          <p:nvPr/>
+        </p:nvSpPr>
+        <p:spPr>
+          <a:xfrm>
+            <a:off x="1874520" y="3273552"/>
             <a:ext cx="6903720" cy="658368"/>
           </a:xfrm>
           <a:prstGeom prst="rect">
@@ -28624,13 +29434,13 @@
       </p:sp>
       <p:sp>
         <p:nvSpPr>
-          <p:cNvPr id="18" name="Shape 16"/>
-          <p:cNvSpPr/>
-          <p:nvPr/>
-        </p:nvSpPr>
-        <p:spPr>
-          <a:xfrm>
-            <a:off x="365760" y="3182112"/>
+          <p:cNvPr id="22" name="Shape 20"/>
+          <p:cNvSpPr/>
+          <p:nvPr/>
+        </p:nvSpPr>
+        <p:spPr>
+          <a:xfrm>
+            <a:off x="365760" y="4096512"/>
             <a:ext cx="1371600" cy="658368"/>
           </a:xfrm>
           <a:prstGeom prst="rect">
@@ -28651,13 +29461,13 @@
       </p:sp>
       <p:sp>
         <p:nvSpPr>
-          <p:cNvPr id="19" name="Text 17"/>
-          <p:cNvSpPr/>
-          <p:nvPr/>
-        </p:nvSpPr>
-        <p:spPr>
-          <a:xfrm>
-            <a:off x="365760" y="3182112"/>
+          <p:cNvPr id="23" name="Text 21"/>
+          <p:cNvSpPr/>
+          <p:nvPr/>
+        </p:nvSpPr>
+        <p:spPr>
+          <a:xfrm>
+            <a:off x="365760" y="4096512"/>
             <a:ext cx="1371600" cy="658368"/>
           </a:xfrm>
           <a:prstGeom prst="rect">
@@ -28682,7 +29492,7 @@
                 <a:ea typeface="Trebuchet MS" pitchFamily="34" charset="-122"/>
                 <a:cs typeface="Trebuchet MS" pitchFamily="34" charset="-120"/>
               </a:rPr>
-              <a:t>Syllables</a:t>
+              <a:t>Phonemes</a:t>
             </a:r>
             <a:endParaRPr lang="en-US" sz="1100" dirty="0"/>
           </a:p>
@@ -28690,13 +29500,13 @@
       </p:sp>
       <p:sp>
         <p:nvSpPr>
-          <p:cNvPr id="20" name="Shape 18"/>
-          <p:cNvSpPr/>
-          <p:nvPr/>
-        </p:nvSpPr>
-        <p:spPr>
-          <a:xfrm>
-            <a:off x="1874520" y="3182112"/>
+          <p:cNvPr id="24" name="Shape 22"/>
+          <p:cNvSpPr/>
+          <p:nvPr/>
+        </p:nvSpPr>
+        <p:spPr>
+          <a:xfrm>
+            <a:off x="1874520" y="4096512"/>
             <a:ext cx="6903720" cy="658368"/>
           </a:xfrm>
           <a:prstGeom prst="rect">
@@ -28717,145 +29527,13 @@
       </p:sp>
       <p:sp>
         <p:nvSpPr>
-          <p:cNvPr id="21" name="Text 19"/>
-          <p:cNvSpPr/>
-          <p:nvPr/>
-        </p:nvSpPr>
-        <p:spPr>
-          <a:xfrm>
-            <a:off x="1874520" y="3182112"/>
-            <a:ext cx="6903720" cy="658368"/>
-          </a:xfrm>
-          <a:prstGeom prst="rect">
-            <a:avLst/>
-          </a:prstGeom>
-          <a:noFill/>
-          <a:ln/>
-        </p:spPr>
-        <p:txBody>
-          <a:bodyPr wrap="square" rtlCol="0" anchor="ctr"/>
-          <a:lstStyle/>
-          <a:p>
-            <a:pPr algn="ctr" indent="0" marL="0">
-              <a:buNone/>
-            </a:pPr>
-            <a:r>
-              <a:rPr lang="en-US" sz="1100" i="1" dirty="0">
-                <a:solidFill>
-                  <a:srgbClr val="CBD5E1"/>
-                </a:solidFill>
-                <a:latin typeface="Calibri" pitchFamily="34" charset="0"/>
-                <a:ea typeface="Calibri" pitchFamily="34" charset="-122"/>
-                <a:cs typeface="Calibri" pitchFamily="34" charset="-120"/>
-              </a:rPr>
-              <a:t>Write here...</a:t>
-            </a:r>
-            <a:endParaRPr lang="en-US" sz="1100" dirty="0"/>
-          </a:p>
-        </p:txBody>
-      </p:sp>
-      <p:sp>
-        <p:nvSpPr>
-          <p:cNvPr id="22" name="Shape 20"/>
-          <p:cNvSpPr/>
-          <p:nvPr/>
-        </p:nvSpPr>
-        <p:spPr>
-          <a:xfrm>
-            <a:off x="365760" y="4005072"/>
-            <a:ext cx="1371600" cy="658368"/>
-          </a:xfrm>
-          <a:prstGeom prst="rect">
-            <a:avLst>
-              <a:gd name="adj" fmla="val 8333"/>
-            </a:avLst>
-          </a:prstGeom>
-          <a:solidFill>
-            <a:srgbClr val="E2E8F0"/>
-          </a:solidFill>
-          <a:ln w="12700">
-            <a:solidFill>
-              <a:srgbClr val="E2E8F0"/>
-            </a:solidFill>
-            <a:prstDash val="solid"/>
-          </a:ln>
-        </p:spPr>
-      </p:sp>
-      <p:sp>
-        <p:nvSpPr>
-          <p:cNvPr id="23" name="Text 21"/>
-          <p:cNvSpPr/>
-          <p:nvPr/>
-        </p:nvSpPr>
-        <p:spPr>
-          <a:xfrm>
-            <a:off x="365760" y="4005072"/>
-            <a:ext cx="1371600" cy="658368"/>
-          </a:xfrm>
-          <a:prstGeom prst="rect">
-            <a:avLst/>
-          </a:prstGeom>
-          <a:noFill/>
-          <a:ln/>
-        </p:spPr>
-        <p:txBody>
-          <a:bodyPr wrap="square" lIns="0" tIns="0" rIns="0" bIns="0" rtlCol="0" anchor="ctr"/>
-          <a:lstStyle/>
-          <a:p>
-            <a:pPr algn="ctr" indent="0" marL="0">
-              <a:buNone/>
-            </a:pPr>
-            <a:r>
-              <a:rPr lang="en-US" sz="1100" b="1" dirty="0">
-                <a:solidFill>
-                  <a:srgbClr val="475569"/>
-                </a:solidFill>
-                <a:latin typeface="Trebuchet MS" pitchFamily="34" charset="0"/>
-                <a:ea typeface="Trebuchet MS" pitchFamily="34" charset="-122"/>
-                <a:cs typeface="Trebuchet MS" pitchFamily="34" charset="-120"/>
-              </a:rPr>
-              <a:t>Phonemes</a:t>
-            </a:r>
-            <a:endParaRPr lang="en-US" sz="1100" dirty="0"/>
-          </a:p>
-        </p:txBody>
-      </p:sp>
-      <p:sp>
-        <p:nvSpPr>
-          <p:cNvPr id="24" name="Shape 22"/>
-          <p:cNvSpPr/>
-          <p:nvPr/>
-        </p:nvSpPr>
-        <p:spPr>
-          <a:xfrm>
-            <a:off x="1874520" y="4005072"/>
-            <a:ext cx="6903720" cy="658368"/>
-          </a:xfrm>
-          <a:prstGeom prst="rect">
-            <a:avLst>
-              <a:gd name="adj" fmla="val 8333"/>
-            </a:avLst>
-          </a:prstGeom>
-          <a:solidFill>
-            <a:srgbClr val="F8FAFC"/>
-          </a:solidFill>
-          <a:ln w="12700">
-            <a:solidFill>
-              <a:srgbClr val="E2E8F0"/>
-            </a:solidFill>
-            <a:prstDash val="dash"/>
-          </a:ln>
-        </p:spPr>
-      </p:sp>
-      <p:sp>
-        <p:nvSpPr>
           <p:cNvPr id="25" name="Text 23"/>
           <p:cNvSpPr/>
           <p:nvPr/>
         </p:nvSpPr>
         <p:spPr>
           <a:xfrm>
-            <a:off x="1874520" y="4005072"/>
+            <a:off x="1874520" y="4096512"/>
             <a:ext cx="6903720" cy="658368"/>
           </a:xfrm>
           <a:prstGeom prst="rect">
@@ -29311,7 +29989,7 @@
                 <a:ea typeface="Trebuchet MS" pitchFamily="34" charset="-122"/>
                 <a:cs typeface="Trebuchet MS" pitchFamily="34" charset="-120"/>
               </a:rPr>
-              <a:t>rebuild</a:t>
+              <a:t>reprint</a:t>
             </a:r>
             <a:endParaRPr lang="en-US" sz="2800" dirty="0"/>
           </a:p>
@@ -29326,11 +30004,11 @@
         <p:spPr>
           <a:xfrm>
             <a:off x="365760" y="2240280"/>
-            <a:ext cx="1371600" cy="658368"/>
+            <a:ext cx="1371600" cy="841248"/>
           </a:xfrm>
           <a:prstGeom prst="rect">
             <a:avLst>
-              <a:gd name="adj" fmla="val 8333"/>
+              <a:gd name="adj" fmla="val 6522"/>
             </a:avLst>
           </a:prstGeom>
           <a:solidFill>
@@ -29353,7 +30031,7 @@
         <p:spPr>
           <a:xfrm>
             <a:off x="365760" y="2240280"/>
-            <a:ext cx="1371600" cy="658368"/>
+            <a:ext cx="1371600" cy="841248"/>
           </a:xfrm>
           <a:prstGeom prst="rect">
             <a:avLst/>
@@ -29392,11 +30070,11 @@
         <p:spPr>
           <a:xfrm>
             <a:off x="2938272" y="2258568"/>
-            <a:ext cx="1828800" cy="347472"/>
+            <a:ext cx="1828800" cy="292608"/>
           </a:xfrm>
           <a:prstGeom prst="rect">
             <a:avLst>
-              <a:gd name="adj" fmla="val 21053"/>
+              <a:gd name="adj" fmla="val 25000"/>
             </a:avLst>
           </a:prstGeom>
           <a:solidFill>
@@ -29426,7 +30104,7 @@
         <p:spPr>
           <a:xfrm>
             <a:off x="2938272" y="2258568"/>
-            <a:ext cx="1828800" cy="347472"/>
+            <a:ext cx="1828800" cy="292608"/>
           </a:xfrm>
           <a:prstGeom prst="rect">
             <a:avLst/>
@@ -29464,8 +30142,8 @@
         </p:nvSpPr>
         <p:spPr>
           <a:xfrm>
-            <a:off x="2938272" y="2624328"/>
-            <a:ext cx="1828800" cy="256032"/>
+            <a:off x="2938272" y="2569464"/>
+            <a:ext cx="1828800" cy="201168"/>
           </a:xfrm>
           <a:prstGeom prst="rect">
             <a:avLst/>
@@ -29504,11 +30182,11 @@
         <p:spPr>
           <a:xfrm>
             <a:off x="5803392" y="2258568"/>
-            <a:ext cx="1828800" cy="347472"/>
+            <a:ext cx="1828800" cy="292608"/>
           </a:xfrm>
           <a:prstGeom prst="rect">
             <a:avLst>
-              <a:gd name="adj" fmla="val 21053"/>
+              <a:gd name="adj" fmla="val 25000"/>
             </a:avLst>
           </a:prstGeom>
           <a:solidFill>
@@ -29538,7 +30216,7 @@
         <p:spPr>
           <a:xfrm>
             <a:off x="5803392" y="2258568"/>
-            <a:ext cx="1828800" cy="347472"/>
+            <a:ext cx="1828800" cy="292608"/>
           </a:xfrm>
           <a:prstGeom prst="rect">
             <a:avLst/>
@@ -29562,7 +30240,7 @@
                 <a:ea typeface="Trebuchet MS" pitchFamily="34" charset="-122"/>
                 <a:cs typeface="Trebuchet MS" pitchFamily="34" charset="-120"/>
               </a:rPr>
-              <a:t>build</a:t>
+              <a:t>print</a:t>
             </a:r>
             <a:endParaRPr lang="en-US" sz="1300" dirty="0"/>
           </a:p>
@@ -29576,8 +30254,8 @@
         </p:nvSpPr>
         <p:spPr>
           <a:xfrm>
-            <a:off x="5803392" y="2624328"/>
-            <a:ext cx="1828800" cy="256032"/>
+            <a:off x="5803392" y="2569464"/>
+            <a:ext cx="1828800" cy="201168"/>
           </a:xfrm>
           <a:prstGeom prst="rect">
             <a:avLst/>
@@ -29601,7 +30279,7 @@
                 <a:ea typeface="Calibri" pitchFamily="34" charset="-122"/>
                 <a:cs typeface="Calibri" pitchFamily="34" charset="-120"/>
               </a:rPr>
-              <a:t>to construct or make something</a:t>
+              <a:t>to produce text or images on paper</a:t>
             </a:r>
             <a:endParaRPr lang="en-US" sz="850" dirty="0"/>
           </a:p>
@@ -29615,7 +30293,7 @@
         </p:nvSpPr>
         <p:spPr>
           <a:xfrm>
-            <a:off x="365760" y="3182112"/>
+            <a:off x="365760" y="3273552"/>
             <a:ext cx="1371600" cy="658368"/>
           </a:xfrm>
           <a:prstGeom prst="rect">
@@ -29642,7 +30320,7 @@
         </p:nvSpPr>
         <p:spPr>
           <a:xfrm>
-            <a:off x="365760" y="3182112"/>
+            <a:off x="365760" y="3273552"/>
             <a:ext cx="1371600" cy="658368"/>
           </a:xfrm>
           <a:prstGeom prst="rect">
@@ -29681,7 +30359,7 @@
         </p:nvSpPr>
         <p:spPr>
           <a:xfrm>
-            <a:off x="1874520" y="3182112"/>
+            <a:off x="1874520" y="3273552"/>
             <a:ext cx="6903720" cy="658368"/>
           </a:xfrm>
           <a:prstGeom prst="rect">
@@ -29708,7 +30386,7 @@
         </p:nvSpPr>
         <p:spPr>
           <a:xfrm>
-            <a:off x="1874520" y="3182112"/>
+            <a:off x="1874520" y="3273552"/>
             <a:ext cx="6903720" cy="658368"/>
           </a:xfrm>
           <a:prstGeom prst="rect">
@@ -29747,7 +30425,7 @@
         </p:nvSpPr>
         <p:spPr>
           <a:xfrm>
-            <a:off x="365760" y="4005072"/>
+            <a:off x="365760" y="4096512"/>
             <a:ext cx="1371600" cy="658368"/>
           </a:xfrm>
           <a:prstGeom prst="rect">
@@ -29774,7 +30452,7 @@
         </p:nvSpPr>
         <p:spPr>
           <a:xfrm>
-            <a:off x="365760" y="4005072"/>
+            <a:off x="365760" y="4096512"/>
             <a:ext cx="1371600" cy="658368"/>
           </a:xfrm>
           <a:prstGeom prst="rect">
@@ -29813,7 +30491,7 @@
         </p:nvSpPr>
         <p:spPr>
           <a:xfrm>
-            <a:off x="1874520" y="4005072"/>
+            <a:off x="1874520" y="4096512"/>
             <a:ext cx="6903720" cy="658368"/>
           </a:xfrm>
           <a:prstGeom prst="rect">
@@ -29840,7 +30518,7 @@
         </p:nvSpPr>
         <p:spPr>
           <a:xfrm>
-            <a:off x="1874520" y="4005072"/>
+            <a:off x="1874520" y="4096512"/>
             <a:ext cx="6903720" cy="658368"/>
           </a:xfrm>
           <a:prstGeom prst="rect">
@@ -30296,7 +30974,7 @@
                 <a:ea typeface="Trebuchet MS" pitchFamily="34" charset="-122"/>
                 <a:cs typeface="Trebuchet MS" pitchFamily="34" charset="-120"/>
               </a:rPr>
-              <a:t>rebuild</a:t>
+              <a:t>reprint</a:t>
             </a:r>
             <a:endParaRPr lang="en-US" sz="2800" dirty="0"/>
           </a:p>
@@ -30311,11 +30989,11 @@
         <p:spPr>
           <a:xfrm>
             <a:off x="365760" y="2240280"/>
-            <a:ext cx="1371600" cy="658368"/>
+            <a:ext cx="1371600" cy="841248"/>
           </a:xfrm>
           <a:prstGeom prst="rect">
             <a:avLst>
-              <a:gd name="adj" fmla="val 8333"/>
+              <a:gd name="adj" fmla="val 6522"/>
             </a:avLst>
           </a:prstGeom>
           <a:solidFill>
@@ -30338,7 +31016,7 @@
         <p:spPr>
           <a:xfrm>
             <a:off x="365760" y="2240280"/>
-            <a:ext cx="1371600" cy="658368"/>
+            <a:ext cx="1371600" cy="841248"/>
           </a:xfrm>
           <a:prstGeom prst="rect">
             <a:avLst/>
@@ -30377,11 +31055,11 @@
         <p:spPr>
           <a:xfrm>
             <a:off x="2938272" y="2258568"/>
-            <a:ext cx="1828800" cy="347472"/>
+            <a:ext cx="1828800" cy="292608"/>
           </a:xfrm>
           <a:prstGeom prst="rect">
             <a:avLst>
-              <a:gd name="adj" fmla="val 21053"/>
+              <a:gd name="adj" fmla="val 25000"/>
             </a:avLst>
           </a:prstGeom>
           <a:solidFill>
@@ -30411,7 +31089,7 @@
         <p:spPr>
           <a:xfrm>
             <a:off x="2938272" y="2258568"/>
-            <a:ext cx="1828800" cy="347472"/>
+            <a:ext cx="1828800" cy="292608"/>
           </a:xfrm>
           <a:prstGeom prst="rect">
             <a:avLst/>
@@ -30449,8 +31127,8 @@
         </p:nvSpPr>
         <p:spPr>
           <a:xfrm>
-            <a:off x="2938272" y="2624328"/>
-            <a:ext cx="1828800" cy="256032"/>
+            <a:off x="2938272" y="2569464"/>
+            <a:ext cx="1828800" cy="201168"/>
           </a:xfrm>
           <a:prstGeom prst="rect">
             <a:avLst/>
@@ -30489,11 +31167,11 @@
         <p:spPr>
           <a:xfrm>
             <a:off x="5803392" y="2258568"/>
-            <a:ext cx="1828800" cy="347472"/>
+            <a:ext cx="1828800" cy="292608"/>
           </a:xfrm>
           <a:prstGeom prst="rect">
             <a:avLst>
-              <a:gd name="adj" fmla="val 21053"/>
+              <a:gd name="adj" fmla="val 25000"/>
             </a:avLst>
           </a:prstGeom>
           <a:solidFill>
@@ -30523,7 +31201,7 @@
         <p:spPr>
           <a:xfrm>
             <a:off x="5803392" y="2258568"/>
-            <a:ext cx="1828800" cy="347472"/>
+            <a:ext cx="1828800" cy="292608"/>
           </a:xfrm>
           <a:prstGeom prst="rect">
             <a:avLst/>
@@ -30547,7 +31225,7 @@
                 <a:ea typeface="Trebuchet MS" pitchFamily="34" charset="-122"/>
                 <a:cs typeface="Trebuchet MS" pitchFamily="34" charset="-120"/>
               </a:rPr>
-              <a:t>build</a:t>
+              <a:t>print</a:t>
             </a:r>
             <a:endParaRPr lang="en-US" sz="1300" dirty="0"/>
           </a:p>
@@ -30561,8 +31239,8 @@
         </p:nvSpPr>
         <p:spPr>
           <a:xfrm>
-            <a:off x="5803392" y="2624328"/>
-            <a:ext cx="1828800" cy="256032"/>
+            <a:off x="5803392" y="2569464"/>
+            <a:ext cx="1828800" cy="201168"/>
           </a:xfrm>
           <a:prstGeom prst="rect">
             <a:avLst/>
@@ -30586,7 +31264,7 @@
                 <a:ea typeface="Calibri" pitchFamily="34" charset="-122"/>
                 <a:cs typeface="Calibri" pitchFamily="34" charset="-120"/>
               </a:rPr>
-              <a:t>to construct or make something</a:t>
+              <a:t>to produce text or images on paper</a:t>
             </a:r>
             <a:endParaRPr lang="en-US" sz="850" dirty="0"/>
           </a:p>
@@ -30600,7 +31278,7 @@
         </p:nvSpPr>
         <p:spPr>
           <a:xfrm>
-            <a:off x="365760" y="3182112"/>
+            <a:off x="365760" y="3273552"/>
             <a:ext cx="1371600" cy="658368"/>
           </a:xfrm>
           <a:prstGeom prst="rect">
@@ -30627,7 +31305,7 @@
         </p:nvSpPr>
         <p:spPr>
           <a:xfrm>
-            <a:off x="365760" y="3182112"/>
+            <a:off x="365760" y="3273552"/>
             <a:ext cx="1371600" cy="658368"/>
           </a:xfrm>
           <a:prstGeom prst="rect">
@@ -30666,7 +31344,7 @@
         </p:nvSpPr>
         <p:spPr>
           <a:xfrm>
-            <a:off x="1874520" y="3182112"/>
+            <a:off x="1874520" y="3273552"/>
             <a:ext cx="6903720" cy="658368"/>
           </a:xfrm>
           <a:prstGeom prst="rect">
@@ -30693,7 +31371,7 @@
         </p:nvSpPr>
         <p:spPr>
           <a:xfrm>
-            <a:off x="2999232" y="3273552"/>
+            <a:off x="2999232" y="3364992"/>
             <a:ext cx="1645920" cy="475488"/>
           </a:xfrm>
           <a:prstGeom prst="rect">
@@ -30720,7 +31398,7 @@
         </p:nvSpPr>
         <p:spPr>
           <a:xfrm>
-            <a:off x="2999232" y="3273552"/>
+            <a:off x="2999232" y="3364992"/>
             <a:ext cx="1645920" cy="475488"/>
           </a:xfrm>
           <a:prstGeom prst="rect">
@@ -30759,7 +31437,7 @@
         </p:nvSpPr>
         <p:spPr>
           <a:xfrm>
-            <a:off x="4645152" y="3273552"/>
+            <a:off x="4645152" y="3364992"/>
             <a:ext cx="1097280" cy="475488"/>
           </a:xfrm>
           <a:prstGeom prst="rect">
@@ -30798,7 +31476,7 @@
         </p:nvSpPr>
         <p:spPr>
           <a:xfrm>
-            <a:off x="5742432" y="3273552"/>
+            <a:off x="5742432" y="3364992"/>
             <a:ext cx="1645920" cy="475488"/>
           </a:xfrm>
           <a:prstGeom prst="rect">
@@ -30825,7 +31503,7 @@
         </p:nvSpPr>
         <p:spPr>
           <a:xfrm>
-            <a:off x="5742432" y="3273552"/>
+            <a:off x="5742432" y="3364992"/>
             <a:ext cx="1645920" cy="475488"/>
           </a:xfrm>
           <a:prstGeom prst="rect">
@@ -30850,7 +31528,7 @@
                 <a:ea typeface="Trebuchet MS" pitchFamily="34" charset="-122"/>
                 <a:cs typeface="Trebuchet MS" pitchFamily="34" charset="-120"/>
               </a:rPr>
-              <a:t>build</a:t>
+              <a:t>print</a:t>
             </a:r>
             <a:endParaRPr lang="en-US" sz="1400" dirty="0"/>
           </a:p>
@@ -30864,7 +31542,7 @@
         </p:nvSpPr>
         <p:spPr>
           <a:xfrm>
-            <a:off x="365760" y="4005072"/>
+            <a:off x="365760" y="4096512"/>
             <a:ext cx="1371600" cy="658368"/>
           </a:xfrm>
           <a:prstGeom prst="rect">
@@ -30891,7 +31569,7 @@
         </p:nvSpPr>
         <p:spPr>
           <a:xfrm>
-            <a:off x="365760" y="4005072"/>
+            <a:off x="365760" y="4096512"/>
             <a:ext cx="1371600" cy="658368"/>
           </a:xfrm>
           <a:prstGeom prst="rect">
@@ -30930,7 +31608,7 @@
         </p:nvSpPr>
         <p:spPr>
           <a:xfrm>
-            <a:off x="1874520" y="4005072"/>
+            <a:off x="1874520" y="4096512"/>
             <a:ext cx="6903720" cy="658368"/>
           </a:xfrm>
           <a:prstGeom prst="rect">
@@ -30957,7 +31635,7 @@
         </p:nvSpPr>
         <p:spPr>
           <a:xfrm>
-            <a:off x="1874520" y="4005072"/>
+            <a:off x="1874520" y="4096512"/>
             <a:ext cx="6903720" cy="658368"/>
           </a:xfrm>
           <a:prstGeom prst="rect">
@@ -31413,7 +32091,7 @@
                 <a:ea typeface="Trebuchet MS" pitchFamily="34" charset="-122"/>
                 <a:cs typeface="Trebuchet MS" pitchFamily="34" charset="-120"/>
               </a:rPr>
-              <a:t>rebuild</a:t>
+              <a:t>reprint</a:t>
             </a:r>
             <a:endParaRPr lang="en-US" sz="2800" dirty="0"/>
           </a:p>
@@ -31428,11 +32106,11 @@
         <p:spPr>
           <a:xfrm>
             <a:off x="365760" y="2240280"/>
-            <a:ext cx="1371600" cy="658368"/>
+            <a:ext cx="1371600" cy="841248"/>
           </a:xfrm>
           <a:prstGeom prst="rect">
             <a:avLst>
-              <a:gd name="adj" fmla="val 8333"/>
+              <a:gd name="adj" fmla="val 6522"/>
             </a:avLst>
           </a:prstGeom>
           <a:solidFill>
@@ -31455,7 +32133,7 @@
         <p:spPr>
           <a:xfrm>
             <a:off x="365760" y="2240280"/>
-            <a:ext cx="1371600" cy="658368"/>
+            <a:ext cx="1371600" cy="841248"/>
           </a:xfrm>
           <a:prstGeom prst="rect">
             <a:avLst/>
@@ -31494,11 +32172,11 @@
         <p:spPr>
           <a:xfrm>
             <a:off x="2938272" y="2258568"/>
-            <a:ext cx="1828800" cy="347472"/>
+            <a:ext cx="1828800" cy="292608"/>
           </a:xfrm>
           <a:prstGeom prst="rect">
             <a:avLst>
-              <a:gd name="adj" fmla="val 21053"/>
+              <a:gd name="adj" fmla="val 25000"/>
             </a:avLst>
           </a:prstGeom>
           <a:solidFill>
@@ -31528,7 +32206,7 @@
         <p:spPr>
           <a:xfrm>
             <a:off x="2938272" y="2258568"/>
-            <a:ext cx="1828800" cy="347472"/>
+            <a:ext cx="1828800" cy="292608"/>
           </a:xfrm>
           <a:prstGeom prst="rect">
             <a:avLst/>
@@ -31566,8 +32244,8 @@
         </p:nvSpPr>
         <p:spPr>
           <a:xfrm>
-            <a:off x="2938272" y="2624328"/>
-            <a:ext cx="1828800" cy="256032"/>
+            <a:off x="2938272" y="2569464"/>
+            <a:ext cx="1828800" cy="201168"/>
           </a:xfrm>
           <a:prstGeom prst="rect">
             <a:avLst/>
@@ -31606,11 +32284,11 @@
         <p:spPr>
           <a:xfrm>
             <a:off x="5803392" y="2258568"/>
-            <a:ext cx="1828800" cy="347472"/>
+            <a:ext cx="1828800" cy="292608"/>
           </a:xfrm>
           <a:prstGeom prst="rect">
             <a:avLst>
-              <a:gd name="adj" fmla="val 21053"/>
+              <a:gd name="adj" fmla="val 25000"/>
             </a:avLst>
           </a:prstGeom>
           <a:solidFill>
@@ -31640,7 +32318,7 @@
         <p:spPr>
           <a:xfrm>
             <a:off x="5803392" y="2258568"/>
-            <a:ext cx="1828800" cy="347472"/>
+            <a:ext cx="1828800" cy="292608"/>
           </a:xfrm>
           <a:prstGeom prst="rect">
             <a:avLst/>
@@ -31664,7 +32342,7 @@
                 <a:ea typeface="Trebuchet MS" pitchFamily="34" charset="-122"/>
                 <a:cs typeface="Trebuchet MS" pitchFamily="34" charset="-120"/>
               </a:rPr>
-              <a:t>build</a:t>
+              <a:t>print</a:t>
             </a:r>
             <a:endParaRPr lang="en-US" sz="1300" dirty="0"/>
           </a:p>
@@ -31678,8 +32356,8 @@
         </p:nvSpPr>
         <p:spPr>
           <a:xfrm>
-            <a:off x="5803392" y="2624328"/>
-            <a:ext cx="1828800" cy="256032"/>
+            <a:off x="5803392" y="2569464"/>
+            <a:ext cx="1828800" cy="201168"/>
           </a:xfrm>
           <a:prstGeom prst="rect">
             <a:avLst/>
@@ -31703,7 +32381,7 @@
                 <a:ea typeface="Calibri" pitchFamily="34" charset="-122"/>
                 <a:cs typeface="Calibri" pitchFamily="34" charset="-120"/>
               </a:rPr>
-              <a:t>to construct or make something</a:t>
+              <a:t>to produce text or images on paper</a:t>
             </a:r>
             <a:endParaRPr lang="en-US" sz="850" dirty="0"/>
           </a:p>
@@ -31717,7 +32395,7 @@
         </p:nvSpPr>
         <p:spPr>
           <a:xfrm>
-            <a:off x="365760" y="3182112"/>
+            <a:off x="365760" y="3273552"/>
             <a:ext cx="1371600" cy="658368"/>
           </a:xfrm>
           <a:prstGeom prst="rect">
@@ -31744,7 +32422,7 @@
         </p:nvSpPr>
         <p:spPr>
           <a:xfrm>
-            <a:off x="365760" y="3182112"/>
+            <a:off x="365760" y="3273552"/>
             <a:ext cx="1371600" cy="658368"/>
           </a:xfrm>
           <a:prstGeom prst="rect">
@@ -31783,7 +32461,7 @@
         </p:nvSpPr>
         <p:spPr>
           <a:xfrm>
-            <a:off x="1874520" y="3182112"/>
+            <a:off x="1874520" y="3273552"/>
             <a:ext cx="6903720" cy="658368"/>
           </a:xfrm>
           <a:prstGeom prst="rect">
@@ -31810,7 +32488,7 @@
         </p:nvSpPr>
         <p:spPr>
           <a:xfrm>
-            <a:off x="2999232" y="3273552"/>
+            <a:off x="2999232" y="3364992"/>
             <a:ext cx="1645920" cy="475488"/>
           </a:xfrm>
           <a:prstGeom prst="rect">
@@ -31837,7 +32515,7 @@
         </p:nvSpPr>
         <p:spPr>
           <a:xfrm>
-            <a:off x="2999232" y="3273552"/>
+            <a:off x="2999232" y="3364992"/>
             <a:ext cx="1645920" cy="475488"/>
           </a:xfrm>
           <a:prstGeom prst="rect">
@@ -31876,7 +32554,7 @@
         </p:nvSpPr>
         <p:spPr>
           <a:xfrm>
-            <a:off x="4645152" y="3273552"/>
+            <a:off x="4645152" y="3364992"/>
             <a:ext cx="1097280" cy="475488"/>
           </a:xfrm>
           <a:prstGeom prst="rect">
@@ -31915,7 +32593,7 @@
         </p:nvSpPr>
         <p:spPr>
           <a:xfrm>
-            <a:off x="5742432" y="3273552"/>
+            <a:off x="5742432" y="3364992"/>
             <a:ext cx="1645920" cy="475488"/>
           </a:xfrm>
           <a:prstGeom prst="rect">
@@ -31942,7 +32620,7 @@
         </p:nvSpPr>
         <p:spPr>
           <a:xfrm>
-            <a:off x="5742432" y="3273552"/>
+            <a:off x="5742432" y="3364992"/>
             <a:ext cx="1645920" cy="475488"/>
           </a:xfrm>
           <a:prstGeom prst="rect">
@@ -31967,7 +32645,7 @@
                 <a:ea typeface="Trebuchet MS" pitchFamily="34" charset="-122"/>
                 <a:cs typeface="Trebuchet MS" pitchFamily="34" charset="-120"/>
               </a:rPr>
-              <a:t>build</a:t>
+              <a:t>print</a:t>
             </a:r>
             <a:endParaRPr lang="en-US" sz="1400" dirty="0"/>
           </a:p>
@@ -31981,7 +32659,7 @@
         </p:nvSpPr>
         <p:spPr>
           <a:xfrm>
-            <a:off x="365760" y="4005072"/>
+            <a:off x="365760" y="4096512"/>
             <a:ext cx="1371600" cy="658368"/>
           </a:xfrm>
           <a:prstGeom prst="rect">
@@ -32008,7 +32686,7 @@
         </p:nvSpPr>
         <p:spPr>
           <a:xfrm>
-            <a:off x="365760" y="4005072"/>
+            <a:off x="365760" y="4096512"/>
             <a:ext cx="1371600" cy="658368"/>
           </a:xfrm>
           <a:prstGeom prst="rect">
@@ -32047,7 +32725,7 @@
         </p:nvSpPr>
         <p:spPr>
           <a:xfrm>
-            <a:off x="1874520" y="4005072"/>
+            <a:off x="1874520" y="4096512"/>
             <a:ext cx="6903720" cy="658368"/>
           </a:xfrm>
           <a:prstGeom prst="rect">
@@ -32074,7 +32752,7 @@
         </p:nvSpPr>
         <p:spPr>
           <a:xfrm>
-            <a:off x="2254649" y="4096512"/>
+            <a:off x="2124837" y="4187952"/>
             <a:ext cx="685800" cy="475488"/>
           </a:xfrm>
           <a:prstGeom prst="rect">
@@ -32101,7 +32779,7 @@
         </p:nvSpPr>
         <p:spPr>
           <a:xfrm>
-            <a:off x="2254649" y="4096512"/>
+            <a:off x="2124837" y="4187952"/>
             <a:ext cx="685800" cy="475488"/>
           </a:xfrm>
           <a:prstGeom prst="rect">
@@ -32140,7 +32818,7 @@
         </p:nvSpPr>
         <p:spPr>
           <a:xfrm>
-            <a:off x="3293146" y="4096512"/>
+            <a:off x="3033522" y="4187952"/>
             <a:ext cx="685800" cy="475488"/>
           </a:xfrm>
           <a:prstGeom prst="rect">
@@ -32167,7 +32845,7 @@
         </p:nvSpPr>
         <p:spPr>
           <a:xfrm>
-            <a:off x="3293146" y="4096512"/>
+            <a:off x="3033522" y="4187952"/>
             <a:ext cx="685800" cy="475488"/>
           </a:xfrm>
           <a:prstGeom prst="rect">
@@ -32206,7 +32884,7 @@
         </p:nvSpPr>
         <p:spPr>
           <a:xfrm>
-            <a:off x="4331643" y="4096512"/>
+            <a:off x="3942207" y="4187952"/>
             <a:ext cx="685800" cy="475488"/>
           </a:xfrm>
           <a:prstGeom prst="rect">
@@ -32233,7 +32911,7 @@
         </p:nvSpPr>
         <p:spPr>
           <a:xfrm>
-            <a:off x="4331643" y="4096512"/>
+            <a:off x="3942207" y="4187952"/>
             <a:ext cx="685800" cy="475488"/>
           </a:xfrm>
           <a:prstGeom prst="rect">
@@ -32258,7 +32936,7 @@
                 <a:ea typeface="Trebuchet MS" pitchFamily="34" charset="-122"/>
                 <a:cs typeface="Trebuchet MS" pitchFamily="34" charset="-120"/>
               </a:rPr>
-              <a:t>b</a:t>
+              <a:t>p</a:t>
             </a:r>
             <a:endParaRPr lang="en-US" sz="900" dirty="0"/>
           </a:p>
@@ -32272,7 +32950,7 @@
         </p:nvSpPr>
         <p:spPr>
           <a:xfrm>
-            <a:off x="5370141" y="4096512"/>
+            <a:off x="4850892" y="4187952"/>
             <a:ext cx="685800" cy="475488"/>
           </a:xfrm>
           <a:prstGeom prst="rect">
@@ -32299,7 +32977,7 @@
         </p:nvSpPr>
         <p:spPr>
           <a:xfrm>
-            <a:off x="5370141" y="4096512"/>
+            <a:off x="4850892" y="4187952"/>
             <a:ext cx="685800" cy="475488"/>
           </a:xfrm>
           <a:prstGeom prst="rect">
@@ -32324,7 +33002,7 @@
                 <a:ea typeface="Trebuchet MS" pitchFamily="34" charset="-122"/>
                 <a:cs typeface="Trebuchet MS" pitchFamily="34" charset="-120"/>
               </a:rPr>
-              <a:t>i</a:t>
+              <a:t>r</a:t>
             </a:r>
             <a:endParaRPr lang="en-US" sz="900" dirty="0"/>
           </a:p>
@@ -32338,7 +33016,7 @@
         </p:nvSpPr>
         <p:spPr>
           <a:xfrm>
-            <a:off x="6408638" y="4096512"/>
+            <a:off x="5759577" y="4187952"/>
             <a:ext cx="685800" cy="475488"/>
           </a:xfrm>
           <a:prstGeom prst="rect">
@@ -32365,7 +33043,7 @@
         </p:nvSpPr>
         <p:spPr>
           <a:xfrm>
-            <a:off x="6408638" y="4096512"/>
+            <a:off x="5759577" y="4187952"/>
             <a:ext cx="685800" cy="475488"/>
           </a:xfrm>
           <a:prstGeom prst="rect">
@@ -32390,7 +33068,7 @@
                 <a:ea typeface="Trebuchet MS" pitchFamily="34" charset="-122"/>
                 <a:cs typeface="Trebuchet MS" pitchFamily="34" charset="-120"/>
               </a:rPr>
-              <a:t>l</a:t>
+              <a:t>i</a:t>
             </a:r>
             <a:endParaRPr lang="en-US" sz="900" dirty="0"/>
           </a:p>
@@ -32404,7 +33082,7 @@
         </p:nvSpPr>
         <p:spPr>
           <a:xfrm>
-            <a:off x="7447135" y="4096512"/>
+            <a:off x="6668262" y="4187952"/>
             <a:ext cx="685800" cy="475488"/>
           </a:xfrm>
           <a:prstGeom prst="rect">
@@ -32431,7 +33109,7 @@
         </p:nvSpPr>
         <p:spPr>
           <a:xfrm>
-            <a:off x="7447135" y="4096512"/>
+            <a:off x="6668262" y="4187952"/>
             <a:ext cx="685800" cy="475488"/>
           </a:xfrm>
           <a:prstGeom prst="rect">
@@ -32456,7 +33134,73 @@
                 <a:ea typeface="Trebuchet MS" pitchFamily="34" charset="-122"/>
                 <a:cs typeface="Trebuchet MS" pitchFamily="34" charset="-120"/>
               </a:rPr>
-              <a:t>d</a:t>
+              <a:t>n</a:t>
+            </a:r>
+            <a:endParaRPr lang="en-US" sz="900" dirty="0"/>
+          </a:p>
+        </p:txBody>
+      </p:sp>
+      <p:sp>
+        <p:nvSpPr>
+          <p:cNvPr id="45" name="Shape 43"/>
+          <p:cNvSpPr/>
+          <p:nvPr/>
+        </p:nvSpPr>
+        <p:spPr>
+          <a:xfrm>
+            <a:off x="7576947" y="4187952"/>
+            <a:ext cx="685800" cy="475488"/>
+          </a:xfrm>
+          <a:prstGeom prst="rect">
+            <a:avLst>
+              <a:gd name="adj" fmla="val 7692"/>
+            </a:avLst>
+          </a:prstGeom>
+          <a:solidFill>
+            <a:srgbClr val="FFFFFF"/>
+          </a:solidFill>
+          <a:ln w="12700">
+            <a:solidFill>
+              <a:srgbClr val="DB2777"/>
+            </a:solidFill>
+            <a:prstDash val="solid"/>
+          </a:ln>
+        </p:spPr>
+      </p:sp>
+      <p:sp>
+        <p:nvSpPr>
+          <p:cNvPr id="46" name="Text 44"/>
+          <p:cNvSpPr/>
+          <p:nvPr/>
+        </p:nvSpPr>
+        <p:spPr>
+          <a:xfrm>
+            <a:off x="7576947" y="4187952"/>
+            <a:ext cx="685800" cy="475488"/>
+          </a:xfrm>
+          <a:prstGeom prst="rect">
+            <a:avLst/>
+          </a:prstGeom>
+          <a:noFill/>
+          <a:ln/>
+        </p:spPr>
+        <p:txBody>
+          <a:bodyPr wrap="square" lIns="0" tIns="0" rIns="0" bIns="0" rtlCol="0" anchor="ctr"/>
+          <a:lstStyle/>
+          <a:p>
+            <a:pPr algn="ctr" indent="0" marL="0">
+              <a:buNone/>
+            </a:pPr>
+            <a:r>
+              <a:rPr lang="en-US" sz="900" b="1" dirty="0">
+                <a:solidFill>
+                  <a:srgbClr val="9D174D"/>
+                </a:solidFill>
+                <a:latin typeface="Trebuchet MS" pitchFamily="34" charset="0"/>
+                <a:ea typeface="Trebuchet MS" pitchFamily="34" charset="-122"/>
+                <a:cs typeface="Trebuchet MS" pitchFamily="34" charset="-120"/>
+              </a:rPr>
+              <a:t>t</a:t>
             </a:r>
             <a:endParaRPr lang="en-US" sz="900" dirty="0"/>
           </a:p>
@@ -35393,7 +36137,7 @@
                 <a:ea typeface="Trebuchet MS" pitchFamily="34" charset="-122"/>
                 <a:cs typeface="Trebuchet MS" pitchFamily="34" charset="-120"/>
               </a:rPr>
-              <a:t>reuse</a:t>
+              <a:t>return</a:t>
             </a:r>
             <a:endParaRPr lang="en-US" sz="1200" dirty="0"/>
           </a:p>
@@ -35459,7 +36203,7 @@
                 <a:ea typeface="Trebuchet MS" pitchFamily="34" charset="-122"/>
                 <a:cs typeface="Trebuchet MS" pitchFamily="34" charset="-120"/>
               </a:rPr>
-              <a:t>remind</a:t>
+              <a:t>recycle</a:t>
             </a:r>
             <a:endParaRPr lang="en-US" sz="1200" dirty="0"/>
           </a:p>
@@ -35525,7 +36269,7 @@
                 <a:ea typeface="Trebuchet MS" pitchFamily="34" charset="-122"/>
                 <a:cs typeface="Trebuchet MS" pitchFamily="34" charset="-120"/>
               </a:rPr>
-              <a:t>recycle</a:t>
+              <a:t>remind</a:t>
             </a:r>
             <a:endParaRPr lang="en-US" sz="1200" dirty="0"/>
           </a:p>
@@ -36713,7 +37457,7 @@
                 <a:ea typeface="Calibri" pitchFamily="34" charset="-122"/>
                 <a:cs typeface="Calibri" pitchFamily="34" charset="-120"/>
               </a:rPr>
-              <a:t>1.  The prefix 're-' means to do something again or to go back.</a:t>
+              <a:t>1.  The prefix 're-' means to do something again or go back.</a:t>
             </a:r>
             <a:endParaRPr lang="en-US" sz="1300" dirty="0"/>
           </a:p>
@@ -36852,7 +37596,7 @@
                 <a:ea typeface="Calibri" pitchFamily="34" charset="-122"/>
                 <a:cs typeface="Calibri" pitchFamily="34" charset="-120"/>
               </a:rPr>
-              <a:t>2.  The word 'red' contains the prefix 're-' meaning again.</a:t>
+              <a:t>2.  The prefix 're-' comes from a Greek word.</a:t>
             </a:r>
             <a:endParaRPr lang="en-US" sz="1300" dirty="0"/>
           </a:p>
@@ -36991,7 +37735,7 @@
                 <a:ea typeface="Calibri" pitchFamily="34" charset="-122"/>
                 <a:cs typeface="Calibri" pitchFamily="34" charset="-120"/>
               </a:rPr>
-              <a:t>3.  Adding 're-' to the word 'build' makes the word 'rebuild', meaning to build again.</a:t>
+              <a:t>3.  The word 'rebuild' uses the prefix 're-' to mean build again.</a:t>
             </a:r>
             <a:endParaRPr lang="en-US" sz="1300" dirty="0"/>
           </a:p>
@@ -37130,7 +37874,7 @@
                 <a:ea typeface="Calibri" pitchFamily="34" charset="-122"/>
                 <a:cs typeface="Calibri" pitchFamily="34" charset="-120"/>
               </a:rPr>
-              <a:t>4.  The prefix 're-' comes from Latin.</a:t>
+              <a:t>4.  Adding 're-' to a word always changes its base meaning completely.</a:t>
             </a:r>
             <a:endParaRPr lang="en-US" sz="1300" dirty="0"/>
           </a:p>
@@ -37153,11 +37897,11 @@
             </a:avLst>
           </a:prstGeom>
           <a:solidFill>
-            <a:srgbClr val="DCFCE7"/>
-          </a:solidFill>
-          <a:ln w="12700">
-            <a:solidFill>
-              <a:srgbClr val="16A34A"/>
+            <a:srgbClr val="FEE2E2"/>
+          </a:solidFill>
+          <a:ln w="12700">
+            <a:solidFill>
+              <a:srgbClr val="DC2626"/>
             </a:solidFill>
             <a:prstDash val="solid"/>
           </a:ln>
@@ -37190,13 +37934,13 @@
             <a:r>
               <a:rPr lang="en-US" sz="1100" b="1" dirty="0">
                 <a:solidFill>
-                  <a:srgbClr val="16A34A"/>
+                  <a:srgbClr val="DC2626"/>
                 </a:solidFill>
                 <a:latin typeface="Trebuchet MS" pitchFamily="34" charset="0"/>
                 <a:ea typeface="Trebuchet MS" pitchFamily="34" charset="-122"/>
                 <a:cs typeface="Trebuchet MS" pitchFamily="34" charset="-120"/>
               </a:rPr>
-              <a:t>TRUE</a:t>
+              <a:t>FALSE</a:t>
             </a:r>
             <a:endParaRPr lang="en-US" sz="1100" dirty="0"/>
           </a:p>
@@ -37269,7 +38013,7 @@
                 <a:ea typeface="Calibri" pitchFamily="34" charset="-122"/>
                 <a:cs typeface="Calibri" pitchFamily="34" charset="-120"/>
               </a:rPr>
-              <a:t>5.  The prefix 're-' means before or in front of.</a:t>
+              <a:t>5.  The prefix 're-' can be added to words like 'play', 'write', and 'connect'.</a:t>
             </a:r>
             <a:endParaRPr lang="en-US" sz="1300" dirty="0"/>
           </a:p>
@@ -37292,11 +38036,11 @@
             </a:avLst>
           </a:prstGeom>
           <a:solidFill>
-            <a:srgbClr val="FEE2E2"/>
-          </a:solidFill>
-          <a:ln w="12700">
-            <a:solidFill>
-              <a:srgbClr val="DC2626"/>
+            <a:srgbClr val="DCFCE7"/>
+          </a:solidFill>
+          <a:ln w="12700">
+            <a:solidFill>
+              <a:srgbClr val="16A34A"/>
             </a:solidFill>
             <a:prstDash val="solid"/>
           </a:ln>
@@ -37329,13 +38073,13 @@
             <a:r>
               <a:rPr lang="en-US" sz="1100" b="1" dirty="0">
                 <a:solidFill>
-                  <a:srgbClr val="DC2626"/>
+                  <a:srgbClr val="16A34A"/>
                 </a:solidFill>
                 <a:latin typeface="Trebuchet MS" pitchFamily="34" charset="0"/>
                 <a:ea typeface="Trebuchet MS" pitchFamily="34" charset="-122"/>
                 <a:cs typeface="Trebuchet MS" pitchFamily="34" charset="-120"/>
               </a:rPr>
-              <a:t>FALSE</a:t>
+              <a:t>TRUE</a:t>
             </a:r>
             <a:endParaRPr lang="en-US" sz="1100" dirty="0"/>
           </a:p>
@@ -38238,7 +38982,7 @@
                 <a:ea typeface="Trebuchet MS" pitchFamily="34" charset="-122"/>
                 <a:cs typeface="Trebuchet MS" pitchFamily="34" charset="-120"/>
               </a:rPr>
-              <a:t>reuse</a:t>
+              <a:t>return</a:t>
             </a:r>
             <a:endParaRPr lang="en-US" sz="1300" dirty="0"/>
           </a:p>
@@ -38304,7 +39048,7 @@
                 <a:ea typeface="Trebuchet MS" pitchFamily="34" charset="-122"/>
                 <a:cs typeface="Trebuchet MS" pitchFamily="34" charset="-120"/>
               </a:rPr>
-              <a:t>remind</a:t>
+              <a:t>recycle</a:t>
             </a:r>
             <a:endParaRPr lang="en-US" sz="1300" dirty="0"/>
           </a:p>
@@ -40687,7 +41431,7 @@
                 <a:ea typeface="Calibri" pitchFamily="34" charset="-122"/>
                 <a:cs typeface="Calibri" pitchFamily="34" charset="-120"/>
               </a:rPr>
-              <a:t>To join or link things together again after they have been separated.</a:t>
+              <a:t>To join or link things back together again.</a:t>
             </a:r>
             <a:endParaRPr lang="en-US" sz="1200" dirty="0"/>
           </a:p>
@@ -40826,7 +41570,7 @@
                 <a:ea typeface="Calibri" pitchFamily="34" charset="-122"/>
                 <a:cs typeface="Calibri" pitchFamily="34" charset="-120"/>
               </a:rPr>
-              <a:t>To play something again, like watching a goal happen a second time.</a:t>
+              <a:t>To play something again, like watching a goal in a match a second time.</a:t>
             </a:r>
             <a:endParaRPr lang="en-US" sz="1200" dirty="0"/>
           </a:p>
@@ -40965,7 +41709,7 @@
                 <a:ea typeface="Calibri" pitchFamily="34" charset="-122"/>
                 <a:cs typeface="Calibri" pitchFamily="34" charset="-120"/>
               </a:rPr>
-              <a:t>To help someone remember something they might have forgotten.</a:t>
+              <a:t>To process used materials so they can be used again.</a:t>
             </a:r>
             <a:endParaRPr lang="en-US" sz="1200" dirty="0"/>
           </a:p>
@@ -41104,7 +41848,7 @@
                 <a:ea typeface="Calibri" pitchFamily="34" charset="-122"/>
                 <a:cs typeface="Calibri" pitchFamily="34" charset="-120"/>
               </a:rPr>
-              <a:t>To build something again after it has been damaged or knocked down.</a:t>
+              <a:t>To build something again after it has been damaged or destroyed.</a:t>
             </a:r>
             <a:endParaRPr lang="en-US" sz="1200" dirty="0"/>
           </a:p>
@@ -41177,7 +41921,7 @@
                 <a:ea typeface="Trebuchet MS" pitchFamily="34" charset="-122"/>
                 <a:cs typeface="Trebuchet MS" pitchFamily="34" charset="-120"/>
               </a:rPr>
-              <a:t>reuse</a:t>
+              <a:t>return</a:t>
             </a:r>
             <a:endParaRPr lang="en-US" sz="1200" dirty="0"/>
           </a:p>
@@ -41243,7 +41987,7 @@
                 <a:ea typeface="Calibri" pitchFamily="34" charset="-122"/>
                 <a:cs typeface="Calibri" pitchFamily="34" charset="-120"/>
               </a:rPr>
-              <a:t>To use something again instead of throwing it away.</a:t>
+              <a:t>To go back to a place or give something back to someone.</a:t>
             </a:r>
             <a:endParaRPr lang="en-US" sz="1200" dirty="0"/>
           </a:p>
@@ -41316,7 +42060,7 @@
                 <a:ea typeface="Trebuchet MS" pitchFamily="34" charset="-122"/>
                 <a:cs typeface="Trebuchet MS" pitchFamily="34" charset="-120"/>
               </a:rPr>
-              <a:t>remind</a:t>
+              <a:t>recycle</a:t>
             </a:r>
             <a:endParaRPr lang="en-US" sz="1200" dirty="0"/>
           </a:p>
@@ -41877,7 +42621,7 @@
                 <a:ea typeface="Calibri" pitchFamily="34" charset="-122"/>
                 <a:cs typeface="Calibri" pitchFamily="34" charset="-120"/>
               </a:rPr>
-              <a:t>After the storm, the council decided to rebuild the playground so the children could use it again.</a:t>
+              <a:t>After the storm, the community worked together to rebuild the old fence.</a:t>
             </a:r>
             <a:endParaRPr lang="en-US" sz="1500" dirty="0"/>
           </a:p>
@@ -42041,7 +42785,7 @@
                 <a:ea typeface="Calibri" pitchFamily="34" charset="-122"/>
                 <a:cs typeface="Calibri" pitchFamily="34" charset="-120"/>
               </a:rPr>
-              <a:t>The teacher asked Jake to rewrite his story because some of the sentences were unclear.</a:t>
+              <a:t>Our teacher asked us to rewrite our stories and check for mistakes.</a:t>
             </a:r>
             <a:endParaRPr lang="en-US" sz="1500" dirty="0"/>
           </a:p>
@@ -42205,7 +42949,7 @@
                 <a:ea typeface="Calibri" pitchFamily="34" charset="-122"/>
                 <a:cs typeface="Calibri" pitchFamily="34" charset="-120"/>
               </a:rPr>
-              <a:t>We watched the replay of the match to see exactly how the winning goal was scored.</a:t>
+              <a:t>Mia pressed the button to replay her favourite part of the video.</a:t>
             </a:r>
             <a:endParaRPr lang="en-US" sz="1500" dirty="0"/>
           </a:p>
